--- a/redis/redis分享.pptx
+++ b/redis/redis分享.pptx
@@ -1,11 +1,11 @@
 
 <file path=ppt/presentation.xml><?xml version="1.0" encoding="utf-8"?>
-<p:presentation xmlns:a="http://schemas.openxmlformats.org/drawingml/2006/main" xmlns:r="http://schemas.openxmlformats.org/officeDocument/2006/relationships" xmlns:p="http://schemas.openxmlformats.org/presentationml/2006/main">
+<p:presentation xmlns:a="http://schemas.openxmlformats.org/drawingml/2006/main" xmlns:r="http://schemas.openxmlformats.org/officeDocument/2006/relationships" xmlns:p="http://schemas.openxmlformats.org/presentationml/2006/main" saveSubsetFonts="1">
   <p:sldMasterIdLst>
     <p:sldMasterId id="2147483648" r:id="rId1"/>
   </p:sldMasterIdLst>
   <p:notesMasterIdLst>
-    <p:notesMasterId r:id="rId31"/>
+    <p:notesMasterId r:id="rId40"/>
   </p:notesMasterIdLst>
   <p:sldIdLst>
     <p:sldId id="256" r:id="rId2"/>
@@ -21,22 +21,31 @@
     <p:sldId id="284" r:id="rId12"/>
     <p:sldId id="263" r:id="rId13"/>
     <p:sldId id="265" r:id="rId14"/>
-    <p:sldId id="273" r:id="rId15"/>
-    <p:sldId id="279" r:id="rId16"/>
-    <p:sldId id="281" r:id="rId17"/>
-    <p:sldId id="288" r:id="rId18"/>
-    <p:sldId id="289" r:id="rId19"/>
-    <p:sldId id="269" r:id="rId20"/>
-    <p:sldId id="270" r:id="rId21"/>
-    <p:sldId id="271" r:id="rId22"/>
-    <p:sldId id="280" r:id="rId23"/>
-    <p:sldId id="272" r:id="rId24"/>
-    <p:sldId id="278" r:id="rId25"/>
-    <p:sldId id="274" r:id="rId26"/>
-    <p:sldId id="276" r:id="rId27"/>
-    <p:sldId id="285" r:id="rId28"/>
-    <p:sldId id="286" r:id="rId29"/>
-    <p:sldId id="287" r:id="rId30"/>
+    <p:sldId id="292" r:id="rId15"/>
+    <p:sldId id="293" r:id="rId16"/>
+    <p:sldId id="294" r:id="rId17"/>
+    <p:sldId id="295" r:id="rId18"/>
+    <p:sldId id="297" r:id="rId19"/>
+    <p:sldId id="296" r:id="rId20"/>
+    <p:sldId id="298" r:id="rId21"/>
+    <p:sldId id="290" r:id="rId22"/>
+    <p:sldId id="273" r:id="rId23"/>
+    <p:sldId id="279" r:id="rId24"/>
+    <p:sldId id="281" r:id="rId25"/>
+    <p:sldId id="288" r:id="rId26"/>
+    <p:sldId id="289" r:id="rId27"/>
+    <p:sldId id="269" r:id="rId28"/>
+    <p:sldId id="270" r:id="rId29"/>
+    <p:sldId id="291" r:id="rId30"/>
+    <p:sldId id="271" r:id="rId31"/>
+    <p:sldId id="280" r:id="rId32"/>
+    <p:sldId id="272" r:id="rId33"/>
+    <p:sldId id="278" r:id="rId34"/>
+    <p:sldId id="274" r:id="rId35"/>
+    <p:sldId id="276" r:id="rId36"/>
+    <p:sldId id="285" r:id="rId37"/>
+    <p:sldId id="286" r:id="rId38"/>
+    <p:sldId id="287" r:id="rId39"/>
   </p:sldIdLst>
   <p:sldSz cx="9144000" cy="6858000" type="screen4x3"/>
   <p:notesSz cx="6858000" cy="9144000"/>
@@ -137,7 +146,7 @@
   </p:defaultTextStyle>
   <p:extLst>
     <p:ext uri="{EFAFB233-063F-42B5-8137-9DF3F51BA10A}">
-      <p15:sldGuideLst xmlns:p15="http://schemas.microsoft.com/office/powerpoint/2012/main" xmlns="">
+      <p15:sldGuideLst xmlns:p15="http://schemas.microsoft.com/office/powerpoint/2012/main">
         <p15:guide id="1" orient="horz" pos="2160">
           <p15:clr>
             <a:srgbClr val="A4A3A4"/>
@@ -408,7 +417,7 @@
     </p:spTree>
     <p:extLst>
       <p:ext uri="{BB962C8B-B14F-4D97-AF65-F5344CB8AC3E}">
-        <p14:creationId xmlns:p14="http://schemas.microsoft.com/office/powerpoint/2010/main" xmlns="" val="54032391"/>
+        <p14:creationId xmlns:p14="http://schemas.microsoft.com/office/powerpoint/2010/main" val="54032391"/>
       </p:ext>
     </p:extLst>
   </p:cSld>
@@ -576,6 +585,50 @@
             <a:endParaRPr lang="en-US" altLang="zh-CN" dirty="0" smtClean="0"/>
           </a:p>
           <a:p>
+            <a:r>
+              <a:rPr lang="zh-CN" altLang="en-US" sz="1200" b="0" i="0" kern="1200" dirty="0" smtClean="0">
+                <a:solidFill>
+                  <a:schemeClr val="tx1"/>
+                </a:solidFill>
+                <a:effectLst/>
+                <a:latin typeface="+mn-lt"/>
+                <a:ea typeface="+mn-ea"/>
+                <a:cs typeface="+mn-cs"/>
+              </a:rPr>
+              <a:t>计算给定的一个或多个有序集的交集，其中给定 </a:t>
+            </a:r>
+            <a:r>
+              <a:rPr lang="en-US" altLang="zh-CN" dirty="0" smtClean="0"/>
+              <a:t>key</a:t>
+            </a:r>
+            <a:r>
+              <a:rPr lang="zh-CN" altLang="en-US" sz="1200" b="0" i="0" kern="1200" dirty="0" smtClean="0">
+                <a:solidFill>
+                  <a:schemeClr val="tx1"/>
+                </a:solidFill>
+                <a:effectLst/>
+                <a:latin typeface="+mn-lt"/>
+                <a:ea typeface="+mn-ea"/>
+                <a:cs typeface="+mn-cs"/>
+              </a:rPr>
+              <a:t> 的数量必须以 </a:t>
+            </a:r>
+            <a:r>
+              <a:rPr lang="en-US" altLang="zh-CN" dirty="0" err="1" smtClean="0"/>
+              <a:t>numkeys</a:t>
+            </a:r>
+            <a:r>
+              <a:rPr lang="zh-CN" altLang="en-US" sz="1200" b="0" i="0" kern="1200" dirty="0" smtClean="0">
+                <a:solidFill>
+                  <a:schemeClr val="tx1"/>
+                </a:solidFill>
+                <a:effectLst/>
+                <a:latin typeface="+mn-lt"/>
+                <a:ea typeface="+mn-ea"/>
+                <a:cs typeface="+mn-cs"/>
+              </a:rPr>
+              <a:t> 参数指定</a:t>
+            </a:r>
             <a:endParaRPr lang="zh-CN" altLang="en-US" dirty="0"/>
           </a:p>
         </p:txBody>
@@ -607,7 +660,7 @@
     </p:spTree>
     <p:extLst>
       <p:ext uri="{BB962C8B-B14F-4D97-AF65-F5344CB8AC3E}">
-        <p14:creationId xmlns:p14="http://schemas.microsoft.com/office/powerpoint/2010/main" xmlns="" val="4137023201"/>
+        <p14:creationId xmlns:p14="http://schemas.microsoft.com/office/powerpoint/2010/main" val="4137023201"/>
       </p:ext>
     </p:extLst>
   </p:cSld>
@@ -658,44 +711,159 @@
         </p:nvSpPr>
         <p:spPr/>
         <p:txBody>
-          <a:bodyPr>
-            <a:normAutofit/>
-          </a:bodyPr>
-          <a:lstStyle/>
-          <a:p>
-            <a:r>
-              <a:rPr lang="zh-CN" altLang="en-US" dirty="0" smtClean="0"/>
-              <a:t>为什么能串行执行</a:t>
-            </a:r>
-            <a:endParaRPr lang="en-US" altLang="zh-CN" dirty="0" smtClean="0"/>
-          </a:p>
-          <a:p>
-            <a:endParaRPr lang="en-US" altLang="zh-CN" dirty="0" smtClean="0"/>
-          </a:p>
-          <a:p>
-            <a:r>
-              <a:rPr lang="en-US" altLang="zh-CN" dirty="0" smtClean="0"/>
-              <a:t>I/O</a:t>
-            </a:r>
-            <a:r>
-              <a:rPr lang="zh-CN" altLang="en-US" dirty="0" smtClean="0"/>
-              <a:t>多路复用程序总是会将所有产生事件的套接字都放到一个队列里面，然后通过这个队列，以有序（</a:t>
-            </a:r>
-            <a:r>
-              <a:rPr lang="en-US" altLang="zh-CN" dirty="0" smtClean="0"/>
-              <a:t>sequentially</a:t>
-            </a:r>
-            <a:r>
-              <a:rPr lang="zh-CN" altLang="en-US" dirty="0" smtClean="0"/>
-              <a:t>）、同步（</a:t>
-            </a:r>
-            <a:r>
-              <a:rPr lang="en-US" altLang="zh-CN" dirty="0" smtClean="0"/>
-              <a:t>synchronously</a:t>
-            </a:r>
-            <a:r>
-              <a:rPr lang="zh-CN" altLang="en-US" dirty="0" smtClean="0"/>
-              <a:t>）、每次一个套接字的方式向文件事件分派器传送套接字。</a:t>
+          <a:bodyPr/>
+          <a:lstStyle/>
+          <a:p>
+            <a:r>
+              <a:rPr lang="en-US" altLang="zh-CN" sz="1200" b="0" i="0" u="none" strike="noStrike" kern="1200" baseline="0" dirty="0" smtClean="0">
+                <a:solidFill>
+                  <a:schemeClr val="tx1"/>
+                </a:solidFill>
+                <a:latin typeface="+mn-lt"/>
+                <a:ea typeface="+mn-ea"/>
+                <a:cs typeface="+mn-cs"/>
+              </a:rPr>
+              <a:t>1. </a:t>
+            </a:r>
+            <a:r>
+              <a:rPr lang="zh-CN" altLang="en-US" sz="1200" b="0" i="0" u="none" strike="noStrike" kern="1200" baseline="0" dirty="0" smtClean="0">
+                <a:solidFill>
+                  <a:schemeClr val="tx1"/>
+                </a:solidFill>
+                <a:latin typeface="+mn-lt"/>
+                <a:ea typeface="+mn-ea"/>
+                <a:cs typeface="+mn-cs"/>
+              </a:rPr>
+              <a:t>定时删除：在设置键的过期时间时，创建一个定时事件，当过期时间到达时，由事件处理</a:t>
+            </a:r>
+          </a:p>
+          <a:p>
+            <a:r>
+              <a:rPr lang="zh-CN" altLang="en-US" sz="1200" b="0" i="0" u="none" strike="noStrike" kern="1200" baseline="0" dirty="0" smtClean="0">
+                <a:solidFill>
+                  <a:schemeClr val="tx1"/>
+                </a:solidFill>
+                <a:latin typeface="+mn-lt"/>
+                <a:ea typeface="+mn-ea"/>
+                <a:cs typeface="+mn-cs"/>
+              </a:rPr>
+              <a:t>器自动执行键的删除操作。</a:t>
+            </a:r>
+          </a:p>
+          <a:p>
+            <a:r>
+              <a:rPr lang="en-US" altLang="zh-CN" sz="1200" b="0" i="0" u="none" strike="noStrike" kern="1200" baseline="0" dirty="0" smtClean="0">
+                <a:solidFill>
+                  <a:schemeClr val="tx1"/>
+                </a:solidFill>
+                <a:latin typeface="+mn-lt"/>
+                <a:ea typeface="+mn-ea"/>
+                <a:cs typeface="+mn-cs"/>
+              </a:rPr>
+              <a:t>2. </a:t>
+            </a:r>
+            <a:r>
+              <a:rPr lang="zh-CN" altLang="en-US" sz="1200" b="0" i="0" u="none" strike="noStrike" kern="1200" baseline="0" dirty="0" smtClean="0">
+                <a:solidFill>
+                  <a:schemeClr val="tx1"/>
+                </a:solidFill>
+                <a:latin typeface="+mn-lt"/>
+                <a:ea typeface="+mn-ea"/>
+                <a:cs typeface="+mn-cs"/>
+              </a:rPr>
+              <a:t>惰性删除：放任键过期不管，但是在每次从</a:t>
+            </a:r>
+            <a:r>
+              <a:rPr lang="en-US" altLang="zh-CN" sz="1200" b="0" i="0" u="none" strike="noStrike" kern="1200" baseline="0" dirty="0" err="1" smtClean="0">
+                <a:solidFill>
+                  <a:schemeClr val="tx1"/>
+                </a:solidFill>
+                <a:latin typeface="+mn-lt"/>
+                <a:ea typeface="+mn-ea"/>
+                <a:cs typeface="+mn-cs"/>
+              </a:rPr>
+              <a:t>dict</a:t>
+            </a:r>
+            <a:r>
+              <a:rPr lang="en-US" altLang="zh-CN" sz="1200" b="0" i="0" u="none" strike="noStrike" kern="1200" baseline="0" dirty="0" smtClean="0">
+                <a:solidFill>
+                  <a:schemeClr val="tx1"/>
+                </a:solidFill>
+                <a:latin typeface="+mn-lt"/>
+                <a:ea typeface="+mn-ea"/>
+                <a:cs typeface="+mn-cs"/>
+              </a:rPr>
+              <a:t> </a:t>
+            </a:r>
+            <a:r>
+              <a:rPr lang="zh-CN" altLang="en-US" sz="1200" b="0" i="0" u="none" strike="noStrike" kern="1200" baseline="0" dirty="0" smtClean="0">
+                <a:solidFill>
+                  <a:schemeClr val="tx1"/>
+                </a:solidFill>
+                <a:latin typeface="+mn-lt"/>
+                <a:ea typeface="+mn-ea"/>
+                <a:cs typeface="+mn-cs"/>
+              </a:rPr>
+              <a:t>字典中取出键值时，要检查键是否过</a:t>
+            </a:r>
+          </a:p>
+          <a:p>
+            <a:r>
+              <a:rPr lang="zh-CN" altLang="en-US" sz="1200" b="0" i="0" u="none" strike="noStrike" kern="1200" baseline="0" dirty="0" smtClean="0">
+                <a:solidFill>
+                  <a:schemeClr val="tx1"/>
+                </a:solidFill>
+                <a:latin typeface="+mn-lt"/>
+                <a:ea typeface="+mn-ea"/>
+                <a:cs typeface="+mn-cs"/>
+              </a:rPr>
+              <a:t>期，如果过期的话，就删除它，并返回空；如果没过期，就返回键值。</a:t>
+            </a:r>
+          </a:p>
+          <a:p>
+            <a:r>
+              <a:rPr lang="en-US" altLang="zh-CN" sz="1200" b="0" i="0" u="none" strike="noStrike" kern="1200" baseline="0" dirty="0" smtClean="0">
+                <a:solidFill>
+                  <a:schemeClr val="tx1"/>
+                </a:solidFill>
+                <a:latin typeface="+mn-lt"/>
+                <a:ea typeface="+mn-ea"/>
+                <a:cs typeface="+mn-cs"/>
+              </a:rPr>
+              <a:t>3. </a:t>
+            </a:r>
+            <a:r>
+              <a:rPr lang="zh-CN" altLang="en-US" sz="1200" b="0" i="0" u="none" strike="noStrike" kern="1200" baseline="0" dirty="0" smtClean="0">
+                <a:solidFill>
+                  <a:schemeClr val="tx1"/>
+                </a:solidFill>
+                <a:latin typeface="+mn-lt"/>
+                <a:ea typeface="+mn-ea"/>
+                <a:cs typeface="+mn-cs"/>
+              </a:rPr>
+              <a:t>定期删除：每隔一段时间，对</a:t>
+            </a:r>
+            <a:r>
+              <a:rPr lang="en-US" altLang="zh-CN" sz="1200" b="0" i="0" u="none" strike="noStrike" kern="1200" baseline="0" dirty="0" smtClean="0">
+                <a:solidFill>
+                  <a:schemeClr val="tx1"/>
+                </a:solidFill>
+                <a:latin typeface="+mn-lt"/>
+                <a:ea typeface="+mn-ea"/>
+                <a:cs typeface="+mn-cs"/>
+              </a:rPr>
+              <a:t>expires </a:t>
+            </a:r>
+            <a:r>
+              <a:rPr lang="zh-CN" altLang="en-US" sz="1200" b="0" i="0" u="none" strike="noStrike" kern="1200" baseline="0" dirty="0" smtClean="0">
+                <a:solidFill>
+                  <a:schemeClr val="tx1"/>
+                </a:solidFill>
+                <a:latin typeface="+mn-lt"/>
+                <a:ea typeface="+mn-ea"/>
+                <a:cs typeface="+mn-cs"/>
+              </a:rPr>
+              <a:t>字典进行检查，删除里面的过期键。</a:t>
             </a:r>
             <a:endParaRPr lang="zh-CN" altLang="en-US" dirty="0"/>
           </a:p>
@@ -719,7 +887,7 @@
             <a:fld id="{BAF891E2-A387-4BB6-98F3-AB1911FCECE9}" type="slidenum">
               <a:rPr lang="zh-CN" altLang="en-US" smtClean="0"/>
               <a:pPr/>
-              <a:t>23</a:t>
+              <a:t>30</a:t>
             </a:fld>
             <a:endParaRPr lang="zh-CN" altLang="en-US"/>
           </a:p>
@@ -728,7 +896,7 @@
     </p:spTree>
     <p:extLst>
       <p:ext uri="{BB962C8B-B14F-4D97-AF65-F5344CB8AC3E}">
-        <p14:creationId xmlns:p14="http://schemas.microsoft.com/office/powerpoint/2010/main" xmlns="" val="262453648"/>
+        <p14:creationId xmlns:p14="http://schemas.microsoft.com/office/powerpoint/2010/main" val="3723524272"/>
       </p:ext>
     </p:extLst>
   </p:cSld>
@@ -779,21 +947,311 @@
         </p:nvSpPr>
         <p:spPr/>
         <p:txBody>
-          <a:bodyPr>
-            <a:normAutofit/>
-          </a:bodyPr>
-          <a:lstStyle/>
-          <a:p>
-            <a:r>
-              <a:rPr lang="zh-CN" altLang="en-US" dirty="0" smtClean="0"/>
-              <a:t>读事件实现接收命令请求</a:t>
-            </a:r>
-            <a:endParaRPr lang="en-US" altLang="zh-CN" dirty="0" smtClean="0"/>
-          </a:p>
-          <a:p>
-            <a:r>
-              <a:rPr lang="zh-CN" altLang="en-US" dirty="0" smtClean="0"/>
-              <a:t>写事件实现返回结果</a:t>
+          <a:bodyPr/>
+          <a:lstStyle/>
+          <a:p>
+            <a:r>
+              <a:rPr lang="zh-CN" altLang="en-US" sz="1200" b="0" i="0" u="none" strike="noStrike" kern="1200" baseline="0" dirty="0" smtClean="0">
+                <a:solidFill>
+                  <a:schemeClr val="tx1"/>
+                </a:solidFill>
+                <a:latin typeface="+mn-lt"/>
+                <a:ea typeface="+mn-ea"/>
+                <a:cs typeface="+mn-cs"/>
+              </a:rPr>
+              <a:t>在每个代表数据库的</a:t>
+            </a:r>
+            <a:r>
+              <a:rPr lang="en-US" altLang="zh-CN" sz="1200" b="0" i="0" u="none" strike="noStrike" kern="1200" baseline="0" dirty="0" err="1" smtClean="0">
+                <a:solidFill>
+                  <a:schemeClr val="tx1"/>
+                </a:solidFill>
+                <a:latin typeface="+mn-lt"/>
+                <a:ea typeface="+mn-ea"/>
+                <a:cs typeface="+mn-cs"/>
+              </a:rPr>
+              <a:t>redis.h</a:t>
+            </a:r>
+            <a:r>
+              <a:rPr lang="en-US" altLang="zh-CN" sz="1200" b="0" i="0" u="none" strike="noStrike" kern="1200" baseline="0" dirty="0" smtClean="0">
+                <a:solidFill>
+                  <a:schemeClr val="tx1"/>
+                </a:solidFill>
+                <a:latin typeface="+mn-lt"/>
+                <a:ea typeface="+mn-ea"/>
+                <a:cs typeface="+mn-cs"/>
+              </a:rPr>
+              <a:t>/</a:t>
+            </a:r>
+            <a:r>
+              <a:rPr lang="en-US" altLang="zh-CN" sz="1200" b="0" i="0" u="none" strike="noStrike" kern="1200" baseline="0" dirty="0" err="1" smtClean="0">
+                <a:solidFill>
+                  <a:schemeClr val="tx1"/>
+                </a:solidFill>
+                <a:latin typeface="+mn-lt"/>
+                <a:ea typeface="+mn-ea"/>
+                <a:cs typeface="+mn-cs"/>
+              </a:rPr>
+              <a:t>redisDb</a:t>
+            </a:r>
+            <a:r>
+              <a:rPr lang="en-US" altLang="zh-CN" sz="1200" b="0" i="0" u="none" strike="noStrike" kern="1200" baseline="0" dirty="0" smtClean="0">
+                <a:solidFill>
+                  <a:schemeClr val="tx1"/>
+                </a:solidFill>
+                <a:latin typeface="+mn-lt"/>
+                <a:ea typeface="+mn-ea"/>
+                <a:cs typeface="+mn-cs"/>
+              </a:rPr>
+              <a:t> </a:t>
+            </a:r>
+            <a:r>
+              <a:rPr lang="zh-CN" altLang="en-US" sz="1200" b="0" i="0" u="none" strike="noStrike" kern="1200" baseline="0" dirty="0" smtClean="0">
+                <a:solidFill>
+                  <a:schemeClr val="tx1"/>
+                </a:solidFill>
+                <a:latin typeface="+mn-lt"/>
+                <a:ea typeface="+mn-ea"/>
+                <a:cs typeface="+mn-cs"/>
+              </a:rPr>
+              <a:t>结构类型中，都保存了一个</a:t>
+            </a:r>
+            <a:r>
+              <a:rPr lang="en-US" altLang="zh-CN" sz="1200" b="0" i="0" u="none" strike="noStrike" kern="1200" baseline="0" dirty="0" err="1" smtClean="0">
+                <a:solidFill>
+                  <a:schemeClr val="tx1"/>
+                </a:solidFill>
+                <a:latin typeface="+mn-lt"/>
+                <a:ea typeface="+mn-ea"/>
+                <a:cs typeface="+mn-cs"/>
+              </a:rPr>
+              <a:t>watched_keys</a:t>
+            </a:r>
+            <a:r>
+              <a:rPr lang="en-US" altLang="zh-CN" sz="1200" b="0" i="0" u="none" strike="noStrike" kern="1200" baseline="0" dirty="0" smtClean="0">
+                <a:solidFill>
+                  <a:schemeClr val="tx1"/>
+                </a:solidFill>
+                <a:latin typeface="+mn-lt"/>
+                <a:ea typeface="+mn-ea"/>
+                <a:cs typeface="+mn-cs"/>
+              </a:rPr>
+              <a:t> </a:t>
+            </a:r>
+            <a:r>
+              <a:rPr lang="zh-CN" altLang="en-US" sz="1200" b="0" i="0" u="none" strike="noStrike" kern="1200" baseline="0" dirty="0" smtClean="0">
+                <a:solidFill>
+                  <a:schemeClr val="tx1"/>
+                </a:solidFill>
+                <a:latin typeface="+mn-lt"/>
+                <a:ea typeface="+mn-ea"/>
+                <a:cs typeface="+mn-cs"/>
+              </a:rPr>
+              <a:t>字典，字典</a:t>
+            </a:r>
+          </a:p>
+          <a:p>
+            <a:r>
+              <a:rPr lang="zh-CN" altLang="en-US" sz="1200" b="0" i="0" u="none" strike="noStrike" kern="1200" baseline="0" dirty="0" smtClean="0">
+                <a:solidFill>
+                  <a:schemeClr val="tx1"/>
+                </a:solidFill>
+                <a:latin typeface="+mn-lt"/>
+                <a:ea typeface="+mn-ea"/>
+                <a:cs typeface="+mn-cs"/>
+              </a:rPr>
+              <a:t>的键是这个数据库被监视的键，而字典的值则是一个链表，链表中保存了所有监视这个键的客</a:t>
+            </a:r>
+          </a:p>
+          <a:p>
+            <a:r>
+              <a:rPr lang="zh-CN" altLang="en-US" sz="1200" b="0" i="0" u="none" strike="noStrike" kern="1200" baseline="0" dirty="0" smtClean="0">
+                <a:solidFill>
+                  <a:schemeClr val="tx1"/>
+                </a:solidFill>
+                <a:latin typeface="+mn-lt"/>
+                <a:ea typeface="+mn-ea"/>
+                <a:cs typeface="+mn-cs"/>
+              </a:rPr>
+              <a:t>户端。</a:t>
+            </a:r>
+            <a:endParaRPr lang="en-US" altLang="zh-CN" sz="1200" b="0" i="0" u="none" strike="noStrike" kern="1200" baseline="0" dirty="0" smtClean="0">
+              <a:solidFill>
+                <a:schemeClr val="tx1"/>
+              </a:solidFill>
+              <a:latin typeface="+mn-lt"/>
+              <a:ea typeface="+mn-ea"/>
+              <a:cs typeface="+mn-cs"/>
+            </a:endParaRPr>
+          </a:p>
+          <a:p>
+            <a:endParaRPr lang="en-US" altLang="zh-CN" sz="1200" b="0" i="0" u="none" strike="noStrike" kern="1200" baseline="0" dirty="0" smtClean="0">
+              <a:solidFill>
+                <a:schemeClr val="tx1"/>
+              </a:solidFill>
+              <a:latin typeface="+mn-lt"/>
+              <a:ea typeface="+mn-ea"/>
+              <a:cs typeface="+mn-cs"/>
+            </a:endParaRPr>
+          </a:p>
+          <a:p>
+            <a:r>
+              <a:rPr lang="zh-CN" altLang="en-US" sz="1200" b="0" i="0" u="none" strike="noStrike" kern="1200" baseline="0" dirty="0" smtClean="0">
+                <a:solidFill>
+                  <a:schemeClr val="tx1"/>
+                </a:solidFill>
+                <a:latin typeface="+mn-lt"/>
+                <a:ea typeface="+mn-ea"/>
+                <a:cs typeface="+mn-cs"/>
+              </a:rPr>
+              <a:t>检查数据库的</a:t>
+            </a:r>
+            <a:r>
+              <a:rPr lang="en-US" altLang="zh-CN" sz="1200" b="0" i="0" u="none" strike="noStrike" kern="1200" baseline="0" dirty="0" err="1" smtClean="0">
+                <a:solidFill>
+                  <a:schemeClr val="tx1"/>
+                </a:solidFill>
+                <a:latin typeface="+mn-lt"/>
+                <a:ea typeface="+mn-ea"/>
+                <a:cs typeface="+mn-cs"/>
+              </a:rPr>
+              <a:t>watched_keys</a:t>
+            </a:r>
+            <a:r>
+              <a:rPr lang="en-US" altLang="zh-CN" sz="1200" b="0" i="0" u="none" strike="noStrike" kern="1200" baseline="0" dirty="0" smtClean="0">
+                <a:solidFill>
+                  <a:schemeClr val="tx1"/>
+                </a:solidFill>
+                <a:latin typeface="+mn-lt"/>
+                <a:ea typeface="+mn-ea"/>
+                <a:cs typeface="+mn-cs"/>
+              </a:rPr>
+              <a:t> </a:t>
+            </a:r>
+            <a:r>
+              <a:rPr lang="zh-CN" altLang="en-US" sz="1200" b="0" i="0" u="none" strike="noStrike" kern="1200" baseline="0" dirty="0" smtClean="0">
+                <a:solidFill>
+                  <a:schemeClr val="tx1"/>
+                </a:solidFill>
+                <a:latin typeface="+mn-lt"/>
+                <a:ea typeface="+mn-ea"/>
+                <a:cs typeface="+mn-cs"/>
+              </a:rPr>
+              <a:t>字典，看是否有客户端在监视已经被命令修改的键，如果</a:t>
+            </a:r>
+          </a:p>
+          <a:p>
+            <a:r>
+              <a:rPr lang="zh-CN" altLang="en-US" sz="1200" b="0" i="0" u="none" strike="noStrike" kern="1200" baseline="0" dirty="0" smtClean="0">
+                <a:solidFill>
+                  <a:schemeClr val="tx1"/>
+                </a:solidFill>
+                <a:latin typeface="+mn-lt"/>
+                <a:ea typeface="+mn-ea"/>
+                <a:cs typeface="+mn-cs"/>
+              </a:rPr>
+              <a:t>有的话，程序将所有监视这个</a:t>
+            </a:r>
+            <a:r>
+              <a:rPr lang="en-US" altLang="zh-CN" sz="1200" b="0" i="0" u="none" strike="noStrike" kern="1200" baseline="0" dirty="0" smtClean="0">
+                <a:solidFill>
+                  <a:schemeClr val="tx1"/>
+                </a:solidFill>
+                <a:latin typeface="+mn-lt"/>
+                <a:ea typeface="+mn-ea"/>
+                <a:cs typeface="+mn-cs"/>
+              </a:rPr>
+              <a:t>/</a:t>
+            </a:r>
+            <a:r>
+              <a:rPr lang="zh-CN" altLang="en-US" sz="1200" b="0" i="0" u="none" strike="noStrike" kern="1200" baseline="0" dirty="0" smtClean="0">
+                <a:solidFill>
+                  <a:schemeClr val="tx1"/>
+                </a:solidFill>
+                <a:latin typeface="+mn-lt"/>
+                <a:ea typeface="+mn-ea"/>
+                <a:cs typeface="+mn-cs"/>
+              </a:rPr>
+              <a:t>这些被修改键的客户端的</a:t>
+            </a:r>
+            <a:r>
+              <a:rPr lang="en-US" altLang="zh-CN" sz="1200" b="0" i="0" u="none" strike="noStrike" kern="1200" baseline="0" dirty="0" smtClean="0">
+                <a:solidFill>
+                  <a:schemeClr val="tx1"/>
+                </a:solidFill>
+                <a:latin typeface="+mn-lt"/>
+                <a:ea typeface="+mn-ea"/>
+                <a:cs typeface="+mn-cs"/>
+              </a:rPr>
+              <a:t>REDIS_DIRTY_CAS </a:t>
+            </a:r>
+            <a:r>
+              <a:rPr lang="zh-CN" altLang="en-US" sz="1200" b="0" i="0" u="none" strike="noStrike" kern="1200" baseline="0" dirty="0" smtClean="0">
+                <a:solidFill>
+                  <a:schemeClr val="tx1"/>
+                </a:solidFill>
+                <a:latin typeface="+mn-lt"/>
+                <a:ea typeface="+mn-ea"/>
+                <a:cs typeface="+mn-cs"/>
+              </a:rPr>
+              <a:t>选项打开</a:t>
+            </a:r>
+            <a:r>
+              <a:rPr lang="en-US" altLang="zh-CN" sz="1200" b="0" i="0" u="none" strike="noStrike" kern="1200" baseline="0" dirty="0" smtClean="0">
+                <a:solidFill>
+                  <a:schemeClr val="tx1"/>
+                </a:solidFill>
+                <a:latin typeface="+mn-lt"/>
+                <a:ea typeface="+mn-ea"/>
+                <a:cs typeface="+mn-cs"/>
+              </a:rPr>
+              <a:t>.</a:t>
+            </a:r>
+          </a:p>
+          <a:p>
+            <a:r>
+              <a:rPr lang="zh-CN" altLang="en-US" sz="1200" b="0" i="0" u="none" strike="noStrike" kern="1200" baseline="0" dirty="0" smtClean="0">
+                <a:solidFill>
+                  <a:schemeClr val="tx1"/>
+                </a:solidFill>
+                <a:latin typeface="+mn-lt"/>
+                <a:ea typeface="+mn-ea"/>
+                <a:cs typeface="+mn-cs"/>
+              </a:rPr>
+              <a:t>当客户端发送</a:t>
+            </a:r>
+            <a:r>
+              <a:rPr lang="en-US" altLang="zh-CN" sz="1200" b="0" i="1" u="none" strike="noStrike" kern="1200" baseline="0" dirty="0" smtClean="0">
+                <a:solidFill>
+                  <a:schemeClr val="tx1"/>
+                </a:solidFill>
+                <a:latin typeface="+mn-lt"/>
+                <a:ea typeface="+mn-ea"/>
+                <a:cs typeface="+mn-cs"/>
+              </a:rPr>
+              <a:t>EXEC </a:t>
+            </a:r>
+            <a:r>
+              <a:rPr lang="zh-CN" altLang="en-US" sz="1200" b="0" i="0" u="none" strike="noStrike" kern="1200" baseline="0" dirty="0" smtClean="0">
+                <a:solidFill>
+                  <a:schemeClr val="tx1"/>
+                </a:solidFill>
+                <a:latin typeface="+mn-lt"/>
+                <a:ea typeface="+mn-ea"/>
+                <a:cs typeface="+mn-cs"/>
+              </a:rPr>
+              <a:t>命令、触发事务执行时，服务器会对客户端的状态进行检查</a:t>
+            </a:r>
+            <a:r>
+              <a:rPr lang="en-US" altLang="zh-CN" sz="1200" b="0" i="0" u="none" strike="noStrike" kern="1200" baseline="0" dirty="0" smtClean="0">
+                <a:solidFill>
+                  <a:schemeClr val="tx1"/>
+                </a:solidFill>
+                <a:latin typeface="+mn-lt"/>
+                <a:ea typeface="+mn-ea"/>
+                <a:cs typeface="+mn-cs"/>
+              </a:rPr>
+              <a:t>.</a:t>
             </a:r>
             <a:endParaRPr lang="zh-CN" altLang="en-US" dirty="0"/>
           </a:p>
@@ -817,7 +1275,7 @@
             <a:fld id="{BAF891E2-A387-4BB6-98F3-AB1911FCECE9}" type="slidenum">
               <a:rPr lang="zh-CN" altLang="en-US" smtClean="0"/>
               <a:pPr/>
-              <a:t>24</a:t>
+              <a:t>31</a:t>
             </a:fld>
             <a:endParaRPr lang="zh-CN" altLang="en-US"/>
           </a:p>
@@ -826,7 +1284,7 @@
     </p:spTree>
     <p:extLst>
       <p:ext uri="{BB962C8B-B14F-4D97-AF65-F5344CB8AC3E}">
-        <p14:creationId xmlns:p14="http://schemas.microsoft.com/office/powerpoint/2010/main" xmlns="" val="3945660927"/>
+        <p14:creationId xmlns:p14="http://schemas.microsoft.com/office/powerpoint/2010/main" val="3750907290"/>
       </p:ext>
     </p:extLst>
   </p:cSld>
@@ -882,6 +1340,40 @@
           </a:bodyPr>
           <a:lstStyle/>
           <a:p>
+            <a:r>
+              <a:rPr lang="zh-CN" altLang="en-US" dirty="0" smtClean="0"/>
+              <a:t>为什么能串行执行</a:t>
+            </a:r>
+            <a:endParaRPr lang="en-US" altLang="zh-CN" dirty="0" smtClean="0"/>
+          </a:p>
+          <a:p>
+            <a:endParaRPr lang="en-US" altLang="zh-CN" dirty="0" smtClean="0"/>
+          </a:p>
+          <a:p>
+            <a:r>
+              <a:rPr lang="en-US" altLang="zh-CN" dirty="0" smtClean="0"/>
+              <a:t>I/O</a:t>
+            </a:r>
+            <a:r>
+              <a:rPr lang="zh-CN" altLang="en-US" dirty="0" smtClean="0"/>
+              <a:t>多路复用程序总是会将所有产生事件的套接字都放到一个队列里面，然后通过这个队列，以有序（</a:t>
+            </a:r>
+            <a:r>
+              <a:rPr lang="en-US" altLang="zh-CN" dirty="0" smtClean="0"/>
+              <a:t>sequentially</a:t>
+            </a:r>
+            <a:r>
+              <a:rPr lang="zh-CN" altLang="en-US" dirty="0" smtClean="0"/>
+              <a:t>）、同步（</a:t>
+            </a:r>
+            <a:r>
+              <a:rPr lang="en-US" altLang="zh-CN" dirty="0" smtClean="0"/>
+              <a:t>synchronously</a:t>
+            </a:r>
+            <a:r>
+              <a:rPr lang="zh-CN" altLang="en-US" dirty="0" smtClean="0"/>
+              <a:t>）、每次一个套接字的方式向文件事件分派器传送套接字。</a:t>
+            </a:r>
             <a:endParaRPr lang="zh-CN" altLang="en-US" dirty="0"/>
           </a:p>
         </p:txBody>
@@ -904,7 +1396,7 @@
             <a:fld id="{BAF891E2-A387-4BB6-98F3-AB1911FCECE9}" type="slidenum">
               <a:rPr lang="zh-CN" altLang="en-US" smtClean="0"/>
               <a:pPr/>
-              <a:t>25</a:t>
+              <a:t>32</a:t>
             </a:fld>
             <a:endParaRPr lang="zh-CN" altLang="en-US"/>
           </a:p>
@@ -913,7 +1405,7 @@
     </p:spTree>
     <p:extLst>
       <p:ext uri="{BB962C8B-B14F-4D97-AF65-F5344CB8AC3E}">
-        <p14:creationId xmlns:p14="http://schemas.microsoft.com/office/powerpoint/2010/main" xmlns="" val="3630780848"/>
+        <p14:creationId xmlns:p14="http://schemas.microsoft.com/office/powerpoint/2010/main" val="262453648"/>
       </p:ext>
     </p:extLst>
   </p:cSld>
@@ -969,6 +1461,17 @@
           </a:bodyPr>
           <a:lstStyle/>
           <a:p>
+            <a:r>
+              <a:rPr lang="zh-CN" altLang="en-US" dirty="0" smtClean="0"/>
+              <a:t>读事件实现接收命令请求</a:t>
+            </a:r>
+            <a:endParaRPr lang="en-US" altLang="zh-CN" dirty="0" smtClean="0"/>
+          </a:p>
+          <a:p>
+            <a:r>
+              <a:rPr lang="zh-CN" altLang="en-US" dirty="0" smtClean="0"/>
+              <a:t>写事件实现返回结果</a:t>
+            </a:r>
             <a:endParaRPr lang="zh-CN" altLang="en-US" dirty="0"/>
           </a:p>
         </p:txBody>
@@ -991,7 +1494,7 @@
             <a:fld id="{BAF891E2-A387-4BB6-98F3-AB1911FCECE9}" type="slidenum">
               <a:rPr lang="zh-CN" altLang="en-US" smtClean="0"/>
               <a:pPr/>
-              <a:t>26</a:t>
+              <a:t>33</a:t>
             </a:fld>
             <a:endParaRPr lang="zh-CN" altLang="en-US"/>
           </a:p>
@@ -1000,7 +1503,7 @@
     </p:spTree>
     <p:extLst>
       <p:ext uri="{BB962C8B-B14F-4D97-AF65-F5344CB8AC3E}">
-        <p14:creationId xmlns:p14="http://schemas.microsoft.com/office/powerpoint/2010/main" xmlns="" val="2552309703"/>
+        <p14:creationId xmlns:p14="http://schemas.microsoft.com/office/powerpoint/2010/main" val="3945660927"/>
       </p:ext>
     </p:extLst>
   </p:cSld>
@@ -1078,7 +1581,7 @@
             <a:fld id="{BAF891E2-A387-4BB6-98F3-AB1911FCECE9}" type="slidenum">
               <a:rPr lang="zh-CN" altLang="en-US" smtClean="0"/>
               <a:pPr/>
-              <a:t>27</a:t>
+              <a:t>34</a:t>
             </a:fld>
             <a:endParaRPr lang="zh-CN" altLang="en-US"/>
           </a:p>
@@ -1087,7 +1590,7 @@
     </p:spTree>
     <p:extLst>
       <p:ext uri="{BB962C8B-B14F-4D97-AF65-F5344CB8AC3E}">
-        <p14:creationId xmlns:p14="http://schemas.microsoft.com/office/powerpoint/2010/main" xmlns="" val="1705863449"/>
+        <p14:creationId xmlns:p14="http://schemas.microsoft.com/office/powerpoint/2010/main" val="3630780848"/>
       </p:ext>
     </p:extLst>
   </p:cSld>
@@ -1165,7 +1668,7 @@
             <a:fld id="{BAF891E2-A387-4BB6-98F3-AB1911FCECE9}" type="slidenum">
               <a:rPr lang="zh-CN" altLang="en-US" smtClean="0"/>
               <a:pPr/>
-              <a:t>28</a:t>
+              <a:t>35</a:t>
             </a:fld>
             <a:endParaRPr lang="zh-CN" altLang="en-US"/>
           </a:p>
@@ -1174,7 +1677,7 @@
     </p:spTree>
     <p:extLst>
       <p:ext uri="{BB962C8B-B14F-4D97-AF65-F5344CB8AC3E}">
-        <p14:creationId xmlns:p14="http://schemas.microsoft.com/office/powerpoint/2010/main" xmlns="" val="3163714656"/>
+        <p14:creationId xmlns:p14="http://schemas.microsoft.com/office/powerpoint/2010/main" val="2552309703"/>
       </p:ext>
     </p:extLst>
   </p:cSld>
@@ -1252,7 +1755,7 @@
             <a:fld id="{BAF891E2-A387-4BB6-98F3-AB1911FCECE9}" type="slidenum">
               <a:rPr lang="zh-CN" altLang="en-US" smtClean="0"/>
               <a:pPr/>
-              <a:t>29</a:t>
+              <a:t>36</a:t>
             </a:fld>
             <a:endParaRPr lang="zh-CN" altLang="en-US"/>
           </a:p>
@@ -1261,7 +1764,181 @@
     </p:spTree>
     <p:extLst>
       <p:ext uri="{BB962C8B-B14F-4D97-AF65-F5344CB8AC3E}">
-        <p14:creationId xmlns:p14="http://schemas.microsoft.com/office/powerpoint/2010/main" xmlns="" val="1195585024"/>
+        <p14:creationId xmlns:p14="http://schemas.microsoft.com/office/powerpoint/2010/main" val="1705863449"/>
+      </p:ext>
+    </p:extLst>
+  </p:cSld>
+  <p:clrMapOvr>
+    <a:masterClrMapping/>
+  </p:clrMapOvr>
+</p:notes>
+</file>
+
+<file path=ppt/notesSlides/notesSlide17.xml><?xml version="1.0" encoding="utf-8"?>
+<p:notes xmlns:a="http://schemas.openxmlformats.org/drawingml/2006/main" xmlns:r="http://schemas.openxmlformats.org/officeDocument/2006/relationships" xmlns:p="http://schemas.openxmlformats.org/presentationml/2006/main">
+  <p:cSld>
+    <p:spTree>
+      <p:nvGrpSpPr>
+        <p:cNvPr id="1" name=""/>
+        <p:cNvGrpSpPr/>
+        <p:nvPr/>
+      </p:nvGrpSpPr>
+      <p:grpSpPr>
+        <a:xfrm>
+          <a:off x="0" y="0"/>
+          <a:ext cx="0" cy="0"/>
+          <a:chOff x="0" y="0"/>
+          <a:chExt cx="0" cy="0"/>
+        </a:xfrm>
+      </p:grpSpPr>
+      <p:sp>
+        <p:nvSpPr>
+          <p:cNvPr id="2" name="幻灯片图像占位符 1"/>
+          <p:cNvSpPr>
+            <a:spLocks noGrp="1" noRot="1" noChangeAspect="1"/>
+          </p:cNvSpPr>
+          <p:nvPr>
+            <p:ph type="sldImg"/>
+          </p:nvPr>
+        </p:nvSpPr>
+        <p:spPr/>
+      </p:sp>
+      <p:sp>
+        <p:nvSpPr>
+          <p:cNvPr id="3" name="备注占位符 2"/>
+          <p:cNvSpPr>
+            <a:spLocks noGrp="1"/>
+          </p:cNvSpPr>
+          <p:nvPr>
+            <p:ph type="body" idx="1"/>
+          </p:nvPr>
+        </p:nvSpPr>
+        <p:spPr/>
+        <p:txBody>
+          <a:bodyPr>
+            <a:normAutofit/>
+          </a:bodyPr>
+          <a:lstStyle/>
+          <a:p>
+            <a:endParaRPr lang="zh-CN" altLang="en-US" dirty="0"/>
+          </a:p>
+        </p:txBody>
+      </p:sp>
+      <p:sp>
+        <p:nvSpPr>
+          <p:cNvPr id="4" name="灯片编号占位符 3"/>
+          <p:cNvSpPr>
+            <a:spLocks noGrp="1"/>
+          </p:cNvSpPr>
+          <p:nvPr>
+            <p:ph type="sldNum" sz="quarter" idx="10"/>
+          </p:nvPr>
+        </p:nvSpPr>
+        <p:spPr/>
+        <p:txBody>
+          <a:bodyPr/>
+          <a:lstStyle/>
+          <a:p>
+            <a:fld id="{BAF891E2-A387-4BB6-98F3-AB1911FCECE9}" type="slidenum">
+              <a:rPr lang="zh-CN" altLang="en-US" smtClean="0"/>
+              <a:pPr/>
+              <a:t>37</a:t>
+            </a:fld>
+            <a:endParaRPr lang="zh-CN" altLang="en-US"/>
+          </a:p>
+        </p:txBody>
+      </p:sp>
+    </p:spTree>
+    <p:extLst>
+      <p:ext uri="{BB962C8B-B14F-4D97-AF65-F5344CB8AC3E}">
+        <p14:creationId xmlns:p14="http://schemas.microsoft.com/office/powerpoint/2010/main" val="3163714656"/>
+      </p:ext>
+    </p:extLst>
+  </p:cSld>
+  <p:clrMapOvr>
+    <a:masterClrMapping/>
+  </p:clrMapOvr>
+</p:notes>
+</file>
+
+<file path=ppt/notesSlides/notesSlide18.xml><?xml version="1.0" encoding="utf-8"?>
+<p:notes xmlns:a="http://schemas.openxmlformats.org/drawingml/2006/main" xmlns:r="http://schemas.openxmlformats.org/officeDocument/2006/relationships" xmlns:p="http://schemas.openxmlformats.org/presentationml/2006/main">
+  <p:cSld>
+    <p:spTree>
+      <p:nvGrpSpPr>
+        <p:cNvPr id="1" name=""/>
+        <p:cNvGrpSpPr/>
+        <p:nvPr/>
+      </p:nvGrpSpPr>
+      <p:grpSpPr>
+        <a:xfrm>
+          <a:off x="0" y="0"/>
+          <a:ext cx="0" cy="0"/>
+          <a:chOff x="0" y="0"/>
+          <a:chExt cx="0" cy="0"/>
+        </a:xfrm>
+      </p:grpSpPr>
+      <p:sp>
+        <p:nvSpPr>
+          <p:cNvPr id="2" name="幻灯片图像占位符 1"/>
+          <p:cNvSpPr>
+            <a:spLocks noGrp="1" noRot="1" noChangeAspect="1"/>
+          </p:cNvSpPr>
+          <p:nvPr>
+            <p:ph type="sldImg"/>
+          </p:nvPr>
+        </p:nvSpPr>
+        <p:spPr/>
+      </p:sp>
+      <p:sp>
+        <p:nvSpPr>
+          <p:cNvPr id="3" name="备注占位符 2"/>
+          <p:cNvSpPr>
+            <a:spLocks noGrp="1"/>
+          </p:cNvSpPr>
+          <p:nvPr>
+            <p:ph type="body" idx="1"/>
+          </p:nvPr>
+        </p:nvSpPr>
+        <p:spPr/>
+        <p:txBody>
+          <a:bodyPr>
+            <a:normAutofit/>
+          </a:bodyPr>
+          <a:lstStyle/>
+          <a:p>
+            <a:endParaRPr lang="zh-CN" altLang="en-US" dirty="0"/>
+          </a:p>
+        </p:txBody>
+      </p:sp>
+      <p:sp>
+        <p:nvSpPr>
+          <p:cNvPr id="4" name="灯片编号占位符 3"/>
+          <p:cNvSpPr>
+            <a:spLocks noGrp="1"/>
+          </p:cNvSpPr>
+          <p:nvPr>
+            <p:ph type="sldNum" sz="quarter" idx="10"/>
+          </p:nvPr>
+        </p:nvSpPr>
+        <p:spPr/>
+        <p:txBody>
+          <a:bodyPr/>
+          <a:lstStyle/>
+          <a:p>
+            <a:fld id="{BAF891E2-A387-4BB6-98F3-AB1911FCECE9}" type="slidenum">
+              <a:rPr lang="zh-CN" altLang="en-US" smtClean="0"/>
+              <a:pPr/>
+              <a:t>38</a:t>
+            </a:fld>
+            <a:endParaRPr lang="zh-CN" altLang="en-US"/>
+          </a:p>
+        </p:txBody>
+      </p:sp>
+    </p:spTree>
+    <p:extLst>
+      <p:ext uri="{BB962C8B-B14F-4D97-AF65-F5344CB8AC3E}">
+        <p14:creationId xmlns:p14="http://schemas.microsoft.com/office/powerpoint/2010/main" val="1195585024"/>
       </p:ext>
     </p:extLst>
   </p:cSld>
@@ -1496,7 +2173,7 @@
     </p:spTree>
     <p:extLst>
       <p:ext uri="{BB962C8B-B14F-4D97-AF65-F5344CB8AC3E}">
-        <p14:creationId xmlns:p14="http://schemas.microsoft.com/office/powerpoint/2010/main" xmlns="" val="1028827584"/>
+        <p14:creationId xmlns:p14="http://schemas.microsoft.com/office/powerpoint/2010/main" val="1028827584"/>
       </p:ext>
     </p:extLst>
   </p:cSld>
@@ -1548,7 +2225,7 @@
         <p:spPr/>
         <p:txBody>
           <a:bodyPr>
-            <a:normAutofit/>
+            <a:normAutofit fontScale="92500"/>
           </a:bodyPr>
           <a:lstStyle/>
           <a:p>
@@ -1590,6 +2267,269 @@
               <a:rPr lang="zh-CN" altLang="en-US" dirty="0" smtClean="0"/>
               <a:t>遇到错误不停止。</a:t>
             </a:r>
+            <a:endParaRPr lang="en-US" altLang="zh-CN" dirty="0" smtClean="0"/>
+          </a:p>
+          <a:p>
+            <a:endParaRPr lang="en-US" altLang="zh-CN" dirty="0" smtClean="0"/>
+          </a:p>
+          <a:p>
+            <a:r>
+              <a:rPr lang="en-US" altLang="zh-CN" sz="1200" b="0" i="0" u="none" strike="noStrike" kern="1200" dirty="0" smtClean="0">
+                <a:solidFill>
+                  <a:schemeClr val="tx1"/>
+                </a:solidFill>
+                <a:effectLst/>
+                <a:latin typeface="+mn-lt"/>
+                <a:ea typeface="+mn-ea"/>
+                <a:cs typeface="+mn-cs"/>
+                <a:hlinkClick r:id="rId3"/>
+              </a:rPr>
+              <a:t>WATCH</a:t>
+            </a:r>
+            <a:r>
+              <a:rPr lang="zh-CN" altLang="en-US" sz="1200" b="0" i="0" kern="1200" dirty="0" smtClean="0">
+                <a:solidFill>
+                  <a:schemeClr val="tx1"/>
+                </a:solidFill>
+                <a:effectLst/>
+                <a:latin typeface="+mn-lt"/>
+                <a:ea typeface="+mn-ea"/>
+                <a:cs typeface="+mn-cs"/>
+              </a:rPr>
+              <a:t> 使得 </a:t>
+            </a:r>
+            <a:r>
+              <a:rPr lang="en-US" altLang="zh-CN" sz="1200" b="0" i="0" u="none" strike="noStrike" kern="1200" dirty="0" smtClean="0">
+                <a:solidFill>
+                  <a:schemeClr val="tx1"/>
+                </a:solidFill>
+                <a:effectLst/>
+                <a:latin typeface="+mn-lt"/>
+                <a:ea typeface="+mn-ea"/>
+                <a:cs typeface="+mn-cs"/>
+                <a:hlinkClick r:id="rId4"/>
+              </a:rPr>
+              <a:t>EXEC</a:t>
+            </a:r>
+            <a:r>
+              <a:rPr lang="zh-CN" altLang="en-US" sz="1200" b="0" i="0" kern="1200" dirty="0" smtClean="0">
+                <a:solidFill>
+                  <a:schemeClr val="tx1"/>
+                </a:solidFill>
+                <a:effectLst/>
+                <a:latin typeface="+mn-lt"/>
+                <a:ea typeface="+mn-ea"/>
+                <a:cs typeface="+mn-cs"/>
+              </a:rPr>
+              <a:t> 命令需要有条件地执行： 事务只能在所有被监视键都没有被修改的前提下执行</a:t>
+            </a:r>
+            <a:endParaRPr lang="en-US" altLang="zh-CN" sz="1200" b="0" i="0" kern="1200" dirty="0" smtClean="0">
+              <a:solidFill>
+                <a:schemeClr val="tx1"/>
+              </a:solidFill>
+              <a:effectLst/>
+              <a:latin typeface="+mn-lt"/>
+              <a:ea typeface="+mn-ea"/>
+              <a:cs typeface="+mn-cs"/>
+            </a:endParaRPr>
+          </a:p>
+          <a:p>
+            <a:endParaRPr lang="en-US" altLang="zh-CN" sz="1200" b="0" i="0" kern="1200" dirty="0" smtClean="0">
+              <a:solidFill>
+                <a:schemeClr val="tx1"/>
+              </a:solidFill>
+              <a:effectLst/>
+              <a:latin typeface="+mn-lt"/>
+              <a:ea typeface="+mn-ea"/>
+              <a:cs typeface="+mn-cs"/>
+            </a:endParaRPr>
+          </a:p>
+          <a:p>
+            <a:r>
+              <a:rPr lang="zh-CN" altLang="en-US" dirty="0" smtClean="0">
+                <a:solidFill>
+                  <a:srgbClr val="FF0000"/>
+                </a:solidFill>
+              </a:rPr>
+              <a:t>事务不会立即有返回值。</a:t>
+            </a:r>
+            <a:endParaRPr lang="en-US" altLang="zh-CN" dirty="0" smtClean="0">
+              <a:solidFill>
+                <a:srgbClr val="FF0000"/>
+              </a:solidFill>
+            </a:endParaRPr>
+          </a:p>
+          <a:p>
+            <a:endParaRPr lang="en-US" altLang="zh-CN" dirty="0" smtClean="0"/>
+          </a:p>
+          <a:p>
+            <a:r>
+              <a:rPr lang="zh-CN" altLang="en-US" dirty="0" smtClean="0"/>
+              <a:t>注意</a:t>
+            </a:r>
+            <a:r>
+              <a:rPr lang="en-US" altLang="zh-CN" dirty="0" smtClean="0"/>
+              <a:t>watch</a:t>
+            </a:r>
+            <a:r>
+              <a:rPr lang="zh-CN" altLang="en-US" dirty="0" smtClean="0"/>
+              <a:t>的</a:t>
+            </a:r>
+            <a:r>
+              <a:rPr lang="en-US" altLang="zh-CN" dirty="0" smtClean="0"/>
+              <a:t>key</a:t>
+            </a:r>
+            <a:r>
+              <a:rPr lang="zh-CN" altLang="en-US" dirty="0" smtClean="0"/>
+              <a:t>是对整个连接有效的，事务也一样。如果连接断开，监视和事务都会被自动清除。当然了 </a:t>
+            </a:r>
+            <a:r>
+              <a:rPr lang="en-US" altLang="zh-CN" dirty="0" err="1" smtClean="0"/>
+              <a:t>exec,discard,unwatch</a:t>
+            </a:r>
+            <a:r>
+              <a:rPr lang="zh-CN" altLang="en-US" dirty="0" smtClean="0"/>
+              <a:t>命令都会清除连接中的所监视。</a:t>
+            </a:r>
+            <a:endParaRPr lang="en-US" altLang="zh-CN" dirty="0" smtClean="0"/>
+          </a:p>
+          <a:p>
+            <a:endParaRPr lang="en-US" altLang="zh-CN" dirty="0" smtClean="0"/>
+          </a:p>
+          <a:p>
+            <a:r>
+              <a:rPr lang="zh-CN" altLang="en-US" dirty="0" smtClean="0"/>
+              <a:t>有些库的实现优化，将命令打包发给</a:t>
+            </a:r>
+            <a:r>
+              <a:rPr lang="en-US" altLang="zh-CN" dirty="0" smtClean="0"/>
+              <a:t>server</a:t>
+            </a:r>
+            <a:r>
+              <a:rPr lang="zh-CN" altLang="en-US" dirty="0" smtClean="0"/>
+              <a:t>。</a:t>
+            </a:r>
+          </a:p>
+          <a:p>
+            <a:endParaRPr lang="en-US" altLang="zh-CN" dirty="0" smtClean="0"/>
+          </a:p>
+          <a:p>
+            <a:r>
+              <a:rPr lang="zh-CN" altLang="en-US" dirty="0" smtClean="0"/>
+              <a:t>当使用 </a:t>
+            </a:r>
+            <a:r>
+              <a:rPr lang="en-US" altLang="zh-CN" dirty="0" smtClean="0"/>
+              <a:t>AOF </a:t>
+            </a:r>
+            <a:r>
+              <a:rPr lang="zh-CN" altLang="en-US" dirty="0" smtClean="0"/>
+              <a:t>方式做持久化的时候， </a:t>
+            </a:r>
+            <a:r>
+              <a:rPr lang="en-US" altLang="zh-CN" dirty="0" err="1" smtClean="0"/>
+              <a:t>Redis</a:t>
+            </a:r>
+            <a:r>
+              <a:rPr lang="en-US" altLang="zh-CN" dirty="0" smtClean="0"/>
+              <a:t> </a:t>
+            </a:r>
+            <a:r>
+              <a:rPr lang="zh-CN" altLang="en-US" dirty="0" smtClean="0"/>
+              <a:t>会使用单个 </a:t>
+            </a:r>
+            <a:r>
+              <a:rPr lang="en-US" altLang="zh-CN" dirty="0" smtClean="0"/>
+              <a:t>write(2) </a:t>
+            </a:r>
+            <a:r>
+              <a:rPr lang="zh-CN" altLang="en-US" dirty="0" smtClean="0"/>
+              <a:t>命令将事务写入到磁盘中。</a:t>
+            </a:r>
+            <a:endParaRPr lang="en-US" altLang="zh-CN" dirty="0" smtClean="0"/>
+          </a:p>
+          <a:p>
+            <a:endParaRPr lang="en-US" altLang="zh-CN" dirty="0" smtClean="0"/>
+          </a:p>
+          <a:p>
+            <a:r>
+              <a:rPr lang="zh-CN" altLang="en-US" dirty="0" smtClean="0"/>
+              <a:t>然而，如果 </a:t>
+            </a:r>
+            <a:r>
+              <a:rPr lang="en-US" altLang="zh-CN" dirty="0" err="1" smtClean="0"/>
+              <a:t>Redis</a:t>
+            </a:r>
+            <a:r>
+              <a:rPr lang="en-US" altLang="zh-CN" dirty="0" smtClean="0"/>
+              <a:t> </a:t>
+            </a:r>
+            <a:r>
+              <a:rPr lang="zh-CN" altLang="en-US" dirty="0" smtClean="0"/>
+              <a:t>服务器因为某些原因被管理员杀死，或者遇上某种硬件故障，那么可能只有部分事务命令会被成功写入到磁盘中。</a:t>
+            </a:r>
+          </a:p>
+          <a:p>
+            <a:r>
+              <a:rPr lang="zh-CN" altLang="en-US" dirty="0" smtClean="0"/>
+              <a:t>如果 </a:t>
+            </a:r>
+            <a:r>
+              <a:rPr lang="en-US" altLang="zh-CN" dirty="0" err="1" smtClean="0"/>
+              <a:t>Redis</a:t>
+            </a:r>
+            <a:r>
+              <a:rPr lang="en-US" altLang="zh-CN" dirty="0" smtClean="0"/>
+              <a:t> </a:t>
+            </a:r>
+            <a:r>
+              <a:rPr lang="zh-CN" altLang="en-US" dirty="0" smtClean="0"/>
+              <a:t>在重新启动时发现 </a:t>
+            </a:r>
+            <a:r>
+              <a:rPr lang="en-US" altLang="zh-CN" dirty="0" smtClean="0"/>
+              <a:t>AOF </a:t>
+            </a:r>
+            <a:r>
+              <a:rPr lang="zh-CN" altLang="en-US" dirty="0" smtClean="0"/>
+              <a:t>文件出了这样的问题，那么它会退出，并汇报一个错误。</a:t>
+            </a:r>
+          </a:p>
+          <a:p>
+            <a:r>
+              <a:rPr lang="zh-CN" altLang="en-US" dirty="0" smtClean="0"/>
+              <a:t>使用 </a:t>
+            </a:r>
+            <a:r>
+              <a:rPr lang="en-US" altLang="zh-CN" dirty="0" err="1" smtClean="0"/>
+              <a:t>redis</a:t>
+            </a:r>
+            <a:r>
+              <a:rPr lang="en-US" altLang="zh-CN" dirty="0" smtClean="0"/>
+              <a:t>-check-</a:t>
+            </a:r>
+            <a:r>
+              <a:rPr lang="en-US" altLang="zh-CN" dirty="0" err="1" smtClean="0"/>
+              <a:t>aof</a:t>
+            </a:r>
+            <a:r>
+              <a:rPr lang="en-US" altLang="zh-CN" dirty="0" smtClean="0"/>
+              <a:t> </a:t>
+            </a:r>
+            <a:r>
+              <a:rPr lang="zh-CN" altLang="en-US" dirty="0" smtClean="0"/>
+              <a:t>程序可以修复这一问题：它会移除 </a:t>
+            </a:r>
+            <a:r>
+              <a:rPr lang="en-US" altLang="zh-CN" dirty="0" smtClean="0"/>
+              <a:t>AOF </a:t>
+            </a:r>
+            <a:r>
+              <a:rPr lang="zh-CN" altLang="en-US" dirty="0" smtClean="0"/>
+              <a:t>文件中不完整事务的信息，确保服务器可以顺利启动。</a:t>
+            </a:r>
+          </a:p>
+          <a:p>
             <a:endParaRPr lang="en-US" altLang="zh-CN" dirty="0" smtClean="0"/>
           </a:p>
         </p:txBody>
@@ -1621,7 +2561,7 @@
     </p:spTree>
     <p:extLst>
       <p:ext uri="{BB962C8B-B14F-4D97-AF65-F5344CB8AC3E}">
-        <p14:creationId xmlns:p14="http://schemas.microsoft.com/office/powerpoint/2010/main" xmlns="" val="3601591262"/>
+        <p14:creationId xmlns:p14="http://schemas.microsoft.com/office/powerpoint/2010/main" val="3601591262"/>
       </p:ext>
     </p:extLst>
   </p:cSld>
@@ -1677,192 +2617,90 @@
           </a:bodyPr>
           <a:lstStyle/>
           <a:p>
-            <a:r>
-              <a:rPr lang="zh-CN" altLang="en-US" dirty="0" smtClean="0">
-                <a:solidFill>
-                  <a:srgbClr val="FF0000"/>
-                </a:solidFill>
-              </a:rPr>
-              <a:t>事务不会立即有返回值。</a:t>
-            </a:r>
-            <a:endParaRPr lang="en-US" altLang="zh-CN" dirty="0" smtClean="0">
-              <a:solidFill>
-                <a:srgbClr val="FF0000"/>
-              </a:solidFill>
-            </a:endParaRPr>
-          </a:p>
-          <a:p>
             <a:endParaRPr lang="en-US" altLang="zh-CN" dirty="0" smtClean="0"/>
           </a:p>
           <a:p>
             <a:r>
               <a:rPr lang="zh-CN" altLang="en-US" dirty="0" smtClean="0"/>
-              <a:t>注意</a:t>
+              <a:t>一致性（</a:t>
             </a:r>
             <a:r>
               <a:rPr lang="en-US" altLang="zh-CN" dirty="0" smtClean="0"/>
-              <a:t>watch</a:t>
+              <a:t>Consistency</a:t>
             </a:r>
             <a:r>
               <a:rPr lang="zh-CN" altLang="en-US" dirty="0" smtClean="0"/>
-              <a:t>的</a:t>
-            </a:r>
-            <a:r>
-              <a:rPr lang="en-US" altLang="zh-CN" dirty="0" smtClean="0"/>
-              <a:t>key</a:t>
-            </a:r>
-            <a:r>
+              <a:t>）</a:t>
+            </a:r>
+            <a:br>
               <a:rPr lang="zh-CN" altLang="en-US" dirty="0" smtClean="0"/>
-              <a:t>是对整个连接有效的，事务也一样。如果连接断开，监视和事务都会被自动清除。当然了 </a:t>
-            </a:r>
-            <a:r>
-              <a:rPr lang="en-US" altLang="zh-CN" dirty="0" err="1" smtClean="0"/>
-              <a:t>exec,discard,unwatch</a:t>
-            </a:r>
+            </a:br>
             <a:r>
               <a:rPr lang="zh-CN" altLang="en-US" dirty="0" smtClean="0"/>
-              <a:t>命令都会清除连接中的所监视。</a:t>
-            </a:r>
-            <a:endParaRPr lang="en-US" altLang="zh-CN" dirty="0" smtClean="0"/>
-          </a:p>
-          <a:p>
-            <a:endParaRPr lang="en-US" altLang="zh-CN" dirty="0" smtClean="0"/>
-          </a:p>
-          <a:p>
-            <a:r>
+              <a:t>一致性是指事务使得系统从一个一致的状态转换到另一个一致状态。事务的一致性决定了一个系统设计和实现的复杂度。事务可以不同程度的一致性：</a:t>
+            </a:r>
+            <a:br>
               <a:rPr lang="zh-CN" altLang="en-US" dirty="0" smtClean="0"/>
-              <a:t>有些库的实现优化，将命令打包发给</a:t>
-            </a:r>
-            <a:r>
-              <a:rPr lang="en-US" altLang="zh-CN" dirty="0" smtClean="0"/>
-              <a:t>server</a:t>
+            </a:br>
+            <a:r>
+              <a:rPr lang="zh-CN" altLang="en-US" b="1" dirty="0" smtClean="0"/>
+              <a:t>强一致性</a:t>
             </a:r>
             <a:r>
               <a:rPr lang="zh-CN" altLang="en-US" dirty="0" smtClean="0"/>
-              <a:t>。</a:t>
-            </a:r>
-          </a:p>
-          <a:p>
-            <a:endParaRPr lang="en-US" altLang="zh-CN" dirty="0" smtClean="0"/>
-          </a:p>
-          <a:p>
-            <a:r>
+              <a:t>：读操作可以立即读到提交的更新操作。</a:t>
+            </a:r>
+            <a:br>
               <a:rPr lang="zh-CN" altLang="en-US" dirty="0" smtClean="0"/>
-              <a:t>当使用 </a:t>
-            </a:r>
-            <a:r>
-              <a:rPr lang="en-US" altLang="zh-CN" dirty="0" smtClean="0"/>
-              <a:t>AOF </a:t>
+            </a:br>
+            <a:r>
+              <a:rPr lang="zh-CN" altLang="en-US" b="1" dirty="0" smtClean="0"/>
+              <a:t>弱一致性</a:t>
             </a:r>
             <a:r>
               <a:rPr lang="zh-CN" altLang="en-US" dirty="0" smtClean="0"/>
-              <a:t>方式做持久化的时候， </a:t>
-            </a:r>
-            <a:r>
-              <a:rPr lang="en-US" altLang="zh-CN" dirty="0" err="1" smtClean="0"/>
-              <a:t>Redis</a:t>
-            </a:r>
-            <a:r>
-              <a:rPr lang="en-US" altLang="zh-CN" dirty="0" smtClean="0"/>
-              <a:t> </a:t>
-            </a:r>
-            <a:r>
+              <a:t>：提交的更新操作，不一定立即会被读操作读到，此种情况会存在一个不一致窗口，指的是读操作可以读到最新值的一段时间。</a:t>
+            </a:r>
+            <a:br>
               <a:rPr lang="zh-CN" altLang="en-US" dirty="0" smtClean="0"/>
-              <a:t>会使用单个 </a:t>
-            </a:r>
-            <a:r>
-              <a:rPr lang="en-US" altLang="zh-CN" dirty="0" smtClean="0"/>
-              <a:t>write(2) </a:t>
+            </a:br>
+            <a:r>
+              <a:rPr lang="zh-CN" altLang="en-US" b="1" dirty="0" smtClean="0"/>
+              <a:t>最终一致性</a:t>
             </a:r>
             <a:r>
               <a:rPr lang="zh-CN" altLang="en-US" dirty="0" smtClean="0"/>
-              <a:t>命令将事务写入到磁盘中。</a:t>
-            </a:r>
-            <a:endParaRPr lang="en-US" altLang="zh-CN" dirty="0" smtClean="0"/>
-          </a:p>
-          <a:p>
-            <a:endParaRPr lang="en-US" altLang="zh-CN" dirty="0" smtClean="0"/>
-          </a:p>
-          <a:p>
-            <a:r>
+              <a:t>：是弱一致性的特例。事务更新一份数据，最终一致性保证在没有其他事务更新同样的值的话，最终所有的事务都会读到之前事务更新的最新值。如果没有错误发生，不一致窗口的大小依赖于：通信延迟，系统负载等。</a:t>
+            </a:r>
+            <a:br>
               <a:rPr lang="zh-CN" altLang="en-US" dirty="0" smtClean="0"/>
-              <a:t>然而，如果 </a:t>
-            </a:r>
-            <a:r>
-              <a:rPr lang="en-US" altLang="zh-CN" dirty="0" err="1" smtClean="0"/>
-              <a:t>Redis</a:t>
-            </a:r>
-            <a:r>
-              <a:rPr lang="en-US" altLang="zh-CN" dirty="0" smtClean="0"/>
-              <a:t> </a:t>
-            </a:r>
+            </a:br>
             <a:r>
               <a:rPr lang="zh-CN" altLang="en-US" dirty="0" smtClean="0"/>
-              <a:t>服务器因为某些原因被管理员杀死，或者遇上某种硬件故障，那么可能只有部分事务命令会被成功写入到磁盘中。</a:t>
-            </a:r>
-          </a:p>
-          <a:p>
-            <a:r>
+              <a:t>其他一致性变体还有：</a:t>
+            </a:r>
+            <a:br>
               <a:rPr lang="zh-CN" altLang="en-US" dirty="0" smtClean="0"/>
-              <a:t>如果 </a:t>
-            </a:r>
-            <a:r>
-              <a:rPr lang="en-US" altLang="zh-CN" dirty="0" err="1" smtClean="0"/>
-              <a:t>Redis</a:t>
-            </a:r>
-            <a:r>
-              <a:rPr lang="en-US" altLang="zh-CN" dirty="0" smtClean="0"/>
-              <a:t> </a:t>
+            </a:br>
+            <a:r>
+              <a:rPr lang="zh-CN" altLang="en-US" b="1" dirty="0" smtClean="0"/>
+              <a:t>单调一致性</a:t>
             </a:r>
             <a:r>
               <a:rPr lang="zh-CN" altLang="en-US" dirty="0" smtClean="0"/>
-              <a:t>在重新启动时发现 </a:t>
-            </a:r>
-            <a:r>
-              <a:rPr lang="en-US" altLang="zh-CN" dirty="0" smtClean="0"/>
-              <a:t>AOF </a:t>
-            </a:r>
-            <a:r>
+              <a:t>：如果一个进程已经读到一个值，那么后续不会读到更早的值。</a:t>
+            </a:r>
+            <a:br>
               <a:rPr lang="zh-CN" altLang="en-US" dirty="0" smtClean="0"/>
-              <a:t>文件出了这样的问题，那么它会退出，并汇报一个错误。</a:t>
-            </a:r>
-          </a:p>
-          <a:p>
+            </a:br>
+            <a:r>
+              <a:rPr lang="zh-CN" altLang="en-US" b="1" dirty="0" smtClean="0"/>
+              <a:t>会话一致性</a:t>
+            </a:r>
             <a:r>
               <a:rPr lang="zh-CN" altLang="en-US" dirty="0" smtClean="0"/>
-              <a:t>使用 </a:t>
-            </a:r>
-            <a:r>
-              <a:rPr lang="en-US" altLang="zh-CN" dirty="0" err="1" smtClean="0"/>
-              <a:t>redis</a:t>
-            </a:r>
-            <a:r>
-              <a:rPr lang="en-US" altLang="zh-CN" dirty="0" smtClean="0"/>
-              <a:t>-check-</a:t>
-            </a:r>
-            <a:r>
-              <a:rPr lang="en-US" altLang="zh-CN" dirty="0" err="1" smtClean="0"/>
-              <a:t>aof</a:t>
-            </a:r>
-            <a:r>
-              <a:rPr lang="en-US" altLang="zh-CN" dirty="0" smtClean="0"/>
-              <a:t> </a:t>
-            </a:r>
-            <a:r>
-              <a:rPr lang="zh-CN" altLang="en-US" dirty="0" smtClean="0"/>
-              <a:t>程序可以修复这一问题：它会移除 </a:t>
-            </a:r>
-            <a:r>
-              <a:rPr lang="en-US" altLang="zh-CN" dirty="0" smtClean="0"/>
-              <a:t>AOF </a:t>
-            </a:r>
-            <a:r>
-              <a:rPr lang="zh-CN" altLang="en-US" dirty="0" smtClean="0"/>
-              <a:t>文件中不完整事务的信息，确保服务器可以顺利启动。</a:t>
-            </a:r>
-          </a:p>
-          <a:p>
-            <a:endParaRPr lang="zh-CN" altLang="en-US" dirty="0"/>
+              <a:t>：保证客户端和服务器交互的会话过程中，读操作可以读到更新操作后的最新值。</a:t>
+            </a:r>
           </a:p>
         </p:txBody>
       </p:sp>
@@ -1893,7 +2731,7 @@
     </p:spTree>
     <p:extLst>
       <p:ext uri="{BB962C8B-B14F-4D97-AF65-F5344CB8AC3E}">
-        <p14:creationId xmlns:p14="http://schemas.microsoft.com/office/powerpoint/2010/main" xmlns="" val="1267252750"/>
+        <p14:creationId xmlns:p14="http://schemas.microsoft.com/office/powerpoint/2010/main" val="1267252750"/>
       </p:ext>
     </p:extLst>
   </p:cSld>
@@ -1948,54 +2786,23 @@
           <a:lstStyle/>
           <a:p>
             <a:r>
-              <a:rPr lang="en-US" altLang="zh-CN" sz="1200" b="0" i="0" u="none" strike="noStrike" kern="1200" baseline="0" dirty="0" err="1" smtClean="0">
-                <a:solidFill>
-                  <a:schemeClr val="tx1"/>
-                </a:solidFill>
-                <a:latin typeface="+mn-lt"/>
-                <a:ea typeface="+mn-ea"/>
-                <a:cs typeface="+mn-cs"/>
-              </a:rPr>
-              <a:t>zlbytes</a:t>
-            </a:r>
-            <a:r>
-              <a:rPr lang="en-US" altLang="zh-CN" sz="1200" b="0" i="0" u="none" strike="noStrike" kern="1200" baseline="0" dirty="0" smtClean="0">
-                <a:solidFill>
-                  <a:schemeClr val="tx1"/>
-                </a:solidFill>
-                <a:latin typeface="+mn-lt"/>
-                <a:ea typeface="+mn-ea"/>
-                <a:cs typeface="+mn-cs"/>
-              </a:rPr>
-              <a:t> uint32_t </a:t>
-            </a:r>
-            <a:r>
-              <a:rPr lang="zh-CN" altLang="en-US" sz="1200" b="0" i="0" u="none" strike="noStrike" kern="1200" baseline="0" dirty="0" smtClean="0">
-                <a:solidFill>
-                  <a:schemeClr val="tx1"/>
-                </a:solidFill>
-                <a:latin typeface="+mn-lt"/>
-                <a:ea typeface="+mn-ea"/>
-                <a:cs typeface="+mn-cs"/>
-              </a:rPr>
-              <a:t>整个</a:t>
-            </a:r>
-            <a:r>
-              <a:rPr lang="en-US" altLang="zh-CN" sz="1200" b="0" i="0" u="none" strike="noStrike" kern="1200" baseline="0" dirty="0" err="1" smtClean="0">
-                <a:solidFill>
-                  <a:schemeClr val="tx1"/>
-                </a:solidFill>
-                <a:latin typeface="+mn-lt"/>
-                <a:ea typeface="+mn-ea"/>
-                <a:cs typeface="+mn-cs"/>
-              </a:rPr>
-              <a:t>ziplist</a:t>
-            </a:r>
-            <a:r>
-              <a:rPr lang="en-US" altLang="zh-CN" sz="1200" b="0" i="0" u="none" strike="noStrike" kern="1200" baseline="0" dirty="0" smtClean="0">
-                <a:solidFill>
-                  <a:schemeClr val="tx1"/>
-                </a:solidFill>
+              <a:rPr lang="en-US" altLang="zh-CN" sz="1200" b="0" kern="1200" dirty="0" smtClean="0">
+                <a:solidFill>
+                  <a:schemeClr val="tx1"/>
+                </a:solidFill>
+                <a:effectLst/>
+                <a:latin typeface="+mn-lt"/>
+                <a:ea typeface="+mn-ea"/>
+                <a:cs typeface="+mn-cs"/>
+              </a:rPr>
+              <a:t>1.</a:t>
+            </a:r>
+            <a:r>
+              <a:rPr lang="zh-CN" altLang="en-US" sz="1200" b="0" kern="1200" dirty="0" smtClean="0">
+                <a:solidFill>
+                  <a:schemeClr val="tx1"/>
+                </a:solidFill>
+                <a:effectLst/>
                 <a:latin typeface="+mn-lt"/>
                 <a:ea typeface="+mn-ea"/>
                 <a:cs typeface="+mn-cs"/>
@@ -2003,32 +2810,97 @@
               <a:t> </a:t>
             </a:r>
             <a:r>
-              <a:rPr lang="zh-CN" altLang="en-US" sz="1200" b="0" i="0" u="none" strike="noStrike" kern="1200" baseline="0" dirty="0" smtClean="0">
-                <a:solidFill>
-                  <a:schemeClr val="tx1"/>
-                </a:solidFill>
-                <a:latin typeface="+mn-lt"/>
-                <a:ea typeface="+mn-ea"/>
-                <a:cs typeface="+mn-cs"/>
-              </a:rPr>
-              <a:t>占用的内存字节数，对</a:t>
-            </a:r>
-            <a:r>
-              <a:rPr lang="en-US" altLang="zh-CN" sz="1200" b="0" i="0" u="none" strike="noStrike" kern="1200" baseline="0" dirty="0" err="1" smtClean="0">
-                <a:solidFill>
-                  <a:schemeClr val="tx1"/>
-                </a:solidFill>
-                <a:latin typeface="+mn-lt"/>
-                <a:ea typeface="+mn-ea"/>
-                <a:cs typeface="+mn-cs"/>
-              </a:rPr>
-              <a:t>ziplist</a:t>
-            </a:r>
-            <a:r>
-              <a:rPr lang="en-US" altLang="zh-CN" sz="1200" b="0" i="0" u="none" strike="noStrike" kern="1200" baseline="0" dirty="0" smtClean="0">
-                <a:solidFill>
-                  <a:schemeClr val="tx1"/>
-                </a:solidFill>
+              <a:rPr lang="en-US" altLang="zh-CN" sz="1200" b="0" kern="1200" dirty="0" smtClean="0">
+                <a:solidFill>
+                  <a:schemeClr val="tx1"/>
+                </a:solidFill>
+                <a:effectLst/>
+                <a:latin typeface="+mn-lt"/>
+                <a:ea typeface="+mn-ea"/>
+                <a:cs typeface="+mn-cs"/>
+              </a:rPr>
+              <a:t>always</a:t>
+            </a:r>
+            <a:r>
+              <a:rPr lang="zh-CN" altLang="en-US" sz="1200" b="0" kern="1200" dirty="0" smtClean="0">
+                <a:solidFill>
+                  <a:schemeClr val="tx1"/>
+                </a:solidFill>
+                <a:effectLst/>
+                <a:latin typeface="+mn-lt"/>
+                <a:ea typeface="+mn-ea"/>
+                <a:cs typeface="+mn-cs"/>
+              </a:rPr>
+              <a:t>：每一条</a:t>
+            </a:r>
+            <a:r>
+              <a:rPr lang="en-US" altLang="zh-CN" sz="1200" b="0" kern="1200" dirty="0" err="1" smtClean="0">
+                <a:solidFill>
+                  <a:schemeClr val="tx1"/>
+                </a:solidFill>
+                <a:effectLst/>
+                <a:latin typeface="+mn-lt"/>
+                <a:ea typeface="+mn-ea"/>
+                <a:cs typeface="+mn-cs"/>
+              </a:rPr>
+              <a:t>aof</a:t>
+            </a:r>
+            <a:r>
+              <a:rPr lang="zh-CN" altLang="en-US" sz="1200" b="0" kern="1200" dirty="0" smtClean="0">
+                <a:solidFill>
+                  <a:schemeClr val="tx1"/>
+                </a:solidFill>
+                <a:effectLst/>
+                <a:latin typeface="+mn-lt"/>
+                <a:ea typeface="+mn-ea"/>
+                <a:cs typeface="+mn-cs"/>
+              </a:rPr>
+              <a:t>记录都立即同步到文件，这是最安全的方式，也以为更多的磁盘操作和阻塞延迟，是</a:t>
+            </a:r>
+            <a:r>
+              <a:rPr lang="en-US" altLang="zh-CN" sz="1200" b="0" kern="1200" dirty="0" smtClean="0">
+                <a:solidFill>
+                  <a:schemeClr val="tx1"/>
+                </a:solidFill>
+                <a:effectLst/>
+                <a:latin typeface="+mn-lt"/>
+                <a:ea typeface="+mn-ea"/>
+                <a:cs typeface="+mn-cs"/>
+              </a:rPr>
+              <a:t>IO</a:t>
+            </a:r>
+            <a:r>
+              <a:rPr lang="zh-CN" altLang="en-US" sz="1200" b="0" kern="1200" dirty="0" smtClean="0">
+                <a:solidFill>
+                  <a:schemeClr val="tx1"/>
+                </a:solidFill>
+                <a:effectLst/>
+                <a:latin typeface="+mn-lt"/>
+                <a:ea typeface="+mn-ea"/>
+                <a:cs typeface="+mn-cs"/>
+              </a:rPr>
+              <a:t>开支较大。</a:t>
+            </a:r>
+          </a:p>
+          <a:p>
+            <a:r>
+              <a:rPr lang="en-US" altLang="zh-CN" sz="1200" b="0" kern="1200" dirty="0" smtClean="0">
+                <a:solidFill>
+                  <a:schemeClr val="tx1"/>
+                </a:solidFill>
+                <a:effectLst/>
+                <a:latin typeface="+mn-lt"/>
+                <a:ea typeface="+mn-ea"/>
+                <a:cs typeface="+mn-cs"/>
+              </a:rPr>
+              <a:t>2.</a:t>
+            </a:r>
+            <a:r>
+              <a:rPr lang="zh-CN" altLang="en-US" sz="1200" b="0" kern="1200" dirty="0" smtClean="0">
+                <a:solidFill>
+                  <a:schemeClr val="tx1"/>
+                </a:solidFill>
+                <a:effectLst/>
                 <a:latin typeface="+mn-lt"/>
                 <a:ea typeface="+mn-ea"/>
                 <a:cs typeface="+mn-cs"/>
@@ -2036,80 +2908,181 @@
               <a:t> </a:t>
             </a:r>
             <a:r>
-              <a:rPr lang="zh-CN" altLang="en-US" sz="1200" b="0" i="0" u="none" strike="noStrike" kern="1200" baseline="0" dirty="0" smtClean="0">
-                <a:solidFill>
-                  <a:schemeClr val="tx1"/>
-                </a:solidFill>
-                <a:latin typeface="+mn-lt"/>
-                <a:ea typeface="+mn-ea"/>
-                <a:cs typeface="+mn-cs"/>
-              </a:rPr>
-              <a:t>进行内存重分配，或</a:t>
-            </a:r>
-          </a:p>
-          <a:p>
-            <a:r>
-              <a:rPr lang="zh-CN" altLang="en-US" sz="1200" b="0" i="0" u="none" strike="noStrike" kern="1200" baseline="0" dirty="0" smtClean="0">
-                <a:solidFill>
-                  <a:schemeClr val="tx1"/>
-                </a:solidFill>
-                <a:latin typeface="+mn-lt"/>
-                <a:ea typeface="+mn-ea"/>
-                <a:cs typeface="+mn-cs"/>
-              </a:rPr>
-              <a:t>者计算末端时使用。</a:t>
-            </a:r>
-          </a:p>
-          <a:p>
-            <a:r>
-              <a:rPr lang="en-US" altLang="zh-CN" sz="1200" b="0" i="0" u="none" strike="noStrike" kern="1200" baseline="0" dirty="0" err="1" smtClean="0">
-                <a:solidFill>
-                  <a:schemeClr val="tx1"/>
-                </a:solidFill>
-                <a:latin typeface="+mn-lt"/>
-                <a:ea typeface="+mn-ea"/>
-                <a:cs typeface="+mn-cs"/>
-              </a:rPr>
-              <a:t>zltail</a:t>
-            </a:r>
-            <a:r>
-              <a:rPr lang="en-US" altLang="zh-CN" sz="1200" b="0" i="0" u="none" strike="noStrike" kern="1200" baseline="0" dirty="0" smtClean="0">
-                <a:solidFill>
-                  <a:schemeClr val="tx1"/>
-                </a:solidFill>
-                <a:latin typeface="+mn-lt"/>
-                <a:ea typeface="+mn-ea"/>
-                <a:cs typeface="+mn-cs"/>
-              </a:rPr>
-              <a:t> uint32_t </a:t>
-            </a:r>
-            <a:r>
-              <a:rPr lang="zh-CN" altLang="en-US" sz="1200" b="0" i="0" u="none" strike="noStrike" kern="1200" baseline="0" dirty="0" smtClean="0">
-                <a:solidFill>
-                  <a:schemeClr val="tx1"/>
-                </a:solidFill>
-                <a:latin typeface="+mn-lt"/>
-                <a:ea typeface="+mn-ea"/>
-                <a:cs typeface="+mn-cs"/>
-              </a:rPr>
-              <a:t>到达</a:t>
-            </a:r>
-            <a:r>
-              <a:rPr lang="en-US" altLang="zh-CN" sz="1200" b="0" i="0" u="none" strike="noStrike" kern="1200" baseline="0" dirty="0" err="1" smtClean="0">
-                <a:solidFill>
-                  <a:schemeClr val="tx1"/>
-                </a:solidFill>
-                <a:latin typeface="+mn-lt"/>
-                <a:ea typeface="+mn-ea"/>
-                <a:cs typeface="+mn-cs"/>
-              </a:rPr>
-              <a:t>ziplist</a:t>
-            </a:r>
-            <a:r>
-              <a:rPr lang="en-US" altLang="zh-CN" sz="1200" b="0" i="0" u="none" strike="noStrike" kern="1200" baseline="0" dirty="0" smtClean="0">
-                <a:solidFill>
-                  <a:schemeClr val="tx1"/>
-                </a:solidFill>
+              <a:rPr lang="en-US" altLang="zh-CN" sz="1200" b="0" kern="1200" dirty="0" err="1" smtClean="0">
+                <a:solidFill>
+                  <a:schemeClr val="tx1"/>
+                </a:solidFill>
+                <a:effectLst/>
+                <a:latin typeface="+mn-lt"/>
+                <a:ea typeface="+mn-ea"/>
+                <a:cs typeface="+mn-cs"/>
+              </a:rPr>
+              <a:t>everysec</a:t>
+            </a:r>
+            <a:r>
+              <a:rPr lang="en-US" altLang="zh-CN" sz="1200" b="0" kern="1200" dirty="0" smtClean="0">
+                <a:solidFill>
+                  <a:schemeClr val="tx1"/>
+                </a:solidFill>
+                <a:effectLst/>
+                <a:latin typeface="+mn-lt"/>
+                <a:ea typeface="+mn-ea"/>
+                <a:cs typeface="+mn-cs"/>
+              </a:rPr>
+              <a:t>(</a:t>
+            </a:r>
+            <a:r>
+              <a:rPr lang="zh-CN" altLang="en-US" sz="1200" b="0" kern="1200" dirty="0" smtClean="0">
+                <a:solidFill>
+                  <a:schemeClr val="tx1"/>
+                </a:solidFill>
+                <a:effectLst/>
+                <a:latin typeface="+mn-lt"/>
+                <a:ea typeface="+mn-ea"/>
+                <a:cs typeface="+mn-cs"/>
+              </a:rPr>
+              <a:t>推荐</a:t>
+            </a:r>
+            <a:r>
+              <a:rPr lang="en-US" altLang="zh-CN" sz="1200" b="0" kern="1200" dirty="0" smtClean="0">
+                <a:solidFill>
+                  <a:schemeClr val="tx1"/>
+                </a:solidFill>
+                <a:effectLst/>
+                <a:latin typeface="+mn-lt"/>
+                <a:ea typeface="+mn-ea"/>
+                <a:cs typeface="+mn-cs"/>
+              </a:rPr>
+              <a:t>)</a:t>
+            </a:r>
+            <a:r>
+              <a:rPr lang="zh-CN" altLang="en-US" sz="1200" b="0" kern="1200" dirty="0" smtClean="0">
+                <a:solidFill>
+                  <a:schemeClr val="tx1"/>
+                </a:solidFill>
+                <a:effectLst/>
+                <a:latin typeface="+mn-lt"/>
+                <a:ea typeface="+mn-ea"/>
+                <a:cs typeface="+mn-cs"/>
+              </a:rPr>
+              <a:t>：每秒同步一次，性能和安全都比较中庸的方式，也是</a:t>
+            </a:r>
+            <a:r>
+              <a:rPr lang="en-US" altLang="zh-CN" sz="1200" b="0" kern="1200" dirty="0" err="1" smtClean="0">
+                <a:solidFill>
+                  <a:schemeClr val="tx1"/>
+                </a:solidFill>
+                <a:effectLst/>
+                <a:latin typeface="+mn-lt"/>
+                <a:ea typeface="+mn-ea"/>
+                <a:cs typeface="+mn-cs"/>
+              </a:rPr>
+              <a:t>redis</a:t>
+            </a:r>
+            <a:r>
+              <a:rPr lang="zh-CN" altLang="en-US" sz="1200" b="0" kern="1200" dirty="0" smtClean="0">
+                <a:solidFill>
+                  <a:schemeClr val="tx1"/>
+                </a:solidFill>
+                <a:effectLst/>
+                <a:latin typeface="+mn-lt"/>
+                <a:ea typeface="+mn-ea"/>
+                <a:cs typeface="+mn-cs"/>
+              </a:rPr>
+              <a:t>推荐的方式。如果遇到物理服务器故障，有可能导致最近一秒内</a:t>
+            </a:r>
+            <a:r>
+              <a:rPr lang="en-US" altLang="zh-CN" sz="1200" b="0" kern="1200" dirty="0" err="1" smtClean="0">
+                <a:solidFill>
+                  <a:schemeClr val="tx1"/>
+                </a:solidFill>
+                <a:effectLst/>
+                <a:latin typeface="+mn-lt"/>
+                <a:ea typeface="+mn-ea"/>
+                <a:cs typeface="+mn-cs"/>
+              </a:rPr>
+              <a:t>aof</a:t>
+            </a:r>
+            <a:r>
+              <a:rPr lang="zh-CN" altLang="en-US" sz="1200" b="0" kern="1200" dirty="0" smtClean="0">
+                <a:solidFill>
+                  <a:schemeClr val="tx1"/>
+                </a:solidFill>
+                <a:effectLst/>
+                <a:latin typeface="+mn-lt"/>
+                <a:ea typeface="+mn-ea"/>
+                <a:cs typeface="+mn-cs"/>
+              </a:rPr>
+              <a:t>记录丢失</a:t>
+            </a:r>
+            <a:r>
+              <a:rPr lang="en-US" altLang="zh-CN" sz="1200" b="0" kern="1200" dirty="0" smtClean="0">
+                <a:solidFill>
+                  <a:schemeClr val="tx1"/>
+                </a:solidFill>
+                <a:effectLst/>
+                <a:latin typeface="+mn-lt"/>
+                <a:ea typeface="+mn-ea"/>
+                <a:cs typeface="+mn-cs"/>
+              </a:rPr>
+              <a:t>(</a:t>
+            </a:r>
+            <a:r>
+              <a:rPr lang="zh-CN" altLang="en-US" sz="1200" b="0" kern="1200" dirty="0" smtClean="0">
+                <a:solidFill>
+                  <a:schemeClr val="tx1"/>
+                </a:solidFill>
+                <a:effectLst/>
+                <a:latin typeface="+mn-lt"/>
+                <a:ea typeface="+mn-ea"/>
+                <a:cs typeface="+mn-cs"/>
+              </a:rPr>
+              <a:t>可能为部分丢失</a:t>
+            </a:r>
+            <a:r>
+              <a:rPr lang="en-US" altLang="zh-CN" sz="1200" b="0" kern="1200" dirty="0" smtClean="0">
+                <a:solidFill>
+                  <a:schemeClr val="tx1"/>
+                </a:solidFill>
+                <a:effectLst/>
+                <a:latin typeface="+mn-lt"/>
+                <a:ea typeface="+mn-ea"/>
+                <a:cs typeface="+mn-cs"/>
+              </a:rPr>
+              <a:t>)</a:t>
+            </a:r>
+            <a:r>
+              <a:rPr lang="zh-CN" altLang="en-US" sz="1200" b="0" kern="1200" dirty="0" smtClean="0">
+                <a:solidFill>
+                  <a:schemeClr val="tx1"/>
+                </a:solidFill>
+                <a:effectLst/>
+                <a:latin typeface="+mn-lt"/>
+                <a:ea typeface="+mn-ea"/>
+                <a:cs typeface="+mn-cs"/>
+              </a:rPr>
+              <a:t>。</a:t>
+            </a:r>
+          </a:p>
+          <a:p>
+            <a:r>
+              <a:rPr lang="en-US" altLang="zh-CN" sz="1200" b="0" kern="1200" dirty="0" smtClean="0">
+                <a:solidFill>
+                  <a:schemeClr val="tx1"/>
+                </a:solidFill>
+                <a:effectLst/>
+                <a:latin typeface="+mn-lt"/>
+                <a:ea typeface="+mn-ea"/>
+                <a:cs typeface="+mn-cs"/>
+              </a:rPr>
+              <a:t>3.</a:t>
+            </a:r>
+            <a:r>
+              <a:rPr lang="zh-CN" altLang="en-US" sz="1200" b="0" kern="1200" dirty="0" smtClean="0">
+                <a:solidFill>
+                  <a:schemeClr val="tx1"/>
+                </a:solidFill>
+                <a:effectLst/>
                 <a:latin typeface="+mn-lt"/>
                 <a:ea typeface="+mn-ea"/>
                 <a:cs typeface="+mn-cs"/>
@@ -2117,441 +3090,134 @@
               <a:t> </a:t>
             </a:r>
             <a:r>
-              <a:rPr lang="zh-CN" altLang="en-US" sz="1200" b="0" i="0" u="none" strike="noStrike" kern="1200" baseline="0" dirty="0" smtClean="0">
-                <a:solidFill>
-                  <a:schemeClr val="tx1"/>
-                </a:solidFill>
-                <a:latin typeface="+mn-lt"/>
-                <a:ea typeface="+mn-ea"/>
-                <a:cs typeface="+mn-cs"/>
-              </a:rPr>
-              <a:t>表尾节点的偏移量。通过这个偏移量，可以在不遍</a:t>
-            </a:r>
-          </a:p>
-          <a:p>
-            <a:r>
-              <a:rPr lang="zh-CN" altLang="en-US" sz="1200" b="0" i="0" u="none" strike="noStrike" kern="1200" baseline="0" dirty="0" smtClean="0">
-                <a:solidFill>
-                  <a:schemeClr val="tx1"/>
-                </a:solidFill>
-                <a:latin typeface="+mn-lt"/>
-                <a:ea typeface="+mn-ea"/>
-                <a:cs typeface="+mn-cs"/>
-              </a:rPr>
-              <a:t>历整个</a:t>
-            </a:r>
-            <a:r>
-              <a:rPr lang="en-US" altLang="zh-CN" sz="1200" b="0" i="0" u="none" strike="noStrike" kern="1200" baseline="0" dirty="0" err="1" smtClean="0">
-                <a:solidFill>
-                  <a:schemeClr val="tx1"/>
-                </a:solidFill>
-                <a:latin typeface="+mn-lt"/>
-                <a:ea typeface="+mn-ea"/>
-                <a:cs typeface="+mn-cs"/>
-              </a:rPr>
-              <a:t>ziplist</a:t>
-            </a:r>
-            <a:r>
-              <a:rPr lang="en-US" altLang="zh-CN" sz="1200" b="0" i="0" u="none" strike="noStrike" kern="1200" baseline="0" dirty="0" smtClean="0">
-                <a:solidFill>
-                  <a:schemeClr val="tx1"/>
-                </a:solidFill>
-                <a:latin typeface="+mn-lt"/>
-                <a:ea typeface="+mn-ea"/>
-                <a:cs typeface="+mn-cs"/>
-              </a:rPr>
-              <a:t> </a:t>
-            </a:r>
-            <a:r>
-              <a:rPr lang="zh-CN" altLang="en-US" sz="1200" b="0" i="0" u="none" strike="noStrike" kern="1200" baseline="0" dirty="0" smtClean="0">
-                <a:solidFill>
-                  <a:schemeClr val="tx1"/>
-                </a:solidFill>
-                <a:latin typeface="+mn-lt"/>
-                <a:ea typeface="+mn-ea"/>
-                <a:cs typeface="+mn-cs"/>
-              </a:rPr>
-              <a:t>的前提下，弹出表尾节点。</a:t>
-            </a:r>
-          </a:p>
-          <a:p>
-            <a:r>
-              <a:rPr lang="en-US" altLang="zh-CN" sz="1200" b="0" i="0" u="none" strike="noStrike" kern="1200" baseline="0" dirty="0" err="1" smtClean="0">
-                <a:solidFill>
-                  <a:schemeClr val="tx1"/>
-                </a:solidFill>
-                <a:latin typeface="+mn-lt"/>
-                <a:ea typeface="+mn-ea"/>
-                <a:cs typeface="+mn-cs"/>
-              </a:rPr>
-              <a:t>zllen</a:t>
-            </a:r>
-            <a:r>
-              <a:rPr lang="en-US" altLang="zh-CN" sz="1200" b="0" i="0" u="none" strike="noStrike" kern="1200" baseline="0" dirty="0" smtClean="0">
-                <a:solidFill>
-                  <a:schemeClr val="tx1"/>
-                </a:solidFill>
-                <a:latin typeface="+mn-lt"/>
-                <a:ea typeface="+mn-ea"/>
-                <a:cs typeface="+mn-cs"/>
-              </a:rPr>
-              <a:t> uint16_t </a:t>
-            </a:r>
-            <a:r>
-              <a:rPr lang="en-US" altLang="zh-CN" sz="1200" b="0" i="0" u="none" strike="noStrike" kern="1200" baseline="0" dirty="0" err="1" smtClean="0">
-                <a:solidFill>
-                  <a:schemeClr val="tx1"/>
-                </a:solidFill>
-                <a:latin typeface="+mn-lt"/>
-                <a:ea typeface="+mn-ea"/>
-                <a:cs typeface="+mn-cs"/>
-              </a:rPr>
-              <a:t>ziplist</a:t>
-            </a:r>
-            <a:r>
-              <a:rPr lang="en-US" altLang="zh-CN" sz="1200" b="0" i="0" u="none" strike="noStrike" kern="1200" baseline="0" dirty="0" smtClean="0">
-                <a:solidFill>
-                  <a:schemeClr val="tx1"/>
-                </a:solidFill>
-                <a:latin typeface="+mn-lt"/>
-                <a:ea typeface="+mn-ea"/>
-                <a:cs typeface="+mn-cs"/>
-              </a:rPr>
-              <a:t> </a:t>
-            </a:r>
-            <a:r>
-              <a:rPr lang="zh-CN" altLang="en-US" sz="1200" b="0" i="0" u="none" strike="noStrike" kern="1200" baseline="0" dirty="0" smtClean="0">
-                <a:solidFill>
-                  <a:schemeClr val="tx1"/>
-                </a:solidFill>
-                <a:latin typeface="+mn-lt"/>
-                <a:ea typeface="+mn-ea"/>
-                <a:cs typeface="+mn-cs"/>
-              </a:rPr>
-              <a:t>中节点的数量。当这个值小于</a:t>
-            </a:r>
-            <a:r>
-              <a:rPr lang="en-US" altLang="zh-CN" sz="1200" b="0" i="0" u="none" strike="noStrike" kern="1200" baseline="0" dirty="0" smtClean="0">
-                <a:solidFill>
-                  <a:schemeClr val="tx1"/>
-                </a:solidFill>
-                <a:latin typeface="+mn-lt"/>
-                <a:ea typeface="+mn-ea"/>
-                <a:cs typeface="+mn-cs"/>
-              </a:rPr>
-              <a:t>UINT16_MAX</a:t>
-            </a:r>
-            <a:r>
-              <a:rPr lang="zh-CN" altLang="en-US" sz="1200" b="0" i="0" u="none" strike="noStrike" kern="1200" baseline="0" dirty="0" smtClean="0">
-                <a:solidFill>
-                  <a:schemeClr val="tx1"/>
-                </a:solidFill>
-                <a:latin typeface="+mn-lt"/>
-                <a:ea typeface="+mn-ea"/>
-                <a:cs typeface="+mn-cs"/>
-              </a:rPr>
-              <a:t>（</a:t>
-            </a:r>
-            <a:r>
-              <a:rPr lang="en-US" altLang="zh-CN" sz="1200" b="0" i="0" u="none" strike="noStrike" kern="1200" baseline="0" dirty="0" smtClean="0">
-                <a:solidFill>
-                  <a:schemeClr val="tx1"/>
-                </a:solidFill>
-                <a:latin typeface="+mn-lt"/>
-                <a:ea typeface="+mn-ea"/>
-                <a:cs typeface="+mn-cs"/>
-              </a:rPr>
-              <a:t>65535</a:t>
-            </a:r>
-            <a:r>
-              <a:rPr lang="zh-CN" altLang="en-US" sz="1200" b="0" i="0" u="none" strike="noStrike" kern="1200" baseline="0" dirty="0" smtClean="0">
-                <a:solidFill>
-                  <a:schemeClr val="tx1"/>
-                </a:solidFill>
-                <a:latin typeface="+mn-lt"/>
-                <a:ea typeface="+mn-ea"/>
-                <a:cs typeface="+mn-cs"/>
-              </a:rPr>
-              <a:t>）时，</a:t>
-            </a:r>
-          </a:p>
-          <a:p>
-            <a:r>
-              <a:rPr lang="zh-CN" altLang="en-US" sz="1200" b="0" i="0" u="none" strike="noStrike" kern="1200" baseline="0" dirty="0" smtClean="0">
-                <a:solidFill>
-                  <a:schemeClr val="tx1"/>
-                </a:solidFill>
-                <a:latin typeface="+mn-lt"/>
-                <a:ea typeface="+mn-ea"/>
-                <a:cs typeface="+mn-cs"/>
-              </a:rPr>
-              <a:t>这个值就是</a:t>
-            </a:r>
-            <a:r>
-              <a:rPr lang="en-US" altLang="zh-CN" sz="1200" b="0" i="0" u="none" strike="noStrike" kern="1200" baseline="0" dirty="0" err="1" smtClean="0">
-                <a:solidFill>
-                  <a:schemeClr val="tx1"/>
-                </a:solidFill>
-                <a:latin typeface="+mn-lt"/>
-                <a:ea typeface="+mn-ea"/>
-                <a:cs typeface="+mn-cs"/>
-              </a:rPr>
-              <a:t>ziplist</a:t>
-            </a:r>
-            <a:r>
-              <a:rPr lang="en-US" altLang="zh-CN" sz="1200" b="0" i="0" u="none" strike="noStrike" kern="1200" baseline="0" dirty="0" smtClean="0">
-                <a:solidFill>
-                  <a:schemeClr val="tx1"/>
-                </a:solidFill>
-                <a:latin typeface="+mn-lt"/>
-                <a:ea typeface="+mn-ea"/>
-                <a:cs typeface="+mn-cs"/>
-              </a:rPr>
-              <a:t> </a:t>
-            </a:r>
-            <a:r>
-              <a:rPr lang="zh-CN" altLang="en-US" sz="1200" b="0" i="0" u="none" strike="noStrike" kern="1200" baseline="0" dirty="0" smtClean="0">
-                <a:solidFill>
-                  <a:schemeClr val="tx1"/>
-                </a:solidFill>
-                <a:latin typeface="+mn-lt"/>
-                <a:ea typeface="+mn-ea"/>
-                <a:cs typeface="+mn-cs"/>
-              </a:rPr>
-              <a:t>中节点的数量；当这个值等于</a:t>
-            </a:r>
-            <a:r>
-              <a:rPr lang="en-US" altLang="zh-CN" sz="1200" b="0" i="0" u="none" strike="noStrike" kern="1200" baseline="0" dirty="0" smtClean="0">
-                <a:solidFill>
-                  <a:schemeClr val="tx1"/>
-                </a:solidFill>
-                <a:latin typeface="+mn-lt"/>
-                <a:ea typeface="+mn-ea"/>
-                <a:cs typeface="+mn-cs"/>
-              </a:rPr>
-              <a:t>UINT16_MAX</a:t>
-            </a:r>
-          </a:p>
-          <a:p>
-            <a:r>
-              <a:rPr lang="zh-CN" altLang="en-US" sz="1200" b="0" i="0" u="none" strike="noStrike" kern="1200" baseline="0" dirty="0" smtClean="0">
-                <a:solidFill>
-                  <a:schemeClr val="tx1"/>
-                </a:solidFill>
-                <a:latin typeface="+mn-lt"/>
-                <a:ea typeface="+mn-ea"/>
-                <a:cs typeface="+mn-cs"/>
-              </a:rPr>
-              <a:t>时，节点的数量需要遍历整个</a:t>
-            </a:r>
-            <a:r>
-              <a:rPr lang="en-US" altLang="zh-CN" sz="1200" b="0" i="0" u="none" strike="noStrike" kern="1200" baseline="0" dirty="0" err="1" smtClean="0">
-                <a:solidFill>
-                  <a:schemeClr val="tx1"/>
-                </a:solidFill>
-                <a:latin typeface="+mn-lt"/>
-                <a:ea typeface="+mn-ea"/>
-                <a:cs typeface="+mn-cs"/>
-              </a:rPr>
-              <a:t>ziplist</a:t>
-            </a:r>
-            <a:r>
-              <a:rPr lang="en-US" altLang="zh-CN" sz="1200" b="0" i="0" u="none" strike="noStrike" kern="1200" baseline="0" dirty="0" smtClean="0">
-                <a:solidFill>
-                  <a:schemeClr val="tx1"/>
-                </a:solidFill>
-                <a:latin typeface="+mn-lt"/>
-                <a:ea typeface="+mn-ea"/>
-                <a:cs typeface="+mn-cs"/>
-              </a:rPr>
-              <a:t> </a:t>
-            </a:r>
-            <a:r>
-              <a:rPr lang="zh-CN" altLang="en-US" sz="1200" b="0" i="0" u="none" strike="noStrike" kern="1200" baseline="0" dirty="0" smtClean="0">
-                <a:solidFill>
-                  <a:schemeClr val="tx1"/>
-                </a:solidFill>
-                <a:latin typeface="+mn-lt"/>
-                <a:ea typeface="+mn-ea"/>
-                <a:cs typeface="+mn-cs"/>
-              </a:rPr>
-              <a:t>才能计算得出。</a:t>
-            </a:r>
-          </a:p>
-          <a:p>
-            <a:r>
-              <a:rPr lang="en-US" altLang="zh-CN" sz="1200" b="0" i="0" u="none" strike="noStrike" kern="1200" baseline="0" dirty="0" err="1" smtClean="0">
-                <a:solidFill>
-                  <a:schemeClr val="tx1"/>
-                </a:solidFill>
-                <a:latin typeface="+mn-lt"/>
-                <a:ea typeface="+mn-ea"/>
-                <a:cs typeface="+mn-cs"/>
-              </a:rPr>
-              <a:t>entryX</a:t>
-            </a:r>
-            <a:r>
-              <a:rPr lang="en-US" altLang="zh-CN" sz="1200" b="0" i="0" u="none" strike="noStrike" kern="1200" baseline="0" dirty="0" smtClean="0">
-                <a:solidFill>
-                  <a:schemeClr val="tx1"/>
-                </a:solidFill>
-                <a:latin typeface="+mn-lt"/>
-                <a:ea typeface="+mn-ea"/>
-                <a:cs typeface="+mn-cs"/>
-              </a:rPr>
-              <a:t> ? </a:t>
-            </a:r>
-            <a:r>
-              <a:rPr lang="en-US" altLang="zh-CN" sz="1200" b="0" i="0" u="none" strike="noStrike" kern="1200" baseline="0" dirty="0" err="1" smtClean="0">
-                <a:solidFill>
-                  <a:schemeClr val="tx1"/>
-                </a:solidFill>
-                <a:latin typeface="+mn-lt"/>
-                <a:ea typeface="+mn-ea"/>
-                <a:cs typeface="+mn-cs"/>
-              </a:rPr>
-              <a:t>ziplist</a:t>
-            </a:r>
-            <a:r>
-              <a:rPr lang="en-US" altLang="zh-CN" sz="1200" b="0" i="0" u="none" strike="noStrike" kern="1200" baseline="0" dirty="0" smtClean="0">
-                <a:solidFill>
-                  <a:schemeClr val="tx1"/>
-                </a:solidFill>
-                <a:latin typeface="+mn-lt"/>
-                <a:ea typeface="+mn-ea"/>
-                <a:cs typeface="+mn-cs"/>
-              </a:rPr>
-              <a:t> </a:t>
-            </a:r>
-            <a:r>
-              <a:rPr lang="zh-CN" altLang="en-US" sz="1200" b="0" i="0" u="none" strike="noStrike" kern="1200" baseline="0" dirty="0" smtClean="0">
-                <a:solidFill>
-                  <a:schemeClr val="tx1"/>
-                </a:solidFill>
-                <a:latin typeface="+mn-lt"/>
-                <a:ea typeface="+mn-ea"/>
-                <a:cs typeface="+mn-cs"/>
-              </a:rPr>
-              <a:t>所保存的节点，各个节点的长度根据内容而定。</a:t>
-            </a:r>
-          </a:p>
-          <a:p>
-            <a:r>
-              <a:rPr lang="en-US" altLang="zh-CN" sz="1200" b="0" i="0" u="none" strike="noStrike" kern="1200" baseline="0" dirty="0" err="1" smtClean="0">
-                <a:solidFill>
-                  <a:schemeClr val="tx1"/>
-                </a:solidFill>
-                <a:latin typeface="+mn-lt"/>
-                <a:ea typeface="+mn-ea"/>
-                <a:cs typeface="+mn-cs"/>
-              </a:rPr>
-              <a:t>zlend</a:t>
-            </a:r>
-            <a:r>
-              <a:rPr lang="en-US" altLang="zh-CN" sz="1200" b="0" i="0" u="none" strike="noStrike" kern="1200" baseline="0" dirty="0" smtClean="0">
-                <a:solidFill>
-                  <a:schemeClr val="tx1"/>
-                </a:solidFill>
-                <a:latin typeface="+mn-lt"/>
-                <a:ea typeface="+mn-ea"/>
-                <a:cs typeface="+mn-cs"/>
-              </a:rPr>
-              <a:t> uint8_t 255 </a:t>
-            </a:r>
-            <a:r>
-              <a:rPr lang="zh-CN" altLang="en-US" sz="1200" b="0" i="0" u="none" strike="noStrike" kern="1200" baseline="0" dirty="0" smtClean="0">
-                <a:solidFill>
-                  <a:schemeClr val="tx1"/>
-                </a:solidFill>
-                <a:latin typeface="+mn-lt"/>
-                <a:ea typeface="+mn-ea"/>
-                <a:cs typeface="+mn-cs"/>
-              </a:rPr>
-              <a:t>的二进制值</a:t>
-            </a:r>
-            <a:r>
-              <a:rPr lang="en-US" altLang="zh-CN" sz="1200" b="0" i="0" u="none" strike="noStrike" kern="1200" baseline="0" dirty="0" smtClean="0">
-                <a:solidFill>
-                  <a:schemeClr val="tx1"/>
-                </a:solidFill>
-                <a:latin typeface="+mn-lt"/>
-                <a:ea typeface="+mn-ea"/>
-                <a:cs typeface="+mn-cs"/>
-              </a:rPr>
-              <a:t>1111 1111 </a:t>
-            </a:r>
-            <a:r>
-              <a:rPr lang="zh-CN" altLang="en-US" sz="1200" b="0" i="0" u="none" strike="noStrike" kern="1200" baseline="0" dirty="0" smtClean="0">
-                <a:solidFill>
-                  <a:schemeClr val="tx1"/>
-                </a:solidFill>
-                <a:latin typeface="+mn-lt"/>
-                <a:ea typeface="+mn-ea"/>
-                <a:cs typeface="+mn-cs"/>
-              </a:rPr>
-              <a:t>（</a:t>
-            </a:r>
-            <a:r>
-              <a:rPr lang="en-US" altLang="zh-CN" sz="1200" b="0" i="0" u="none" strike="noStrike" kern="1200" baseline="0" dirty="0" smtClean="0">
-                <a:solidFill>
-                  <a:schemeClr val="tx1"/>
-                </a:solidFill>
-                <a:latin typeface="+mn-lt"/>
-                <a:ea typeface="+mn-ea"/>
-                <a:cs typeface="+mn-cs"/>
-              </a:rPr>
-              <a:t>UINT8_MAX</a:t>
-            </a:r>
-            <a:r>
-              <a:rPr lang="zh-CN" altLang="en-US" sz="1200" b="0" i="0" u="none" strike="noStrike" kern="1200" baseline="0" dirty="0" smtClean="0">
-                <a:solidFill>
-                  <a:schemeClr val="tx1"/>
-                </a:solidFill>
-                <a:latin typeface="+mn-lt"/>
-                <a:ea typeface="+mn-ea"/>
-                <a:cs typeface="+mn-cs"/>
-              </a:rPr>
-              <a:t>），用于标记</a:t>
-            </a:r>
-            <a:r>
-              <a:rPr lang="en-US" altLang="zh-CN" sz="1200" b="0" i="0" u="none" strike="noStrike" kern="1200" baseline="0" dirty="0" err="1" smtClean="0">
-                <a:solidFill>
-                  <a:schemeClr val="tx1"/>
-                </a:solidFill>
-                <a:latin typeface="+mn-lt"/>
-                <a:ea typeface="+mn-ea"/>
-                <a:cs typeface="+mn-cs"/>
-              </a:rPr>
-              <a:t>ziplist</a:t>
-            </a:r>
-            <a:endParaRPr lang="en-US" altLang="zh-CN" sz="1200" b="0" i="0" u="none" strike="noStrike" kern="1200" baseline="0" dirty="0" smtClean="0">
-              <a:solidFill>
-                <a:schemeClr val="tx1"/>
-              </a:solidFill>
-              <a:latin typeface="+mn-lt"/>
-              <a:ea typeface="+mn-ea"/>
-              <a:cs typeface="+mn-cs"/>
-            </a:endParaRPr>
-          </a:p>
-          <a:p>
-            <a:r>
-              <a:rPr lang="zh-CN" altLang="en-US" sz="1200" b="0" i="0" u="none" strike="noStrike" kern="1200" baseline="0" dirty="0" smtClean="0">
-                <a:solidFill>
-                  <a:schemeClr val="tx1"/>
-                </a:solidFill>
-                <a:latin typeface="+mn-lt"/>
-                <a:ea typeface="+mn-ea"/>
-                <a:cs typeface="+mn-cs"/>
-              </a:rPr>
-              <a:t>的末端。</a:t>
-            </a:r>
-            <a:endParaRPr lang="zh-CN" altLang="en-US" dirty="0"/>
-          </a:p>
-        </p:txBody>
-      </p:sp>
-      <p:sp>
-        <p:nvSpPr>
-          <p:cNvPr id="4" name="灯片编号占位符 3"/>
+              <a:rPr lang="en-US" altLang="zh-CN" sz="1200" b="0" kern="1200" dirty="0" smtClean="0">
+                <a:solidFill>
+                  <a:schemeClr val="tx1"/>
+                </a:solidFill>
+                <a:effectLst/>
+                <a:latin typeface="+mn-lt"/>
+                <a:ea typeface="+mn-ea"/>
+                <a:cs typeface="+mn-cs"/>
+              </a:rPr>
+              <a:t>no</a:t>
+            </a:r>
+            <a:r>
+              <a:rPr lang="zh-CN" altLang="en-US" sz="1200" b="0" kern="1200" dirty="0" smtClean="0">
+                <a:solidFill>
+                  <a:schemeClr val="tx1"/>
+                </a:solidFill>
+                <a:effectLst/>
+                <a:latin typeface="+mn-lt"/>
+                <a:ea typeface="+mn-ea"/>
+                <a:cs typeface="+mn-cs"/>
+              </a:rPr>
+              <a:t>：</a:t>
+            </a:r>
+            <a:r>
+              <a:rPr lang="en-US" altLang="zh-CN" sz="1200" b="0" kern="1200" dirty="0" err="1" smtClean="0">
+                <a:solidFill>
+                  <a:schemeClr val="tx1"/>
+                </a:solidFill>
+                <a:effectLst/>
+                <a:latin typeface="+mn-lt"/>
+                <a:ea typeface="+mn-ea"/>
+                <a:cs typeface="+mn-cs"/>
+              </a:rPr>
+              <a:t>redis</a:t>
+            </a:r>
+            <a:r>
+              <a:rPr lang="zh-CN" altLang="en-US" sz="1200" b="0" kern="1200" dirty="0" smtClean="0">
+                <a:solidFill>
+                  <a:schemeClr val="tx1"/>
+                </a:solidFill>
+                <a:effectLst/>
+                <a:latin typeface="+mn-lt"/>
+                <a:ea typeface="+mn-ea"/>
+                <a:cs typeface="+mn-cs"/>
+              </a:rPr>
+              <a:t>并不直接调用文件同步，而是交给操作系统来处理，操作系统可以根据</a:t>
+            </a:r>
+            <a:r>
+              <a:rPr lang="en-US" altLang="zh-CN" sz="1200" b="0" kern="1200" dirty="0" smtClean="0">
+                <a:solidFill>
+                  <a:schemeClr val="tx1"/>
+                </a:solidFill>
+                <a:effectLst/>
+                <a:latin typeface="+mn-lt"/>
+                <a:ea typeface="+mn-ea"/>
+                <a:cs typeface="+mn-cs"/>
+              </a:rPr>
+              <a:t>buffer</a:t>
+            </a:r>
+            <a:r>
+              <a:rPr lang="zh-CN" altLang="en-US" sz="1200" b="0" kern="1200" dirty="0" smtClean="0">
+                <a:solidFill>
+                  <a:schemeClr val="tx1"/>
+                </a:solidFill>
+                <a:effectLst/>
+                <a:latin typeface="+mn-lt"/>
+                <a:ea typeface="+mn-ea"/>
+                <a:cs typeface="+mn-cs"/>
+              </a:rPr>
+              <a:t>填充情况</a:t>
+            </a:r>
+            <a:r>
+              <a:rPr lang="en-US" altLang="zh-CN" sz="1200" b="0" kern="1200" dirty="0" smtClean="0">
+                <a:solidFill>
+                  <a:schemeClr val="tx1"/>
+                </a:solidFill>
+                <a:effectLst/>
+                <a:latin typeface="+mn-lt"/>
+                <a:ea typeface="+mn-ea"/>
+                <a:cs typeface="+mn-cs"/>
+              </a:rPr>
+              <a:t>/</a:t>
+            </a:r>
+            <a:r>
+              <a:rPr lang="zh-CN" altLang="en-US" sz="1200" b="0" kern="1200" dirty="0" smtClean="0">
+                <a:solidFill>
+                  <a:schemeClr val="tx1"/>
+                </a:solidFill>
+                <a:effectLst/>
+                <a:latin typeface="+mn-lt"/>
+                <a:ea typeface="+mn-ea"/>
+                <a:cs typeface="+mn-cs"/>
+              </a:rPr>
+              <a:t>通道空闲时间等择机触发同步；这是一种普通的文件操作方式。性能较好，在物理服务器故障时，数据丢失量会因</a:t>
+            </a:r>
+            <a:r>
+              <a:rPr lang="en-US" altLang="zh-CN" sz="1200" b="0" kern="1200" dirty="0" smtClean="0">
+                <a:solidFill>
+                  <a:schemeClr val="tx1"/>
+                </a:solidFill>
+                <a:effectLst/>
+                <a:latin typeface="+mn-lt"/>
+                <a:ea typeface="+mn-ea"/>
+                <a:cs typeface="+mn-cs"/>
+              </a:rPr>
+              <a:t>OS</a:t>
+            </a:r>
+            <a:r>
+              <a:rPr lang="zh-CN" altLang="en-US" sz="1200" b="0" kern="1200" dirty="0" smtClean="0">
+                <a:solidFill>
+                  <a:schemeClr val="tx1"/>
+                </a:solidFill>
+                <a:effectLst/>
+                <a:latin typeface="+mn-lt"/>
+                <a:ea typeface="+mn-ea"/>
+                <a:cs typeface="+mn-cs"/>
+              </a:rPr>
+              <a:t>配置有关。</a:t>
+            </a:r>
+          </a:p>
+          <a:p>
+            <a:endParaRPr kumimoji="1" lang="zh-CN" altLang="en-US" dirty="0"/>
+          </a:p>
+        </p:txBody>
+      </p:sp>
+      <p:sp>
+        <p:nvSpPr>
+          <p:cNvPr id="4" name="幻灯片编号占位符 3"/>
           <p:cNvSpPr>
             <a:spLocks noGrp="1"/>
           </p:cNvSpPr>
@@ -2567,7 +3233,7 @@
             <a:fld id="{BAF891E2-A387-4BB6-98F3-AB1911FCECE9}" type="slidenum">
               <a:rPr lang="zh-CN" altLang="en-US" smtClean="0"/>
               <a:pPr/>
-              <a:t>15</a:t>
+              <a:t>19</a:t>
             </a:fld>
             <a:endParaRPr lang="zh-CN" altLang="en-US"/>
           </a:p>
@@ -2576,7 +3242,7 @@
     </p:spTree>
     <p:extLst>
       <p:ext uri="{BB962C8B-B14F-4D97-AF65-F5344CB8AC3E}">
-        <p14:creationId xmlns:p14="http://schemas.microsoft.com/office/powerpoint/2010/main" xmlns="" val="2837269494"/>
+        <p14:creationId xmlns:p14="http://schemas.microsoft.com/office/powerpoint/2010/main" val="1108734522"/>
       </p:ext>
     </p:extLst>
   </p:cSld>
@@ -3250,7 +3916,7 @@
             <a:fld id="{BAF891E2-A387-4BB6-98F3-AB1911FCECE9}" type="slidenum">
               <a:rPr lang="zh-CN" altLang="en-US" smtClean="0"/>
               <a:pPr/>
-              <a:t>17</a:t>
+              <a:t>23</a:t>
             </a:fld>
             <a:endParaRPr lang="zh-CN" altLang="en-US"/>
           </a:p>
@@ -3259,7 +3925,7 @@
     </p:spTree>
     <p:extLst>
       <p:ext uri="{BB962C8B-B14F-4D97-AF65-F5344CB8AC3E}">
-        <p14:creationId xmlns:p14="http://schemas.microsoft.com/office/powerpoint/2010/main" xmlns="" val="3610721929"/>
+        <p14:creationId xmlns:p14="http://schemas.microsoft.com/office/powerpoint/2010/main" val="2837269494"/>
       </p:ext>
     </p:extLst>
   </p:cSld>
@@ -3933,7 +4599,7 @@
             <a:fld id="{BAF891E2-A387-4BB6-98F3-AB1911FCECE9}" type="slidenum">
               <a:rPr lang="zh-CN" altLang="en-US" smtClean="0"/>
               <a:pPr/>
-              <a:t>18</a:t>
+              <a:t>25</a:t>
             </a:fld>
             <a:endParaRPr lang="zh-CN" altLang="en-US"/>
           </a:p>
@@ -3942,7 +4608,7 @@
     </p:spTree>
     <p:extLst>
       <p:ext uri="{BB962C8B-B14F-4D97-AF65-F5344CB8AC3E}">
-        <p14:creationId xmlns:p14="http://schemas.microsoft.com/office/powerpoint/2010/main" xmlns="" val="4130428424"/>
+        <p14:creationId xmlns:p14="http://schemas.microsoft.com/office/powerpoint/2010/main" val="3610721929"/>
       </p:ext>
     </p:extLst>
   </p:cSld>
@@ -3997,6 +4663,17 @@
           <a:lstStyle/>
           <a:p>
             <a:r>
+              <a:rPr lang="en-US" altLang="zh-CN" sz="1200" b="0" i="0" u="none" strike="noStrike" kern="1200" baseline="0" dirty="0" err="1" smtClean="0">
+                <a:solidFill>
+                  <a:schemeClr val="tx1"/>
+                </a:solidFill>
+                <a:latin typeface="+mn-lt"/>
+                <a:ea typeface="+mn-ea"/>
+                <a:cs typeface="+mn-cs"/>
+              </a:rPr>
+              <a:t>zlbytes</a:t>
+            </a:r>
+            <a:r>
               <a:rPr lang="en-US" altLang="zh-CN" sz="1200" b="0" i="0" u="none" strike="noStrike" kern="1200" baseline="0" dirty="0" smtClean="0">
                 <a:solidFill>
                   <a:schemeClr val="tx1"/>
@@ -4005,7 +4682,7 @@
                 <a:ea typeface="+mn-ea"/>
                 <a:cs typeface="+mn-cs"/>
               </a:rPr>
-              <a:t>1. </a:t>
+              <a:t> uint32_t </a:t>
             </a:r>
             <a:r>
               <a:rPr lang="zh-CN" altLang="en-US" sz="1200" b="0" i="0" u="none" strike="noStrike" kern="1200" baseline="0" dirty="0" smtClean="0">
@@ -4016,10 +4693,30 @@
                 <a:ea typeface="+mn-ea"/>
                 <a:cs typeface="+mn-cs"/>
               </a:rPr>
-              <a:t>定时删除：在设置键的过期时间时，创建一个定时事件，当过期时间到达时，由事件处理</a:t>
-            </a:r>
-          </a:p>
-          <a:p>
+              <a:t>整个</a:t>
+            </a:r>
+            <a:r>
+              <a:rPr lang="en-US" altLang="zh-CN" sz="1200" b="0" i="0" u="none" strike="noStrike" kern="1200" baseline="0" dirty="0" err="1" smtClean="0">
+                <a:solidFill>
+                  <a:schemeClr val="tx1"/>
+                </a:solidFill>
+                <a:latin typeface="+mn-lt"/>
+                <a:ea typeface="+mn-ea"/>
+                <a:cs typeface="+mn-cs"/>
+              </a:rPr>
+              <a:t>ziplist</a:t>
+            </a:r>
+            <a:r>
+              <a:rPr lang="en-US" altLang="zh-CN" sz="1200" b="0" i="0" u="none" strike="noStrike" kern="1200" baseline="0" dirty="0" smtClean="0">
+                <a:solidFill>
+                  <a:schemeClr val="tx1"/>
+                </a:solidFill>
+                <a:latin typeface="+mn-lt"/>
+                <a:ea typeface="+mn-ea"/>
+                <a:cs typeface="+mn-cs"/>
+              </a:rPr>
+              <a:t> </a:t>
+            </a:r>
             <a:r>
               <a:rPr lang="zh-CN" altLang="en-US" sz="1200" b="0" i="0" u="none" strike="noStrike" kern="1200" baseline="0" dirty="0" smtClean="0">
                 <a:solidFill>
@@ -4029,10 +4726,19 @@
                 <a:ea typeface="+mn-ea"/>
                 <a:cs typeface="+mn-cs"/>
               </a:rPr>
-              <a:t>器自动执行键的删除操作。</a:t>
-            </a:r>
-          </a:p>
-          <a:p>
+              <a:t>占用的内存字节数，对</a:t>
+            </a:r>
+            <a:r>
+              <a:rPr lang="en-US" altLang="zh-CN" sz="1200" b="0" i="0" u="none" strike="noStrike" kern="1200" baseline="0" dirty="0" err="1" smtClean="0">
+                <a:solidFill>
+                  <a:schemeClr val="tx1"/>
+                </a:solidFill>
+                <a:latin typeface="+mn-lt"/>
+                <a:ea typeface="+mn-ea"/>
+                <a:cs typeface="+mn-cs"/>
+              </a:rPr>
+              <a:t>ziplist</a:t>
+            </a:r>
             <a:r>
               <a:rPr lang="en-US" altLang="zh-CN" sz="1200" b="0" i="0" u="none" strike="noStrike" kern="1200" baseline="0" dirty="0" smtClean="0">
                 <a:solidFill>
@@ -4042,7 +4748,7 @@
                 <a:ea typeface="+mn-ea"/>
                 <a:cs typeface="+mn-cs"/>
               </a:rPr>
-              <a:t>2. </a:t>
+              <a:t> </a:t>
             </a:r>
             <a:r>
               <a:rPr lang="zh-CN" altLang="en-US" sz="1200" b="0" i="0" u="none" strike="noStrike" kern="1200" baseline="0" dirty="0" smtClean="0">
@@ -4053,8 +4759,23 @@
                 <a:ea typeface="+mn-ea"/>
                 <a:cs typeface="+mn-cs"/>
               </a:rPr>
-              <a:t>惰性删除：放任键过期不管，但是在每次从</a:t>
-            </a:r>
+              <a:t>进行内存重分配，或</a:t>
+            </a:r>
+          </a:p>
+          <a:p>
+            <a:r>
+              <a:rPr lang="zh-CN" altLang="en-US" sz="1200" b="0" i="0" u="none" strike="noStrike" kern="1200" baseline="0" dirty="0" smtClean="0">
+                <a:solidFill>
+                  <a:schemeClr val="tx1"/>
+                </a:solidFill>
+                <a:latin typeface="+mn-lt"/>
+                <a:ea typeface="+mn-ea"/>
+                <a:cs typeface="+mn-cs"/>
+              </a:rPr>
+              <a:t>者计算末端时使用。</a:t>
+            </a:r>
+          </a:p>
+          <a:p>
             <a:r>
               <a:rPr lang="en-US" altLang="zh-CN" sz="1200" b="0" i="0" u="none" strike="noStrike" kern="1200" baseline="0" dirty="0" err="1" smtClean="0">
                 <a:solidFill>
@@ -4064,7 +4785,7 @@
                 <a:ea typeface="+mn-ea"/>
                 <a:cs typeface="+mn-cs"/>
               </a:rPr>
-              <a:t>dict</a:t>
+              <a:t>zltail</a:t>
             </a:r>
             <a:r>
               <a:rPr lang="en-US" altLang="zh-CN" sz="1200" b="0" i="0" u="none" strike="noStrike" kern="1200" baseline="0" dirty="0" smtClean="0">
@@ -4075,6 +4796,39 @@
                 <a:ea typeface="+mn-ea"/>
                 <a:cs typeface="+mn-cs"/>
               </a:rPr>
+              <a:t> uint32_t </a:t>
+            </a:r>
+            <a:r>
+              <a:rPr lang="zh-CN" altLang="en-US" sz="1200" b="0" i="0" u="none" strike="noStrike" kern="1200" baseline="0" dirty="0" smtClean="0">
+                <a:solidFill>
+                  <a:schemeClr val="tx1"/>
+                </a:solidFill>
+                <a:latin typeface="+mn-lt"/>
+                <a:ea typeface="+mn-ea"/>
+                <a:cs typeface="+mn-cs"/>
+              </a:rPr>
+              <a:t>到达</a:t>
+            </a:r>
+            <a:r>
+              <a:rPr lang="en-US" altLang="zh-CN" sz="1200" b="0" i="0" u="none" strike="noStrike" kern="1200" baseline="0" dirty="0" err="1" smtClean="0">
+                <a:solidFill>
+                  <a:schemeClr val="tx1"/>
+                </a:solidFill>
+                <a:latin typeface="+mn-lt"/>
+                <a:ea typeface="+mn-ea"/>
+                <a:cs typeface="+mn-cs"/>
+              </a:rPr>
+              <a:t>ziplist</a:t>
+            </a:r>
+            <a:r>
+              <a:rPr lang="en-US" altLang="zh-CN" sz="1200" b="0" i="0" u="none" strike="noStrike" kern="1200" baseline="0" dirty="0" smtClean="0">
+                <a:solidFill>
+                  <a:schemeClr val="tx1"/>
+                </a:solidFill>
+                <a:latin typeface="+mn-lt"/>
+                <a:ea typeface="+mn-ea"/>
+                <a:cs typeface="+mn-cs"/>
+              </a:rPr>
               <a:t> </a:t>
             </a:r>
             <a:r>
@@ -4086,7 +4840,7 @@
                 <a:ea typeface="+mn-ea"/>
                 <a:cs typeface="+mn-cs"/>
               </a:rPr>
-              <a:t>字典中取出键值时，要检查键是否过</a:t>
+              <a:t>表尾节点的偏移量。通过这个偏移量，可以在不遍</a:t>
             </a:r>
           </a:p>
           <a:p>
@@ -4099,10 +4853,19 @@
                 <a:ea typeface="+mn-ea"/>
                 <a:cs typeface="+mn-cs"/>
               </a:rPr>
-              <a:t>期，如果过期的话，就删除它，并返回空；如果没过期，就返回键值。</a:t>
-            </a:r>
-          </a:p>
-          <a:p>
+              <a:t>历整个</a:t>
+            </a:r>
+            <a:r>
+              <a:rPr lang="en-US" altLang="zh-CN" sz="1200" b="0" i="0" u="none" strike="noStrike" kern="1200" baseline="0" dirty="0" err="1" smtClean="0">
+                <a:solidFill>
+                  <a:schemeClr val="tx1"/>
+                </a:solidFill>
+                <a:latin typeface="+mn-lt"/>
+                <a:ea typeface="+mn-ea"/>
+                <a:cs typeface="+mn-cs"/>
+              </a:rPr>
+              <a:t>ziplist</a:t>
+            </a:r>
             <a:r>
               <a:rPr lang="en-US" altLang="zh-CN" sz="1200" b="0" i="0" u="none" strike="noStrike" kern="1200" baseline="0" dirty="0" smtClean="0">
                 <a:solidFill>
@@ -4112,7 +4875,7 @@
                 <a:ea typeface="+mn-ea"/>
                 <a:cs typeface="+mn-cs"/>
               </a:rPr>
-              <a:t>3. </a:t>
+              <a:t> </a:t>
             </a:r>
             <a:r>
               <a:rPr lang="zh-CN" altLang="en-US" sz="1200" b="0" i="0" u="none" strike="noStrike" kern="1200" baseline="0" dirty="0" smtClean="0">
@@ -4123,7 +4886,20 @@
                 <a:ea typeface="+mn-ea"/>
                 <a:cs typeface="+mn-cs"/>
               </a:rPr>
-              <a:t>定期删除：每隔一段时间，对</a:t>
+              <a:t>的前提下，弹出表尾节点。</a:t>
+            </a:r>
+          </a:p>
+          <a:p>
+            <a:r>
+              <a:rPr lang="en-US" altLang="zh-CN" sz="1200" b="0" i="0" u="none" strike="noStrike" kern="1200" baseline="0" dirty="0" err="1" smtClean="0">
+                <a:solidFill>
+                  <a:schemeClr val="tx1"/>
+                </a:solidFill>
+                <a:latin typeface="+mn-lt"/>
+                <a:ea typeface="+mn-ea"/>
+                <a:cs typeface="+mn-cs"/>
+              </a:rPr>
+              <a:t>zllen</a:t>
             </a:r>
             <a:r>
               <a:rPr lang="en-US" altLang="zh-CN" sz="1200" b="0" i="0" u="none" strike="noStrike" kern="1200" baseline="0" dirty="0" smtClean="0">
@@ -4134,7 +4910,29 @@
                 <a:ea typeface="+mn-ea"/>
                 <a:cs typeface="+mn-cs"/>
               </a:rPr>
-              <a:t>expires </a:t>
+              <a:t> uint16_t </a:t>
+            </a:r>
+            <a:r>
+              <a:rPr lang="en-US" altLang="zh-CN" sz="1200" b="0" i="0" u="none" strike="noStrike" kern="1200" baseline="0" dirty="0" err="1" smtClean="0">
+                <a:solidFill>
+                  <a:schemeClr val="tx1"/>
+                </a:solidFill>
+                <a:latin typeface="+mn-lt"/>
+                <a:ea typeface="+mn-ea"/>
+                <a:cs typeface="+mn-cs"/>
+              </a:rPr>
+              <a:t>ziplist</a:t>
+            </a:r>
+            <a:r>
+              <a:rPr lang="en-US" altLang="zh-CN" sz="1200" b="0" i="0" u="none" strike="noStrike" kern="1200" baseline="0" dirty="0" smtClean="0">
+                <a:solidFill>
+                  <a:schemeClr val="tx1"/>
+                </a:solidFill>
+                <a:latin typeface="+mn-lt"/>
+                <a:ea typeface="+mn-ea"/>
+                <a:cs typeface="+mn-cs"/>
+              </a:rPr>
+              <a:t> </a:t>
             </a:r>
             <a:r>
               <a:rPr lang="zh-CN" altLang="en-US" sz="1200" b="0" i="0" u="none" strike="noStrike" kern="1200" baseline="0" dirty="0" smtClean="0">
@@ -4145,7 +4943,322 @@
                 <a:ea typeface="+mn-ea"/>
                 <a:cs typeface="+mn-cs"/>
               </a:rPr>
-              <a:t>字典进行检查，删除里面的过期键。</a:t>
+              <a:t>中节点的数量。当这个值小于</a:t>
+            </a:r>
+            <a:r>
+              <a:rPr lang="en-US" altLang="zh-CN" sz="1200" b="0" i="0" u="none" strike="noStrike" kern="1200" baseline="0" dirty="0" smtClean="0">
+                <a:solidFill>
+                  <a:schemeClr val="tx1"/>
+                </a:solidFill>
+                <a:latin typeface="+mn-lt"/>
+                <a:ea typeface="+mn-ea"/>
+                <a:cs typeface="+mn-cs"/>
+              </a:rPr>
+              <a:t>UINT16_MAX</a:t>
+            </a:r>
+            <a:r>
+              <a:rPr lang="zh-CN" altLang="en-US" sz="1200" b="0" i="0" u="none" strike="noStrike" kern="1200" baseline="0" dirty="0" smtClean="0">
+                <a:solidFill>
+                  <a:schemeClr val="tx1"/>
+                </a:solidFill>
+                <a:latin typeface="+mn-lt"/>
+                <a:ea typeface="+mn-ea"/>
+                <a:cs typeface="+mn-cs"/>
+              </a:rPr>
+              <a:t>（</a:t>
+            </a:r>
+            <a:r>
+              <a:rPr lang="en-US" altLang="zh-CN" sz="1200" b="0" i="0" u="none" strike="noStrike" kern="1200" baseline="0" dirty="0" smtClean="0">
+                <a:solidFill>
+                  <a:schemeClr val="tx1"/>
+                </a:solidFill>
+                <a:latin typeface="+mn-lt"/>
+                <a:ea typeface="+mn-ea"/>
+                <a:cs typeface="+mn-cs"/>
+              </a:rPr>
+              <a:t>65535</a:t>
+            </a:r>
+            <a:r>
+              <a:rPr lang="zh-CN" altLang="en-US" sz="1200" b="0" i="0" u="none" strike="noStrike" kern="1200" baseline="0" dirty="0" smtClean="0">
+                <a:solidFill>
+                  <a:schemeClr val="tx1"/>
+                </a:solidFill>
+                <a:latin typeface="+mn-lt"/>
+                <a:ea typeface="+mn-ea"/>
+                <a:cs typeface="+mn-cs"/>
+              </a:rPr>
+              <a:t>）时，</a:t>
+            </a:r>
+          </a:p>
+          <a:p>
+            <a:r>
+              <a:rPr lang="zh-CN" altLang="en-US" sz="1200" b="0" i="0" u="none" strike="noStrike" kern="1200" baseline="0" dirty="0" smtClean="0">
+                <a:solidFill>
+                  <a:schemeClr val="tx1"/>
+                </a:solidFill>
+                <a:latin typeface="+mn-lt"/>
+                <a:ea typeface="+mn-ea"/>
+                <a:cs typeface="+mn-cs"/>
+              </a:rPr>
+              <a:t>这个值就是</a:t>
+            </a:r>
+            <a:r>
+              <a:rPr lang="en-US" altLang="zh-CN" sz="1200" b="0" i="0" u="none" strike="noStrike" kern="1200" baseline="0" dirty="0" err="1" smtClean="0">
+                <a:solidFill>
+                  <a:schemeClr val="tx1"/>
+                </a:solidFill>
+                <a:latin typeface="+mn-lt"/>
+                <a:ea typeface="+mn-ea"/>
+                <a:cs typeface="+mn-cs"/>
+              </a:rPr>
+              <a:t>ziplist</a:t>
+            </a:r>
+            <a:r>
+              <a:rPr lang="en-US" altLang="zh-CN" sz="1200" b="0" i="0" u="none" strike="noStrike" kern="1200" baseline="0" dirty="0" smtClean="0">
+                <a:solidFill>
+                  <a:schemeClr val="tx1"/>
+                </a:solidFill>
+                <a:latin typeface="+mn-lt"/>
+                <a:ea typeface="+mn-ea"/>
+                <a:cs typeface="+mn-cs"/>
+              </a:rPr>
+              <a:t> </a:t>
+            </a:r>
+            <a:r>
+              <a:rPr lang="zh-CN" altLang="en-US" sz="1200" b="0" i="0" u="none" strike="noStrike" kern="1200" baseline="0" dirty="0" smtClean="0">
+                <a:solidFill>
+                  <a:schemeClr val="tx1"/>
+                </a:solidFill>
+                <a:latin typeface="+mn-lt"/>
+                <a:ea typeface="+mn-ea"/>
+                <a:cs typeface="+mn-cs"/>
+              </a:rPr>
+              <a:t>中节点的数量；当这个值等于</a:t>
+            </a:r>
+            <a:r>
+              <a:rPr lang="en-US" altLang="zh-CN" sz="1200" b="0" i="0" u="none" strike="noStrike" kern="1200" baseline="0" dirty="0" smtClean="0">
+                <a:solidFill>
+                  <a:schemeClr val="tx1"/>
+                </a:solidFill>
+                <a:latin typeface="+mn-lt"/>
+                <a:ea typeface="+mn-ea"/>
+                <a:cs typeface="+mn-cs"/>
+              </a:rPr>
+              <a:t>UINT16_MAX</a:t>
+            </a:r>
+          </a:p>
+          <a:p>
+            <a:r>
+              <a:rPr lang="zh-CN" altLang="en-US" sz="1200" b="0" i="0" u="none" strike="noStrike" kern="1200" baseline="0" dirty="0" smtClean="0">
+                <a:solidFill>
+                  <a:schemeClr val="tx1"/>
+                </a:solidFill>
+                <a:latin typeface="+mn-lt"/>
+                <a:ea typeface="+mn-ea"/>
+                <a:cs typeface="+mn-cs"/>
+              </a:rPr>
+              <a:t>时，节点的数量需要遍历整个</a:t>
+            </a:r>
+            <a:r>
+              <a:rPr lang="en-US" altLang="zh-CN" sz="1200" b="0" i="0" u="none" strike="noStrike" kern="1200" baseline="0" dirty="0" err="1" smtClean="0">
+                <a:solidFill>
+                  <a:schemeClr val="tx1"/>
+                </a:solidFill>
+                <a:latin typeface="+mn-lt"/>
+                <a:ea typeface="+mn-ea"/>
+                <a:cs typeface="+mn-cs"/>
+              </a:rPr>
+              <a:t>ziplist</a:t>
+            </a:r>
+            <a:r>
+              <a:rPr lang="en-US" altLang="zh-CN" sz="1200" b="0" i="0" u="none" strike="noStrike" kern="1200" baseline="0" dirty="0" smtClean="0">
+                <a:solidFill>
+                  <a:schemeClr val="tx1"/>
+                </a:solidFill>
+                <a:latin typeface="+mn-lt"/>
+                <a:ea typeface="+mn-ea"/>
+                <a:cs typeface="+mn-cs"/>
+              </a:rPr>
+              <a:t> </a:t>
+            </a:r>
+            <a:r>
+              <a:rPr lang="zh-CN" altLang="en-US" sz="1200" b="0" i="0" u="none" strike="noStrike" kern="1200" baseline="0" dirty="0" smtClean="0">
+                <a:solidFill>
+                  <a:schemeClr val="tx1"/>
+                </a:solidFill>
+                <a:latin typeface="+mn-lt"/>
+                <a:ea typeface="+mn-ea"/>
+                <a:cs typeface="+mn-cs"/>
+              </a:rPr>
+              <a:t>才能计算得出。</a:t>
+            </a:r>
+          </a:p>
+          <a:p>
+            <a:r>
+              <a:rPr lang="en-US" altLang="zh-CN" sz="1200" b="0" i="0" u="none" strike="noStrike" kern="1200" baseline="0" dirty="0" err="1" smtClean="0">
+                <a:solidFill>
+                  <a:schemeClr val="tx1"/>
+                </a:solidFill>
+                <a:latin typeface="+mn-lt"/>
+                <a:ea typeface="+mn-ea"/>
+                <a:cs typeface="+mn-cs"/>
+              </a:rPr>
+              <a:t>entryX</a:t>
+            </a:r>
+            <a:r>
+              <a:rPr lang="en-US" altLang="zh-CN" sz="1200" b="0" i="0" u="none" strike="noStrike" kern="1200" baseline="0" dirty="0" smtClean="0">
+                <a:solidFill>
+                  <a:schemeClr val="tx1"/>
+                </a:solidFill>
+                <a:latin typeface="+mn-lt"/>
+                <a:ea typeface="+mn-ea"/>
+                <a:cs typeface="+mn-cs"/>
+              </a:rPr>
+              <a:t> ? </a:t>
+            </a:r>
+            <a:r>
+              <a:rPr lang="en-US" altLang="zh-CN" sz="1200" b="0" i="0" u="none" strike="noStrike" kern="1200" baseline="0" dirty="0" err="1" smtClean="0">
+                <a:solidFill>
+                  <a:schemeClr val="tx1"/>
+                </a:solidFill>
+                <a:latin typeface="+mn-lt"/>
+                <a:ea typeface="+mn-ea"/>
+                <a:cs typeface="+mn-cs"/>
+              </a:rPr>
+              <a:t>ziplist</a:t>
+            </a:r>
+            <a:r>
+              <a:rPr lang="en-US" altLang="zh-CN" sz="1200" b="0" i="0" u="none" strike="noStrike" kern="1200" baseline="0" dirty="0" smtClean="0">
+                <a:solidFill>
+                  <a:schemeClr val="tx1"/>
+                </a:solidFill>
+                <a:latin typeface="+mn-lt"/>
+                <a:ea typeface="+mn-ea"/>
+                <a:cs typeface="+mn-cs"/>
+              </a:rPr>
+              <a:t> </a:t>
+            </a:r>
+            <a:r>
+              <a:rPr lang="zh-CN" altLang="en-US" sz="1200" b="0" i="0" u="none" strike="noStrike" kern="1200" baseline="0" dirty="0" smtClean="0">
+                <a:solidFill>
+                  <a:schemeClr val="tx1"/>
+                </a:solidFill>
+                <a:latin typeface="+mn-lt"/>
+                <a:ea typeface="+mn-ea"/>
+                <a:cs typeface="+mn-cs"/>
+              </a:rPr>
+              <a:t>所保存的节点，各个节点的长度根据内容而定。</a:t>
+            </a:r>
+          </a:p>
+          <a:p>
+            <a:r>
+              <a:rPr lang="en-US" altLang="zh-CN" sz="1200" b="0" i="0" u="none" strike="noStrike" kern="1200" baseline="0" dirty="0" err="1" smtClean="0">
+                <a:solidFill>
+                  <a:schemeClr val="tx1"/>
+                </a:solidFill>
+                <a:latin typeface="+mn-lt"/>
+                <a:ea typeface="+mn-ea"/>
+                <a:cs typeface="+mn-cs"/>
+              </a:rPr>
+              <a:t>zlend</a:t>
+            </a:r>
+            <a:r>
+              <a:rPr lang="en-US" altLang="zh-CN" sz="1200" b="0" i="0" u="none" strike="noStrike" kern="1200" baseline="0" dirty="0" smtClean="0">
+                <a:solidFill>
+                  <a:schemeClr val="tx1"/>
+                </a:solidFill>
+                <a:latin typeface="+mn-lt"/>
+                <a:ea typeface="+mn-ea"/>
+                <a:cs typeface="+mn-cs"/>
+              </a:rPr>
+              <a:t> uint8_t 255 </a:t>
+            </a:r>
+            <a:r>
+              <a:rPr lang="zh-CN" altLang="en-US" sz="1200" b="0" i="0" u="none" strike="noStrike" kern="1200" baseline="0" dirty="0" smtClean="0">
+                <a:solidFill>
+                  <a:schemeClr val="tx1"/>
+                </a:solidFill>
+                <a:latin typeface="+mn-lt"/>
+                <a:ea typeface="+mn-ea"/>
+                <a:cs typeface="+mn-cs"/>
+              </a:rPr>
+              <a:t>的二进制值</a:t>
+            </a:r>
+            <a:r>
+              <a:rPr lang="en-US" altLang="zh-CN" sz="1200" b="0" i="0" u="none" strike="noStrike" kern="1200" baseline="0" dirty="0" smtClean="0">
+                <a:solidFill>
+                  <a:schemeClr val="tx1"/>
+                </a:solidFill>
+                <a:latin typeface="+mn-lt"/>
+                <a:ea typeface="+mn-ea"/>
+                <a:cs typeface="+mn-cs"/>
+              </a:rPr>
+              <a:t>1111 1111 </a:t>
+            </a:r>
+            <a:r>
+              <a:rPr lang="zh-CN" altLang="en-US" sz="1200" b="0" i="0" u="none" strike="noStrike" kern="1200" baseline="0" dirty="0" smtClean="0">
+                <a:solidFill>
+                  <a:schemeClr val="tx1"/>
+                </a:solidFill>
+                <a:latin typeface="+mn-lt"/>
+                <a:ea typeface="+mn-ea"/>
+                <a:cs typeface="+mn-cs"/>
+              </a:rPr>
+              <a:t>（</a:t>
+            </a:r>
+            <a:r>
+              <a:rPr lang="en-US" altLang="zh-CN" sz="1200" b="0" i="0" u="none" strike="noStrike" kern="1200" baseline="0" dirty="0" smtClean="0">
+                <a:solidFill>
+                  <a:schemeClr val="tx1"/>
+                </a:solidFill>
+                <a:latin typeface="+mn-lt"/>
+                <a:ea typeface="+mn-ea"/>
+                <a:cs typeface="+mn-cs"/>
+              </a:rPr>
+              <a:t>UINT8_MAX</a:t>
+            </a:r>
+            <a:r>
+              <a:rPr lang="zh-CN" altLang="en-US" sz="1200" b="0" i="0" u="none" strike="noStrike" kern="1200" baseline="0" dirty="0" smtClean="0">
+                <a:solidFill>
+                  <a:schemeClr val="tx1"/>
+                </a:solidFill>
+                <a:latin typeface="+mn-lt"/>
+                <a:ea typeface="+mn-ea"/>
+                <a:cs typeface="+mn-cs"/>
+              </a:rPr>
+              <a:t>），用于标记</a:t>
+            </a:r>
+            <a:r>
+              <a:rPr lang="en-US" altLang="zh-CN" sz="1200" b="0" i="0" u="none" strike="noStrike" kern="1200" baseline="0" dirty="0" err="1" smtClean="0">
+                <a:solidFill>
+                  <a:schemeClr val="tx1"/>
+                </a:solidFill>
+                <a:latin typeface="+mn-lt"/>
+                <a:ea typeface="+mn-ea"/>
+                <a:cs typeface="+mn-cs"/>
+              </a:rPr>
+              <a:t>ziplist</a:t>
+            </a:r>
+            <a:endParaRPr lang="en-US" altLang="zh-CN" sz="1200" b="0" i="0" u="none" strike="noStrike" kern="1200" baseline="0" dirty="0" smtClean="0">
+              <a:solidFill>
+                <a:schemeClr val="tx1"/>
+              </a:solidFill>
+              <a:latin typeface="+mn-lt"/>
+              <a:ea typeface="+mn-ea"/>
+              <a:cs typeface="+mn-cs"/>
+            </a:endParaRPr>
+          </a:p>
+          <a:p>
+            <a:r>
+              <a:rPr lang="zh-CN" altLang="en-US" sz="1200" b="0" i="0" u="none" strike="noStrike" kern="1200" baseline="0" dirty="0" smtClean="0">
+                <a:solidFill>
+                  <a:schemeClr val="tx1"/>
+                </a:solidFill>
+                <a:latin typeface="+mn-lt"/>
+                <a:ea typeface="+mn-ea"/>
+                <a:cs typeface="+mn-cs"/>
+              </a:rPr>
+              <a:t>的末端。</a:t>
             </a:r>
             <a:endParaRPr lang="zh-CN" altLang="en-US" dirty="0"/>
           </a:p>
@@ -4169,7 +5282,7 @@
             <a:fld id="{BAF891E2-A387-4BB6-98F3-AB1911FCECE9}" type="slidenum">
               <a:rPr lang="zh-CN" altLang="en-US" smtClean="0"/>
               <a:pPr/>
-              <a:t>21</a:t>
+              <a:t>26</a:t>
             </a:fld>
             <a:endParaRPr lang="zh-CN" altLang="en-US"/>
           </a:p>
@@ -4178,7 +5291,7 @@
     </p:spTree>
     <p:extLst>
       <p:ext uri="{BB962C8B-B14F-4D97-AF65-F5344CB8AC3E}">
-        <p14:creationId xmlns:p14="http://schemas.microsoft.com/office/powerpoint/2010/main" xmlns="" val="3723524272"/>
+        <p14:creationId xmlns:p14="http://schemas.microsoft.com/office/powerpoint/2010/main" val="4130428424"/>
       </p:ext>
     </p:extLst>
   </p:cSld>
@@ -4233,315 +5346,42 @@
           <a:lstStyle/>
           <a:p>
             <a:r>
-              <a:rPr lang="zh-CN" altLang="en-US" sz="1200" b="0" i="0" u="none" strike="noStrike" kern="1200" baseline="0" dirty="0" smtClean="0">
-                <a:solidFill>
-                  <a:schemeClr val="tx1"/>
-                </a:solidFill>
-                <a:latin typeface="+mn-lt"/>
-                <a:ea typeface="+mn-ea"/>
-                <a:cs typeface="+mn-cs"/>
-              </a:rPr>
-              <a:t>在每个代表数据库的</a:t>
-            </a:r>
-            <a:r>
-              <a:rPr lang="en-US" altLang="zh-CN" sz="1200" b="0" i="0" u="none" strike="noStrike" kern="1200" baseline="0" dirty="0" err="1" smtClean="0">
-                <a:solidFill>
-                  <a:schemeClr val="tx1"/>
-                </a:solidFill>
-                <a:latin typeface="+mn-lt"/>
-                <a:ea typeface="+mn-ea"/>
-                <a:cs typeface="+mn-cs"/>
-              </a:rPr>
-              <a:t>redis.h</a:t>
-            </a:r>
-            <a:r>
-              <a:rPr lang="en-US" altLang="zh-CN" sz="1200" b="0" i="0" u="none" strike="noStrike" kern="1200" baseline="0" dirty="0" smtClean="0">
-                <a:solidFill>
-                  <a:schemeClr val="tx1"/>
-                </a:solidFill>
-                <a:latin typeface="+mn-lt"/>
-                <a:ea typeface="+mn-ea"/>
-                <a:cs typeface="+mn-cs"/>
-              </a:rPr>
-              <a:t>/</a:t>
-            </a:r>
-            <a:r>
-              <a:rPr lang="en-US" altLang="zh-CN" sz="1200" b="0" i="0" u="none" strike="noStrike" kern="1200" baseline="0" dirty="0" err="1" smtClean="0">
-                <a:solidFill>
-                  <a:schemeClr val="tx1"/>
-                </a:solidFill>
-                <a:latin typeface="+mn-lt"/>
-                <a:ea typeface="+mn-ea"/>
-                <a:cs typeface="+mn-cs"/>
-              </a:rPr>
-              <a:t>redisDb</a:t>
-            </a:r>
-            <a:r>
-              <a:rPr lang="en-US" altLang="zh-CN" sz="1200" b="0" i="0" u="none" strike="noStrike" kern="1200" baseline="0" dirty="0" smtClean="0">
-                <a:solidFill>
-                  <a:schemeClr val="tx1"/>
-                </a:solidFill>
-                <a:latin typeface="+mn-lt"/>
-                <a:ea typeface="+mn-ea"/>
-                <a:cs typeface="+mn-cs"/>
-              </a:rPr>
+              <a:rPr kumimoji="1" lang="zh-CN" altLang="en-US" dirty="0" smtClean="0"/>
+              <a:t>什么是跳跃表</a:t>
+            </a:r>
+            <a:endParaRPr kumimoji="1" lang="en-US" altLang="zh-CN" dirty="0" smtClean="0"/>
+          </a:p>
+          <a:p>
+            <a:endParaRPr kumimoji="1" lang="en-US" altLang="zh-CN" dirty="0" smtClean="0"/>
+          </a:p>
+          <a:p>
+            <a:r>
+              <a:rPr kumimoji="1" lang="en-US" altLang="zh-CN" dirty="0" err="1" smtClean="0"/>
+              <a:t>Skiplist</a:t>
+            </a:r>
+            <a:r>
+              <a:rPr kumimoji="1" lang="zh-CN" altLang="en-US" dirty="0" smtClean="0"/>
               <a:t> </a:t>
             </a:r>
             <a:r>
-              <a:rPr lang="zh-CN" altLang="en-US" sz="1200" b="0" i="0" u="none" strike="noStrike" kern="1200" baseline="0" dirty="0" smtClean="0">
-                <a:solidFill>
-                  <a:schemeClr val="tx1"/>
-                </a:solidFill>
-                <a:latin typeface="+mn-lt"/>
-                <a:ea typeface="+mn-ea"/>
-                <a:cs typeface="+mn-cs"/>
-              </a:rPr>
-              <a:t>结构类型中，都保存了一个</a:t>
-            </a:r>
-            <a:r>
-              <a:rPr lang="en-US" altLang="zh-CN" sz="1200" b="0" i="0" u="none" strike="noStrike" kern="1200" baseline="0" dirty="0" err="1" smtClean="0">
-                <a:solidFill>
-                  <a:schemeClr val="tx1"/>
-                </a:solidFill>
-                <a:latin typeface="+mn-lt"/>
-                <a:ea typeface="+mn-ea"/>
-                <a:cs typeface="+mn-cs"/>
-              </a:rPr>
-              <a:t>watched_keys</a:t>
-            </a:r>
-            <a:r>
-              <a:rPr lang="en-US" altLang="zh-CN" sz="1200" b="0" i="0" u="none" strike="noStrike" kern="1200" baseline="0" dirty="0" smtClean="0">
-                <a:solidFill>
-                  <a:schemeClr val="tx1"/>
-                </a:solidFill>
-                <a:latin typeface="+mn-lt"/>
-                <a:ea typeface="+mn-ea"/>
-                <a:cs typeface="+mn-cs"/>
-              </a:rPr>
+              <a:rPr kumimoji="1" lang="en-US" altLang="zh-CN" dirty="0" smtClean="0"/>
+              <a:t>+</a:t>
+            </a:r>
+            <a:r>
+              <a:rPr kumimoji="1" lang="zh-CN" altLang="en-US" dirty="0" smtClean="0"/>
               <a:t> </a:t>
             </a:r>
             <a:r>
-              <a:rPr lang="zh-CN" altLang="en-US" sz="1200" b="0" i="0" u="none" strike="noStrike" kern="1200" baseline="0" dirty="0" smtClean="0">
-                <a:solidFill>
-                  <a:schemeClr val="tx1"/>
-                </a:solidFill>
-                <a:latin typeface="+mn-lt"/>
-                <a:ea typeface="+mn-ea"/>
-                <a:cs typeface="+mn-cs"/>
-              </a:rPr>
-              <a:t>字典，字典</a:t>
-            </a:r>
-          </a:p>
-          <a:p>
-            <a:r>
-              <a:rPr lang="zh-CN" altLang="en-US" sz="1200" b="0" i="0" u="none" strike="noStrike" kern="1200" baseline="0" dirty="0" smtClean="0">
-                <a:solidFill>
-                  <a:schemeClr val="tx1"/>
-                </a:solidFill>
-                <a:latin typeface="+mn-lt"/>
-                <a:ea typeface="+mn-ea"/>
-                <a:cs typeface="+mn-cs"/>
-              </a:rPr>
-              <a:t>的键是这个数据库被监视的键，而字典的值则是一个链表，链表中保存了所有监视这个键的客</a:t>
-            </a:r>
-          </a:p>
-          <a:p>
-            <a:r>
-              <a:rPr lang="zh-CN" altLang="en-US" sz="1200" b="0" i="0" u="none" strike="noStrike" kern="1200" baseline="0" dirty="0" smtClean="0">
-                <a:solidFill>
-                  <a:schemeClr val="tx1"/>
-                </a:solidFill>
-                <a:latin typeface="+mn-lt"/>
-                <a:ea typeface="+mn-ea"/>
-                <a:cs typeface="+mn-cs"/>
-              </a:rPr>
-              <a:t>户端。</a:t>
-            </a:r>
-            <a:endParaRPr lang="en-US" altLang="zh-CN" sz="1200" b="0" i="0" u="none" strike="noStrike" kern="1200" baseline="0" dirty="0" smtClean="0">
-              <a:solidFill>
-                <a:schemeClr val="tx1"/>
-              </a:solidFill>
-              <a:latin typeface="+mn-lt"/>
-              <a:ea typeface="+mn-ea"/>
-              <a:cs typeface="+mn-cs"/>
-            </a:endParaRPr>
-          </a:p>
-          <a:p>
-            <a:endParaRPr lang="en-US" altLang="zh-CN" sz="1200" b="0" i="0" u="none" strike="noStrike" kern="1200" baseline="0" dirty="0" smtClean="0">
-              <a:solidFill>
-                <a:schemeClr val="tx1"/>
-              </a:solidFill>
-              <a:latin typeface="+mn-lt"/>
-              <a:ea typeface="+mn-ea"/>
-              <a:cs typeface="+mn-cs"/>
-            </a:endParaRPr>
-          </a:p>
-          <a:p>
-            <a:r>
-              <a:rPr lang="zh-CN" altLang="en-US" sz="1200" b="0" i="0" u="none" strike="noStrike" kern="1200" baseline="0" dirty="0" smtClean="0">
-                <a:solidFill>
-                  <a:schemeClr val="tx1"/>
-                </a:solidFill>
-                <a:latin typeface="+mn-lt"/>
-                <a:ea typeface="+mn-ea"/>
-                <a:cs typeface="+mn-cs"/>
-              </a:rPr>
-              <a:t>检查数据库的</a:t>
-            </a:r>
-            <a:r>
-              <a:rPr lang="en-US" altLang="zh-CN" sz="1200" b="0" i="0" u="none" strike="noStrike" kern="1200" baseline="0" dirty="0" err="1" smtClean="0">
-                <a:solidFill>
-                  <a:schemeClr val="tx1"/>
-                </a:solidFill>
-                <a:latin typeface="+mn-lt"/>
-                <a:ea typeface="+mn-ea"/>
-                <a:cs typeface="+mn-cs"/>
-              </a:rPr>
-              <a:t>watched_keys</a:t>
-            </a:r>
-            <a:r>
-              <a:rPr lang="en-US" altLang="zh-CN" sz="1200" b="0" i="0" u="none" strike="noStrike" kern="1200" baseline="0" dirty="0" smtClean="0">
-                <a:solidFill>
-                  <a:schemeClr val="tx1"/>
-                </a:solidFill>
-                <a:latin typeface="+mn-lt"/>
-                <a:ea typeface="+mn-ea"/>
-                <a:cs typeface="+mn-cs"/>
-              </a:rPr>
-              <a:t> </a:t>
-            </a:r>
-            <a:r>
-              <a:rPr lang="zh-CN" altLang="en-US" sz="1200" b="0" i="0" u="none" strike="noStrike" kern="1200" baseline="0" dirty="0" smtClean="0">
-                <a:solidFill>
-                  <a:schemeClr val="tx1"/>
-                </a:solidFill>
-                <a:latin typeface="+mn-lt"/>
-                <a:ea typeface="+mn-ea"/>
-                <a:cs typeface="+mn-cs"/>
-              </a:rPr>
-              <a:t>字典，看是否有客户端在监视已经被命令修改的键，如果</a:t>
-            </a:r>
-          </a:p>
-          <a:p>
-            <a:r>
-              <a:rPr lang="zh-CN" altLang="en-US" sz="1200" b="0" i="0" u="none" strike="noStrike" kern="1200" baseline="0" dirty="0" smtClean="0">
-                <a:solidFill>
-                  <a:schemeClr val="tx1"/>
-                </a:solidFill>
-                <a:latin typeface="+mn-lt"/>
-                <a:ea typeface="+mn-ea"/>
-                <a:cs typeface="+mn-cs"/>
-              </a:rPr>
-              <a:t>有的话，程序将所有监视这个</a:t>
-            </a:r>
-            <a:r>
-              <a:rPr lang="en-US" altLang="zh-CN" sz="1200" b="0" i="0" u="none" strike="noStrike" kern="1200" baseline="0" dirty="0" smtClean="0">
-                <a:solidFill>
-                  <a:schemeClr val="tx1"/>
-                </a:solidFill>
-                <a:latin typeface="+mn-lt"/>
-                <a:ea typeface="+mn-ea"/>
-                <a:cs typeface="+mn-cs"/>
-              </a:rPr>
-              <a:t>/</a:t>
-            </a:r>
-            <a:r>
-              <a:rPr lang="zh-CN" altLang="en-US" sz="1200" b="0" i="0" u="none" strike="noStrike" kern="1200" baseline="0" dirty="0" smtClean="0">
-                <a:solidFill>
-                  <a:schemeClr val="tx1"/>
-                </a:solidFill>
-                <a:latin typeface="+mn-lt"/>
-                <a:ea typeface="+mn-ea"/>
-                <a:cs typeface="+mn-cs"/>
-              </a:rPr>
-              <a:t>这些被修改键的客户端的</a:t>
-            </a:r>
-            <a:r>
-              <a:rPr lang="en-US" altLang="zh-CN" sz="1200" b="0" i="0" u="none" strike="noStrike" kern="1200" baseline="0" dirty="0" smtClean="0">
-                <a:solidFill>
-                  <a:schemeClr val="tx1"/>
-                </a:solidFill>
-                <a:latin typeface="+mn-lt"/>
-                <a:ea typeface="+mn-ea"/>
-                <a:cs typeface="+mn-cs"/>
-              </a:rPr>
-              <a:t>REDIS_DIRTY_CAS </a:t>
-            </a:r>
-            <a:r>
-              <a:rPr lang="zh-CN" altLang="en-US" sz="1200" b="0" i="0" u="none" strike="noStrike" kern="1200" baseline="0" dirty="0" smtClean="0">
-                <a:solidFill>
-                  <a:schemeClr val="tx1"/>
-                </a:solidFill>
-                <a:latin typeface="+mn-lt"/>
-                <a:ea typeface="+mn-ea"/>
-                <a:cs typeface="+mn-cs"/>
-              </a:rPr>
-              <a:t>选项打开</a:t>
-            </a:r>
-            <a:r>
-              <a:rPr lang="en-US" altLang="zh-CN" sz="1200" b="0" i="0" u="none" strike="noStrike" kern="1200" baseline="0" dirty="0" smtClean="0">
-                <a:solidFill>
-                  <a:schemeClr val="tx1"/>
-                </a:solidFill>
-                <a:latin typeface="+mn-lt"/>
-                <a:ea typeface="+mn-ea"/>
-                <a:cs typeface="+mn-cs"/>
-              </a:rPr>
-              <a:t>.</a:t>
-            </a:r>
-          </a:p>
-          <a:p>
-            <a:r>
-              <a:rPr lang="zh-CN" altLang="en-US" sz="1200" b="0" i="0" u="none" strike="noStrike" kern="1200" baseline="0" dirty="0" smtClean="0">
-                <a:solidFill>
-                  <a:schemeClr val="tx1"/>
-                </a:solidFill>
-                <a:latin typeface="+mn-lt"/>
-                <a:ea typeface="+mn-ea"/>
-                <a:cs typeface="+mn-cs"/>
-              </a:rPr>
-              <a:t>当客户端发送</a:t>
-            </a:r>
-            <a:r>
-              <a:rPr lang="en-US" altLang="zh-CN" sz="1200" b="0" i="1" u="none" strike="noStrike" kern="1200" baseline="0" dirty="0" smtClean="0">
-                <a:solidFill>
-                  <a:schemeClr val="tx1"/>
-                </a:solidFill>
-                <a:latin typeface="+mn-lt"/>
-                <a:ea typeface="+mn-ea"/>
-                <a:cs typeface="+mn-cs"/>
-              </a:rPr>
-              <a:t>EXEC </a:t>
-            </a:r>
-            <a:r>
-              <a:rPr lang="zh-CN" altLang="en-US" sz="1200" b="0" i="0" u="none" strike="noStrike" kern="1200" baseline="0" dirty="0" smtClean="0">
-                <a:solidFill>
-                  <a:schemeClr val="tx1"/>
-                </a:solidFill>
-                <a:latin typeface="+mn-lt"/>
-                <a:ea typeface="+mn-ea"/>
-                <a:cs typeface="+mn-cs"/>
-              </a:rPr>
-              <a:t>命令、触发事务执行时，服务器会对客户端的状态进行检查</a:t>
-            </a:r>
-            <a:r>
-              <a:rPr lang="en-US" altLang="zh-CN" sz="1200" b="0" i="0" u="none" strike="noStrike" kern="1200" baseline="0" dirty="0" smtClean="0">
-                <a:solidFill>
-                  <a:schemeClr val="tx1"/>
-                </a:solidFill>
-                <a:latin typeface="+mn-lt"/>
-                <a:ea typeface="+mn-ea"/>
-                <a:cs typeface="+mn-cs"/>
-              </a:rPr>
-              <a:t>.</a:t>
-            </a:r>
-            <a:endParaRPr lang="zh-CN" altLang="en-US" dirty="0"/>
-          </a:p>
-        </p:txBody>
-      </p:sp>
-      <p:sp>
-        <p:nvSpPr>
-          <p:cNvPr id="4" name="灯片编号占位符 3"/>
+              <a:rPr kumimoji="1" lang="en-US" altLang="zh-CN" dirty="0" err="1" smtClean="0"/>
+              <a:t>hashtable</a:t>
+            </a:r>
+            <a:endParaRPr kumimoji="1" lang="zh-CN" altLang="en-US" dirty="0"/>
+          </a:p>
+        </p:txBody>
+      </p:sp>
+      <p:sp>
+        <p:nvSpPr>
+          <p:cNvPr id="4" name="幻灯片编号占位符 3"/>
           <p:cNvSpPr>
             <a:spLocks noGrp="1"/>
           </p:cNvSpPr>
@@ -4557,7 +5397,7 @@
             <a:fld id="{BAF891E2-A387-4BB6-98F3-AB1911FCECE9}" type="slidenum">
               <a:rPr lang="zh-CN" altLang="en-US" smtClean="0"/>
               <a:pPr/>
-              <a:t>22</a:t>
+              <a:t>27</a:t>
             </a:fld>
             <a:endParaRPr lang="zh-CN" altLang="en-US"/>
           </a:p>
@@ -4566,7 +5406,7 @@
     </p:spTree>
     <p:extLst>
       <p:ext uri="{BB962C8B-B14F-4D97-AF65-F5344CB8AC3E}">
-        <p14:creationId xmlns:p14="http://schemas.microsoft.com/office/powerpoint/2010/main" xmlns="" val="3750907290"/>
+        <p14:creationId xmlns:p14="http://schemas.microsoft.com/office/powerpoint/2010/main" val="1314544764"/>
       </p:ext>
     </p:extLst>
   </p:cSld>
@@ -7865,7 +8705,7 @@
     </p:spTree>
     <p:extLst>
       <p:ext uri="{BB962C8B-B14F-4D97-AF65-F5344CB8AC3E}">
-        <p14:creationId xmlns:p14="http://schemas.microsoft.com/office/powerpoint/2010/main" xmlns="" val="1673924560"/>
+        <p14:creationId xmlns:p14="http://schemas.microsoft.com/office/powerpoint/2010/main" val="1673924560"/>
       </p:ext>
     </p:extLst>
   </p:cSld>
@@ -8353,7 +9193,7 @@
     </p:spTree>
     <p:extLst>
       <p:ext uri="{BB962C8B-B14F-4D97-AF65-F5344CB8AC3E}">
-        <p14:creationId xmlns:p14="http://schemas.microsoft.com/office/powerpoint/2010/main" xmlns="" val="1744368000"/>
+        <p14:creationId xmlns:p14="http://schemas.microsoft.com/office/powerpoint/2010/main" val="1744368000"/>
       </p:ext>
     </p:extLst>
   </p:cSld>
@@ -8549,6 +9389,1304 @@
 </file>
 
 <file path=ppt/slides/slide14.xml><?xml version="1.0" encoding="utf-8"?>
+<p:sld xmlns:a="http://schemas.openxmlformats.org/drawingml/2006/main" xmlns:r="http://schemas.openxmlformats.org/officeDocument/2006/relationships" xmlns:p="http://schemas.openxmlformats.org/presentationml/2006/main">
+  <p:cSld>
+    <p:spTree>
+      <p:nvGrpSpPr>
+        <p:cNvPr id="1" name=""/>
+        <p:cNvGrpSpPr/>
+        <p:nvPr/>
+      </p:nvGrpSpPr>
+      <p:grpSpPr>
+        <a:xfrm>
+          <a:off x="0" y="0"/>
+          <a:ext cx="0" cy="0"/>
+          <a:chOff x="0" y="0"/>
+          <a:chExt cx="0" cy="0"/>
+        </a:xfrm>
+      </p:grpSpPr>
+      <p:sp>
+        <p:nvSpPr>
+          <p:cNvPr id="2" name="标题 1"/>
+          <p:cNvSpPr>
+            <a:spLocks noGrp="1"/>
+          </p:cNvSpPr>
+          <p:nvPr>
+            <p:ph type="title"/>
+          </p:nvPr>
+        </p:nvSpPr>
+        <p:spPr/>
+        <p:txBody>
+          <a:bodyPr/>
+          <a:lstStyle/>
+          <a:p>
+            <a:r>
+              <a:rPr kumimoji="1" lang="en-US" altLang="zh-CN" dirty="0" smtClean="0"/>
+              <a:t>DATABASE</a:t>
+            </a:r>
+            <a:endParaRPr kumimoji="1" lang="zh-CN" altLang="en-US" dirty="0"/>
+          </a:p>
+        </p:txBody>
+      </p:sp>
+      <p:sp>
+        <p:nvSpPr>
+          <p:cNvPr id="3" name="内容占位符 2"/>
+          <p:cNvSpPr>
+            <a:spLocks noGrp="1"/>
+          </p:cNvSpPr>
+          <p:nvPr>
+            <p:ph idx="1"/>
+          </p:nvPr>
+        </p:nvSpPr>
+        <p:spPr/>
+        <p:txBody>
+          <a:bodyPr/>
+          <a:lstStyle/>
+          <a:p>
+            <a:r>
+              <a:rPr kumimoji="1" lang="en-US" altLang="zh-CN" dirty="0" smtClean="0"/>
+              <a:t>Select</a:t>
+            </a:r>
+            <a:r>
+              <a:rPr kumimoji="1" lang="zh-CN" altLang="en-US" dirty="0" smtClean="0"/>
+              <a:t> </a:t>
+            </a:r>
+            <a:r>
+              <a:rPr kumimoji="1" lang="en-US" altLang="zh-CN" dirty="0" smtClean="0"/>
+              <a:t>0,</a:t>
+            </a:r>
+            <a:r>
+              <a:rPr kumimoji="1" lang="zh-CN" altLang="en-US" dirty="0" smtClean="0"/>
+              <a:t> </a:t>
+            </a:r>
+            <a:r>
+              <a:rPr kumimoji="1" lang="en-US" altLang="zh-CN" dirty="0" smtClean="0"/>
+              <a:t>Select</a:t>
+            </a:r>
+            <a:r>
+              <a:rPr kumimoji="1" lang="zh-CN" altLang="en-US" dirty="0" smtClean="0"/>
+              <a:t> </a:t>
+            </a:r>
+            <a:r>
+              <a:rPr kumimoji="1" lang="en-US" altLang="zh-CN" dirty="0" smtClean="0"/>
+              <a:t>1</a:t>
+            </a:r>
+            <a:r>
+              <a:rPr kumimoji="1" lang="mr-IN" altLang="zh-CN" dirty="0" smtClean="0"/>
+              <a:t>…</a:t>
+            </a:r>
+            <a:endParaRPr kumimoji="1" lang="en-US" altLang="zh-CN" dirty="0" smtClean="0"/>
+          </a:p>
+          <a:p>
+            <a:r>
+              <a:rPr kumimoji="1" lang="en-US" altLang="zh-CN" dirty="0" smtClean="0"/>
+              <a:t>First</a:t>
+            </a:r>
+            <a:r>
+              <a:rPr kumimoji="1" lang="zh-CN" altLang="en-US" dirty="0" smtClean="0"/>
+              <a:t> </a:t>
+            </a:r>
+            <a:r>
+              <a:rPr kumimoji="1" lang="en-US" altLang="zh-CN" dirty="0" smtClean="0"/>
+              <a:t>level</a:t>
+            </a:r>
+            <a:r>
+              <a:rPr kumimoji="1" lang="zh-CN" altLang="en-US" dirty="0" smtClean="0"/>
+              <a:t> </a:t>
+            </a:r>
+            <a:r>
+              <a:rPr kumimoji="1" lang="en-US" altLang="zh-CN" dirty="0" smtClean="0"/>
+              <a:t>:</a:t>
+            </a:r>
+            <a:r>
+              <a:rPr kumimoji="1" lang="zh-CN" altLang="en-US" dirty="0" smtClean="0"/>
+              <a:t> </a:t>
+            </a:r>
+            <a:r>
+              <a:rPr kumimoji="1" lang="en-US" altLang="zh-CN" dirty="0" smtClean="0"/>
+              <a:t>key-value</a:t>
+            </a:r>
+          </a:p>
+          <a:p>
+            <a:pPr lvl="1"/>
+            <a:r>
+              <a:rPr lang="zh-CN" altLang="en-US" dirty="0" smtClean="0"/>
+              <a:t>数据</a:t>
+            </a:r>
+            <a:r>
+              <a:rPr lang="en-US" altLang="zh-CN" dirty="0" smtClean="0"/>
+              <a:t>key</a:t>
+            </a:r>
+            <a:r>
+              <a:rPr lang="zh-CN" altLang="en-US" dirty="0"/>
+              <a:t> </a:t>
+            </a:r>
+            <a:r>
+              <a:rPr lang="en-US" altLang="zh-CN" dirty="0" smtClean="0"/>
+              <a:t>-&gt;</a:t>
+            </a:r>
+            <a:r>
+              <a:rPr lang="zh-CN" altLang="en-US" dirty="0" smtClean="0"/>
+              <a:t> </a:t>
+            </a:r>
+            <a:r>
+              <a:rPr lang="en-US" altLang="zh-CN" dirty="0" err="1" smtClean="0"/>
+              <a:t>dict</a:t>
+            </a:r>
+            <a:endParaRPr lang="en-US" altLang="zh-CN" dirty="0"/>
+          </a:p>
+          <a:p>
+            <a:pPr lvl="1"/>
+            <a:r>
+              <a:rPr lang="zh-CN" altLang="en-US" dirty="0" smtClean="0"/>
+              <a:t>过期</a:t>
+            </a:r>
+            <a:r>
+              <a:rPr lang="en-US" altLang="zh-CN" dirty="0" smtClean="0"/>
+              <a:t>key</a:t>
+            </a:r>
+            <a:r>
+              <a:rPr lang="zh-CN" altLang="en-US" dirty="0"/>
+              <a:t> </a:t>
+            </a:r>
+            <a:r>
+              <a:rPr lang="en-US" altLang="zh-CN" dirty="0" smtClean="0"/>
+              <a:t>-&gt;</a:t>
+            </a:r>
+            <a:r>
+              <a:rPr lang="zh-CN" altLang="en-US" dirty="0" smtClean="0"/>
+              <a:t> </a:t>
+            </a:r>
+            <a:r>
+              <a:rPr lang="en-US" altLang="zh-CN" dirty="0" smtClean="0"/>
+              <a:t>expires</a:t>
+            </a:r>
+            <a:endParaRPr lang="en-US" altLang="zh-CN" dirty="0"/>
+          </a:p>
+          <a:p>
+            <a:pPr lvl="1"/>
+            <a:endParaRPr kumimoji="1" lang="zh-CN" altLang="en-US" dirty="0"/>
+          </a:p>
+        </p:txBody>
+      </p:sp>
+    </p:spTree>
+    <p:extLst>
+      <p:ext uri="{BB962C8B-B14F-4D97-AF65-F5344CB8AC3E}">
+        <p14:creationId xmlns:p14="http://schemas.microsoft.com/office/powerpoint/2010/main" val="745356585"/>
+      </p:ext>
+    </p:extLst>
+  </p:cSld>
+  <p:clrMapOvr>
+    <a:masterClrMapping/>
+  </p:clrMapOvr>
+</p:sld>
+</file>
+
+<file path=ppt/slides/slide15.xml><?xml version="1.0" encoding="utf-8"?>
+<p:sld xmlns:a="http://schemas.openxmlformats.org/drawingml/2006/main" xmlns:r="http://schemas.openxmlformats.org/officeDocument/2006/relationships" xmlns:p="http://schemas.openxmlformats.org/presentationml/2006/main">
+  <p:cSld>
+    <p:spTree>
+      <p:nvGrpSpPr>
+        <p:cNvPr id="1" name=""/>
+        <p:cNvGrpSpPr/>
+        <p:nvPr/>
+      </p:nvGrpSpPr>
+      <p:grpSpPr>
+        <a:xfrm>
+          <a:off x="0" y="0"/>
+          <a:ext cx="0" cy="0"/>
+          <a:chOff x="0" y="0"/>
+          <a:chExt cx="0" cy="0"/>
+        </a:xfrm>
+      </p:grpSpPr>
+      <p:sp>
+        <p:nvSpPr>
+          <p:cNvPr id="2" name="标题 1"/>
+          <p:cNvSpPr>
+            <a:spLocks noGrp="1"/>
+          </p:cNvSpPr>
+          <p:nvPr>
+            <p:ph type="title"/>
+          </p:nvPr>
+        </p:nvSpPr>
+        <p:spPr/>
+        <p:txBody>
+          <a:bodyPr/>
+          <a:lstStyle/>
+          <a:p>
+            <a:r>
+              <a:rPr kumimoji="1" lang="en-US" altLang="zh-CN" dirty="0" smtClean="0"/>
+              <a:t>PERSISTANCE</a:t>
+            </a:r>
+            <a:endParaRPr kumimoji="1" lang="zh-CN" altLang="en-US" dirty="0"/>
+          </a:p>
+        </p:txBody>
+      </p:sp>
+      <p:sp>
+        <p:nvSpPr>
+          <p:cNvPr id="3" name="内容占位符 2"/>
+          <p:cNvSpPr>
+            <a:spLocks noGrp="1"/>
+          </p:cNvSpPr>
+          <p:nvPr>
+            <p:ph idx="1"/>
+          </p:nvPr>
+        </p:nvSpPr>
+        <p:spPr/>
+        <p:txBody>
+          <a:bodyPr/>
+          <a:lstStyle/>
+          <a:p>
+            <a:r>
+              <a:rPr kumimoji="1" lang="en-US" altLang="zh-CN" dirty="0" smtClean="0"/>
+              <a:t>RDB(</a:t>
+            </a:r>
+            <a:r>
+              <a:rPr lang="en-US" altLang="zh-CN" b="1" dirty="0" err="1"/>
+              <a:t>Redis</a:t>
+            </a:r>
+            <a:r>
+              <a:rPr lang="en-US" altLang="zh-CN" b="1" dirty="0"/>
+              <a:t> </a:t>
+            </a:r>
+            <a:r>
+              <a:rPr lang="en-US" altLang="zh-CN" b="1" dirty="0" err="1" smtClean="0"/>
+              <a:t>DataBase</a:t>
+            </a:r>
+            <a:r>
+              <a:rPr kumimoji="1" lang="en-US" altLang="zh-CN" dirty="0" smtClean="0"/>
+              <a:t>)</a:t>
+            </a:r>
+          </a:p>
+          <a:p>
+            <a:pPr lvl="1"/>
+            <a:r>
+              <a:rPr kumimoji="1" lang="zh-CN" altLang="en-US" dirty="0" smtClean="0"/>
+              <a:t>镜像</a:t>
+            </a:r>
+            <a:endParaRPr kumimoji="1" lang="en-US" altLang="zh-CN" dirty="0" smtClean="0"/>
+          </a:p>
+          <a:p>
+            <a:endParaRPr kumimoji="1" lang="en-US" altLang="zh-CN" dirty="0"/>
+          </a:p>
+          <a:p>
+            <a:r>
+              <a:rPr kumimoji="1" lang="en-US" altLang="zh-CN" dirty="0" smtClean="0"/>
+              <a:t>AOF(</a:t>
+            </a:r>
+            <a:r>
+              <a:rPr lang="en-US" altLang="zh-CN" b="1" dirty="0" smtClean="0"/>
+              <a:t>Append-only file</a:t>
+            </a:r>
+            <a:r>
+              <a:rPr kumimoji="1" lang="en-US" altLang="zh-CN" dirty="0" smtClean="0"/>
+              <a:t>)</a:t>
+            </a:r>
+          </a:p>
+          <a:p>
+            <a:pPr lvl="1"/>
+            <a:r>
+              <a:rPr kumimoji="1" lang="en-US" altLang="zh-CN" dirty="0" err="1" smtClean="0"/>
+              <a:t>binlog</a:t>
+            </a:r>
+            <a:endParaRPr kumimoji="1" lang="zh-CN" altLang="en-US" dirty="0"/>
+          </a:p>
+        </p:txBody>
+      </p:sp>
+    </p:spTree>
+    <p:extLst>
+      <p:ext uri="{BB962C8B-B14F-4D97-AF65-F5344CB8AC3E}">
+        <p14:creationId xmlns:p14="http://schemas.microsoft.com/office/powerpoint/2010/main" val="420525702"/>
+      </p:ext>
+    </p:extLst>
+  </p:cSld>
+  <p:clrMapOvr>
+    <a:masterClrMapping/>
+  </p:clrMapOvr>
+</p:sld>
+</file>
+
+<file path=ppt/slides/slide16.xml><?xml version="1.0" encoding="utf-8"?>
+<p:sld xmlns:a="http://schemas.openxmlformats.org/drawingml/2006/main" xmlns:r="http://schemas.openxmlformats.org/officeDocument/2006/relationships" xmlns:p="http://schemas.openxmlformats.org/presentationml/2006/main">
+  <p:cSld>
+    <p:spTree>
+      <p:nvGrpSpPr>
+        <p:cNvPr id="1" name=""/>
+        <p:cNvGrpSpPr/>
+        <p:nvPr/>
+      </p:nvGrpSpPr>
+      <p:grpSpPr>
+        <a:xfrm>
+          <a:off x="0" y="0"/>
+          <a:ext cx="0" cy="0"/>
+          <a:chOff x="0" y="0"/>
+          <a:chExt cx="0" cy="0"/>
+        </a:xfrm>
+      </p:grpSpPr>
+      <p:sp>
+        <p:nvSpPr>
+          <p:cNvPr id="2" name="标题 1"/>
+          <p:cNvSpPr>
+            <a:spLocks noGrp="1"/>
+          </p:cNvSpPr>
+          <p:nvPr>
+            <p:ph type="title"/>
+          </p:nvPr>
+        </p:nvSpPr>
+        <p:spPr/>
+        <p:txBody>
+          <a:bodyPr/>
+          <a:lstStyle/>
+          <a:p>
+            <a:r>
+              <a:rPr kumimoji="1" lang="en-US" altLang="zh-CN" dirty="0" smtClean="0"/>
+              <a:t>RDB</a:t>
+            </a:r>
+            <a:endParaRPr kumimoji="1" lang="zh-CN" altLang="en-US" dirty="0"/>
+          </a:p>
+        </p:txBody>
+      </p:sp>
+      <p:sp>
+        <p:nvSpPr>
+          <p:cNvPr id="3" name="内容占位符 2"/>
+          <p:cNvSpPr>
+            <a:spLocks noGrp="1"/>
+          </p:cNvSpPr>
+          <p:nvPr>
+            <p:ph idx="1"/>
+          </p:nvPr>
+        </p:nvSpPr>
+        <p:spPr/>
+        <p:txBody>
+          <a:bodyPr/>
+          <a:lstStyle/>
+          <a:p>
+            <a:r>
+              <a:rPr lang="zh-CN" altLang="en-US" dirty="0"/>
+              <a:t>某个时间点将数据写入一个临时文件，持久化结束后，用这个临时文件替换上次持久化的</a:t>
+            </a:r>
+            <a:r>
+              <a:rPr lang="zh-CN" altLang="en-US" dirty="0" smtClean="0"/>
+              <a:t>文件</a:t>
+            </a:r>
+            <a:endParaRPr lang="en-US" altLang="zh-CN" dirty="0" smtClean="0"/>
+          </a:p>
+          <a:p>
+            <a:r>
+              <a:rPr lang="zh-CN" altLang="en-US" dirty="0" smtClean="0"/>
+              <a:t>启动</a:t>
+            </a:r>
+            <a:r>
+              <a:rPr lang="en-US" altLang="zh-CN" dirty="0" err="1"/>
+              <a:t>redis</a:t>
+            </a:r>
+            <a:r>
+              <a:rPr lang="zh-CN" altLang="en-US" dirty="0"/>
+              <a:t>的</a:t>
+            </a:r>
+            <a:r>
+              <a:rPr lang="en-US" altLang="zh-CN" dirty="0"/>
+              <a:t>server</a:t>
+            </a:r>
+            <a:r>
+              <a:rPr lang="zh-CN" altLang="en-US" dirty="0"/>
+              <a:t>时会从</a:t>
+            </a:r>
+            <a:r>
+              <a:rPr lang="en-US" altLang="zh-CN" dirty="0" err="1"/>
+              <a:t>dump.rdb</a:t>
+            </a:r>
+            <a:r>
+              <a:rPr lang="zh-CN" altLang="en-US" dirty="0"/>
+              <a:t>中先同步</a:t>
+            </a:r>
+            <a:r>
+              <a:rPr lang="zh-CN" altLang="en-US" dirty="0" smtClean="0"/>
+              <a:t>数据</a:t>
+            </a:r>
+            <a:endParaRPr lang="en-US" altLang="zh-CN" dirty="0" smtClean="0"/>
+          </a:p>
+          <a:p>
+            <a:endParaRPr lang="zh-CN" altLang="en-US" dirty="0" smtClean="0"/>
+          </a:p>
+          <a:p>
+            <a:endParaRPr kumimoji="1" lang="zh-CN" altLang="en-US" dirty="0"/>
+          </a:p>
+        </p:txBody>
+      </p:sp>
+    </p:spTree>
+    <p:extLst>
+      <p:ext uri="{BB962C8B-B14F-4D97-AF65-F5344CB8AC3E}">
+        <p14:creationId xmlns:p14="http://schemas.microsoft.com/office/powerpoint/2010/main" val="1365772223"/>
+      </p:ext>
+    </p:extLst>
+  </p:cSld>
+  <p:clrMapOvr>
+    <a:masterClrMapping/>
+  </p:clrMapOvr>
+  <p:timing>
+    <p:tnLst>
+      <p:par>
+        <p:cTn id="1" dur="indefinite" restart="never" nodeType="tmRoot"/>
+      </p:par>
+    </p:tnLst>
+  </p:timing>
+</p:sld>
+</file>
+
+<file path=ppt/slides/slide17.xml><?xml version="1.0" encoding="utf-8"?>
+<p:sld xmlns:a="http://schemas.openxmlformats.org/drawingml/2006/main" xmlns:r="http://schemas.openxmlformats.org/officeDocument/2006/relationships" xmlns:p="http://schemas.openxmlformats.org/presentationml/2006/main">
+  <p:cSld>
+    <p:spTree>
+      <p:nvGrpSpPr>
+        <p:cNvPr id="1" name=""/>
+        <p:cNvGrpSpPr/>
+        <p:nvPr/>
+      </p:nvGrpSpPr>
+      <p:grpSpPr>
+        <a:xfrm>
+          <a:off x="0" y="0"/>
+          <a:ext cx="0" cy="0"/>
+          <a:chOff x="0" y="0"/>
+          <a:chExt cx="0" cy="0"/>
+        </a:xfrm>
+      </p:grpSpPr>
+      <p:sp>
+        <p:nvSpPr>
+          <p:cNvPr id="2" name="标题 1"/>
+          <p:cNvSpPr>
+            <a:spLocks noGrp="1"/>
+          </p:cNvSpPr>
+          <p:nvPr>
+            <p:ph type="title"/>
+          </p:nvPr>
+        </p:nvSpPr>
+        <p:spPr/>
+        <p:txBody>
+          <a:bodyPr/>
+          <a:lstStyle/>
+          <a:p>
+            <a:r>
+              <a:rPr kumimoji="1" lang="en-US" altLang="zh-CN" dirty="0" smtClean="0"/>
+              <a:t>RDB</a:t>
+            </a:r>
+            <a:endParaRPr kumimoji="1" lang="zh-CN" altLang="en-US" dirty="0"/>
+          </a:p>
+        </p:txBody>
+      </p:sp>
+      <p:sp>
+        <p:nvSpPr>
+          <p:cNvPr id="3" name="内容占位符 2"/>
+          <p:cNvSpPr>
+            <a:spLocks noGrp="1"/>
+          </p:cNvSpPr>
+          <p:nvPr>
+            <p:ph idx="1"/>
+          </p:nvPr>
+        </p:nvSpPr>
+        <p:spPr/>
+        <p:txBody>
+          <a:bodyPr/>
+          <a:lstStyle/>
+          <a:p>
+            <a:r>
+              <a:rPr lang="zh-CN" altLang="en-US" dirty="0"/>
+              <a:t>优点：使用单独子进程来进行持久化，主进程不会进行任何</a:t>
+            </a:r>
+            <a:r>
+              <a:rPr lang="en-US" altLang="zh-CN" dirty="0"/>
+              <a:t>IO</a:t>
+            </a:r>
+            <a:r>
+              <a:rPr lang="zh-CN" altLang="en-US" dirty="0"/>
+              <a:t>操作，保证了</a:t>
+            </a:r>
+            <a:r>
+              <a:rPr lang="en-US" altLang="zh-CN" dirty="0" err="1"/>
+              <a:t>redis</a:t>
+            </a:r>
+            <a:r>
+              <a:rPr lang="zh-CN" altLang="en-US" dirty="0"/>
+              <a:t>的高性能</a:t>
+            </a:r>
+          </a:p>
+          <a:p>
+            <a:endParaRPr lang="en-US" altLang="zh-CN" dirty="0" smtClean="0"/>
+          </a:p>
+          <a:p>
+            <a:r>
+              <a:rPr lang="en-US" altLang="zh-CN" dirty="0" smtClean="0"/>
+              <a:t>RDB</a:t>
+            </a:r>
+            <a:r>
+              <a:rPr lang="zh-CN" altLang="en-US" dirty="0"/>
+              <a:t>是间隔一段时间进行持久化，如果持久化之间</a:t>
+            </a:r>
+            <a:r>
+              <a:rPr lang="en-US" altLang="zh-CN" dirty="0" err="1"/>
+              <a:t>redis</a:t>
+            </a:r>
+            <a:r>
+              <a:rPr lang="zh-CN" altLang="en-US" dirty="0"/>
+              <a:t>发生故障，会发生数据丢失</a:t>
+            </a:r>
+            <a:r>
+              <a:rPr lang="zh-CN" altLang="en-US" dirty="0" smtClean="0"/>
+              <a:t>。</a:t>
+            </a:r>
+            <a:endParaRPr lang="zh-CN" altLang="en-US" dirty="0"/>
+          </a:p>
+        </p:txBody>
+      </p:sp>
+    </p:spTree>
+    <p:extLst>
+      <p:ext uri="{BB962C8B-B14F-4D97-AF65-F5344CB8AC3E}">
+        <p14:creationId xmlns:p14="http://schemas.microsoft.com/office/powerpoint/2010/main" val="1473891523"/>
+      </p:ext>
+    </p:extLst>
+  </p:cSld>
+  <p:clrMapOvr>
+    <a:masterClrMapping/>
+  </p:clrMapOvr>
+  <p:timing>
+    <p:tnLst>
+      <p:par>
+        <p:cTn id="1" dur="indefinite" restart="never" nodeType="tmRoot"/>
+      </p:par>
+    </p:tnLst>
+  </p:timing>
+</p:sld>
+</file>
+
+<file path=ppt/slides/slide18.xml><?xml version="1.0" encoding="utf-8"?>
+<p:sld xmlns:a="http://schemas.openxmlformats.org/drawingml/2006/main" xmlns:r="http://schemas.openxmlformats.org/officeDocument/2006/relationships" xmlns:p="http://schemas.openxmlformats.org/presentationml/2006/main">
+  <p:cSld>
+    <p:spTree>
+      <p:nvGrpSpPr>
+        <p:cNvPr id="1" name=""/>
+        <p:cNvGrpSpPr/>
+        <p:nvPr/>
+      </p:nvGrpSpPr>
+      <p:grpSpPr>
+        <a:xfrm>
+          <a:off x="0" y="0"/>
+          <a:ext cx="0" cy="0"/>
+          <a:chOff x="0" y="0"/>
+          <a:chExt cx="0" cy="0"/>
+        </a:xfrm>
+      </p:grpSpPr>
+      <p:sp>
+        <p:nvSpPr>
+          <p:cNvPr id="2" name="标题 1"/>
+          <p:cNvSpPr>
+            <a:spLocks noGrp="1"/>
+          </p:cNvSpPr>
+          <p:nvPr>
+            <p:ph type="title"/>
+          </p:nvPr>
+        </p:nvSpPr>
+        <p:spPr/>
+        <p:txBody>
+          <a:bodyPr/>
+          <a:lstStyle/>
+          <a:p>
+            <a:r>
+              <a:rPr kumimoji="1" lang="en-US" altLang="zh-CN" dirty="0" smtClean="0"/>
+              <a:t>RDB</a:t>
+            </a:r>
+            <a:endParaRPr kumimoji="1" lang="zh-CN" altLang="en-US" dirty="0"/>
+          </a:p>
+        </p:txBody>
+      </p:sp>
+      <p:sp>
+        <p:nvSpPr>
+          <p:cNvPr id="3" name="内容占位符 2"/>
+          <p:cNvSpPr>
+            <a:spLocks noGrp="1"/>
+          </p:cNvSpPr>
+          <p:nvPr>
+            <p:ph idx="1"/>
+          </p:nvPr>
+        </p:nvSpPr>
+        <p:spPr/>
+        <p:txBody>
+          <a:bodyPr/>
+          <a:lstStyle/>
+          <a:p>
+            <a:r>
+              <a:rPr lang="zh-CN" altLang="en-US" dirty="0"/>
+              <a:t>定时保存：</a:t>
+            </a:r>
+            <a:r>
+              <a:rPr lang="en-US" altLang="zh-CN" dirty="0" err="1"/>
+              <a:t>redis</a:t>
+            </a:r>
+            <a:r>
+              <a:rPr lang="zh-CN" altLang="en-US" dirty="0"/>
+              <a:t>服务器会定时扫面配置的条件</a:t>
+            </a:r>
+            <a:r>
+              <a:rPr lang="en-US" altLang="zh-CN" dirty="0" err="1"/>
+              <a:t>saveparams</a:t>
+            </a:r>
+            <a:r>
+              <a:rPr lang="zh-CN" altLang="en-US" dirty="0"/>
+              <a:t>。只要有一个条件满足，则会</a:t>
+            </a:r>
+            <a:r>
+              <a:rPr lang="zh-CN" altLang="en-US" dirty="0" smtClean="0"/>
+              <a:t>执行</a:t>
+            </a:r>
+            <a:endParaRPr lang="zh-CN" altLang="en-US" dirty="0"/>
+          </a:p>
+        </p:txBody>
+      </p:sp>
+      <p:pic>
+        <p:nvPicPr>
+          <p:cNvPr id="4" name="图片 3"/>
+          <p:cNvPicPr>
+            <a:picLocks noChangeAspect="1"/>
+          </p:cNvPicPr>
+          <p:nvPr/>
+        </p:nvPicPr>
+        <p:blipFill>
+          <a:blip r:embed="rId2">
+            <a:extLst>
+              <a:ext uri="{28A0092B-C50C-407E-A947-70E740481C1C}">
+                <a14:useLocalDpi xmlns:a14="http://schemas.microsoft.com/office/drawing/2010/main" val="0"/>
+              </a:ext>
+            </a:extLst>
+          </a:blip>
+          <a:stretch>
+            <a:fillRect/>
+          </a:stretch>
+        </p:blipFill>
+        <p:spPr>
+          <a:xfrm>
+            <a:off x="1452562" y="3645024"/>
+            <a:ext cx="6238875" cy="2095500"/>
+          </a:xfrm>
+          <a:prstGeom prst="rect">
+            <a:avLst/>
+          </a:prstGeom>
+        </p:spPr>
+      </p:pic>
+    </p:spTree>
+    <p:extLst>
+      <p:ext uri="{BB962C8B-B14F-4D97-AF65-F5344CB8AC3E}">
+        <p14:creationId xmlns:p14="http://schemas.microsoft.com/office/powerpoint/2010/main" val="1647720194"/>
+      </p:ext>
+    </p:extLst>
+  </p:cSld>
+  <p:clrMapOvr>
+    <a:masterClrMapping/>
+  </p:clrMapOvr>
+</p:sld>
+</file>
+
+<file path=ppt/slides/slide19.xml><?xml version="1.0" encoding="utf-8"?>
+<p:sld xmlns:a="http://schemas.openxmlformats.org/drawingml/2006/main" xmlns:r="http://schemas.openxmlformats.org/officeDocument/2006/relationships" xmlns:p="http://schemas.openxmlformats.org/presentationml/2006/main">
+  <p:cSld>
+    <p:spTree>
+      <p:nvGrpSpPr>
+        <p:cNvPr id="1" name=""/>
+        <p:cNvGrpSpPr/>
+        <p:nvPr/>
+      </p:nvGrpSpPr>
+      <p:grpSpPr>
+        <a:xfrm>
+          <a:off x="0" y="0"/>
+          <a:ext cx="0" cy="0"/>
+          <a:chOff x="0" y="0"/>
+          <a:chExt cx="0" cy="0"/>
+        </a:xfrm>
+      </p:grpSpPr>
+      <p:sp>
+        <p:nvSpPr>
+          <p:cNvPr id="2" name="标题 1"/>
+          <p:cNvSpPr>
+            <a:spLocks noGrp="1"/>
+          </p:cNvSpPr>
+          <p:nvPr>
+            <p:ph type="title"/>
+          </p:nvPr>
+        </p:nvSpPr>
+        <p:spPr/>
+        <p:txBody>
+          <a:bodyPr/>
+          <a:lstStyle/>
+          <a:p>
+            <a:r>
+              <a:rPr kumimoji="1" lang="en-US" altLang="zh-CN" dirty="0" smtClean="0"/>
+              <a:t>AOF</a:t>
+            </a:r>
+            <a:endParaRPr kumimoji="1" lang="zh-CN" altLang="en-US" dirty="0"/>
+          </a:p>
+        </p:txBody>
+      </p:sp>
+      <p:sp>
+        <p:nvSpPr>
+          <p:cNvPr id="3" name="内容占位符 2"/>
+          <p:cNvSpPr>
+            <a:spLocks noGrp="1"/>
+          </p:cNvSpPr>
+          <p:nvPr>
+            <p:ph idx="1"/>
+          </p:nvPr>
+        </p:nvSpPr>
+        <p:spPr/>
+        <p:txBody>
+          <a:bodyPr/>
+          <a:lstStyle/>
+          <a:p>
+            <a:r>
+              <a:rPr kumimoji="1" lang="zh-CN" altLang="en-US" dirty="0" smtClean="0"/>
+              <a:t>保存策略</a:t>
+            </a:r>
+            <a:endParaRPr kumimoji="1" lang="en-US" altLang="zh-CN" dirty="0" smtClean="0"/>
+          </a:p>
+          <a:p>
+            <a:pPr lvl="1"/>
+            <a:r>
+              <a:rPr lang="en-US" altLang="zh-CN" dirty="0"/>
+              <a:t>always</a:t>
+            </a:r>
+            <a:r>
+              <a:rPr lang="zh-CN" altLang="en-US" dirty="0"/>
+              <a:t>：每一条</a:t>
+            </a:r>
+            <a:r>
+              <a:rPr lang="en-US" altLang="zh-CN" dirty="0" err="1"/>
+              <a:t>aof</a:t>
+            </a:r>
+            <a:r>
+              <a:rPr lang="zh-CN" altLang="en-US" dirty="0"/>
+              <a:t>记录都立即同步到文件，这是最安全的</a:t>
+            </a:r>
+            <a:r>
+              <a:rPr lang="zh-CN" altLang="en-US" dirty="0" smtClean="0"/>
+              <a:t>方式</a:t>
+            </a:r>
+            <a:endParaRPr lang="en-US" altLang="zh-CN" dirty="0" smtClean="0"/>
+          </a:p>
+          <a:p>
+            <a:pPr lvl="1"/>
+            <a:r>
+              <a:rPr lang="en-US" altLang="zh-CN" dirty="0" err="1"/>
+              <a:t>everysec</a:t>
+            </a:r>
+            <a:r>
+              <a:rPr lang="en-US" altLang="zh-CN" dirty="0"/>
+              <a:t>(</a:t>
+            </a:r>
+            <a:r>
+              <a:rPr lang="zh-CN" altLang="en-US" dirty="0"/>
+              <a:t>推荐</a:t>
+            </a:r>
+            <a:r>
+              <a:rPr lang="en-US" altLang="zh-CN" dirty="0"/>
+              <a:t>)</a:t>
+            </a:r>
+            <a:r>
+              <a:rPr lang="zh-CN" altLang="en-US" dirty="0"/>
+              <a:t>：每秒同步一次</a:t>
+            </a:r>
+          </a:p>
+          <a:p>
+            <a:pPr lvl="1"/>
+            <a:r>
+              <a:rPr lang="en-US" altLang="zh-CN" dirty="0"/>
+              <a:t>no</a:t>
+            </a:r>
+            <a:r>
+              <a:rPr lang="zh-CN" altLang="en-US" dirty="0"/>
+              <a:t>：</a:t>
+            </a:r>
+            <a:r>
+              <a:rPr lang="en-US" altLang="zh-CN" dirty="0" err="1"/>
+              <a:t>redis</a:t>
+            </a:r>
+            <a:r>
+              <a:rPr lang="zh-CN" altLang="en-US" dirty="0"/>
+              <a:t>并不直接调用文件同步，而是交给操作系统来处理，操作系统可以根据</a:t>
+            </a:r>
+            <a:r>
+              <a:rPr lang="en-US" altLang="zh-CN" dirty="0"/>
+              <a:t>buffer</a:t>
+            </a:r>
+            <a:r>
+              <a:rPr lang="zh-CN" altLang="en-US" dirty="0"/>
+              <a:t>填充情况</a:t>
+            </a:r>
+            <a:r>
+              <a:rPr lang="en-US" altLang="zh-CN" dirty="0"/>
+              <a:t>/</a:t>
+            </a:r>
+            <a:r>
+              <a:rPr lang="zh-CN" altLang="en-US" dirty="0"/>
+              <a:t>通道空闲时间等择机触发</a:t>
+            </a:r>
+            <a:r>
+              <a:rPr lang="zh-CN" altLang="en-US" dirty="0" smtClean="0"/>
+              <a:t>同步</a:t>
+            </a:r>
+            <a:endParaRPr lang="zh-CN" altLang="en-US" dirty="0"/>
+          </a:p>
+          <a:p>
+            <a:endParaRPr kumimoji="1" lang="zh-CN" altLang="en-US" dirty="0"/>
+          </a:p>
+        </p:txBody>
+      </p:sp>
+    </p:spTree>
+    <p:extLst>
+      <p:ext uri="{BB962C8B-B14F-4D97-AF65-F5344CB8AC3E}">
+        <p14:creationId xmlns:p14="http://schemas.microsoft.com/office/powerpoint/2010/main" val="326653986"/>
+      </p:ext>
+    </p:extLst>
+  </p:cSld>
+  <p:clrMapOvr>
+    <a:masterClrMapping/>
+  </p:clrMapOvr>
+  <p:timing>
+    <p:tnLst>
+      <p:par>
+        <p:cTn id="1" dur="indefinite" restart="never" nodeType="tmRoot"/>
+      </p:par>
+    </p:tnLst>
+  </p:timing>
+</p:sld>
+</file>
+
+<file path=ppt/slides/slide2.xml><?xml version="1.0" encoding="utf-8"?>
+<p:sld xmlns:a="http://schemas.openxmlformats.org/drawingml/2006/main" xmlns:r="http://schemas.openxmlformats.org/officeDocument/2006/relationships" xmlns:p="http://schemas.openxmlformats.org/presentationml/2006/main">
+  <p:cSld>
+    <p:spTree>
+      <p:nvGrpSpPr>
+        <p:cNvPr id="1" name=""/>
+        <p:cNvGrpSpPr/>
+        <p:nvPr/>
+      </p:nvGrpSpPr>
+      <p:grpSpPr>
+        <a:xfrm>
+          <a:off x="0" y="0"/>
+          <a:ext cx="0" cy="0"/>
+          <a:chOff x="0" y="0"/>
+          <a:chExt cx="0" cy="0"/>
+        </a:xfrm>
+      </p:grpSpPr>
+      <p:sp>
+        <p:nvSpPr>
+          <p:cNvPr id="2" name="标题 1"/>
+          <p:cNvSpPr>
+            <a:spLocks noGrp="1"/>
+          </p:cNvSpPr>
+          <p:nvPr>
+            <p:ph type="ctrTitle"/>
+          </p:nvPr>
+        </p:nvSpPr>
+        <p:spPr/>
+        <p:txBody>
+          <a:bodyPr/>
+          <a:lstStyle/>
+          <a:p>
+            <a:r>
+              <a:rPr lang="en-US" altLang="zh-CN" dirty="0" smtClean="0"/>
+              <a:t>Commands</a:t>
+            </a:r>
+            <a:endParaRPr lang="zh-CN" altLang="en-US" dirty="0"/>
+          </a:p>
+        </p:txBody>
+      </p:sp>
+      <p:sp>
+        <p:nvSpPr>
+          <p:cNvPr id="3" name="副标题 2"/>
+          <p:cNvSpPr>
+            <a:spLocks noGrp="1"/>
+          </p:cNvSpPr>
+          <p:nvPr>
+            <p:ph type="subTitle" idx="1"/>
+          </p:nvPr>
+        </p:nvSpPr>
+        <p:spPr/>
+        <p:txBody>
+          <a:bodyPr/>
+          <a:lstStyle/>
+          <a:p>
+            <a:endParaRPr lang="zh-CN" altLang="en-US"/>
+          </a:p>
+        </p:txBody>
+      </p:sp>
+    </p:spTree>
+  </p:cSld>
+  <p:clrMapOvr>
+    <a:masterClrMapping/>
+  </p:clrMapOvr>
+  <p:timing>
+    <p:tnLst>
+      <p:par>
+        <p:cTn id="1" dur="indefinite" restart="never" nodeType="tmRoot"/>
+      </p:par>
+    </p:tnLst>
+  </p:timing>
+</p:sld>
+</file>
+
+<file path=ppt/slides/slide20.xml><?xml version="1.0" encoding="utf-8"?>
+<p:sld xmlns:a="http://schemas.openxmlformats.org/drawingml/2006/main" xmlns:r="http://schemas.openxmlformats.org/officeDocument/2006/relationships" xmlns:p="http://schemas.openxmlformats.org/presentationml/2006/main">
+  <p:cSld>
+    <p:spTree>
+      <p:nvGrpSpPr>
+        <p:cNvPr id="1" name=""/>
+        <p:cNvGrpSpPr/>
+        <p:nvPr/>
+      </p:nvGrpSpPr>
+      <p:grpSpPr>
+        <a:xfrm>
+          <a:off x="0" y="0"/>
+          <a:ext cx="0" cy="0"/>
+          <a:chOff x="0" y="0"/>
+          <a:chExt cx="0" cy="0"/>
+        </a:xfrm>
+      </p:grpSpPr>
+      <p:sp>
+        <p:nvSpPr>
+          <p:cNvPr id="2" name="标题 1"/>
+          <p:cNvSpPr>
+            <a:spLocks noGrp="1"/>
+          </p:cNvSpPr>
+          <p:nvPr>
+            <p:ph type="title"/>
+          </p:nvPr>
+        </p:nvSpPr>
+        <p:spPr/>
+        <p:txBody>
+          <a:bodyPr>
+            <a:normAutofit/>
+          </a:bodyPr>
+          <a:lstStyle/>
+          <a:p>
+            <a:r>
+              <a:rPr lang="en-US" altLang="zh-CN" b="1" dirty="0"/>
+              <a:t>AOF</a:t>
+            </a:r>
+            <a:r>
+              <a:rPr lang="zh-CN" altLang="en-US" b="1" dirty="0"/>
+              <a:t>重写</a:t>
+            </a:r>
+            <a:r>
+              <a:rPr lang="zh-CN" altLang="en-US" b="1" dirty="0" smtClean="0"/>
+              <a:t>缓冲区</a:t>
+            </a:r>
+            <a:endParaRPr kumimoji="1" lang="zh-CN" altLang="en-US" dirty="0"/>
+          </a:p>
+        </p:txBody>
+      </p:sp>
+      <p:sp>
+        <p:nvSpPr>
+          <p:cNvPr id="3" name="内容占位符 2"/>
+          <p:cNvSpPr>
+            <a:spLocks noGrp="1"/>
+          </p:cNvSpPr>
+          <p:nvPr>
+            <p:ph idx="1"/>
+          </p:nvPr>
+        </p:nvSpPr>
+        <p:spPr/>
+        <p:txBody>
+          <a:bodyPr>
+            <a:normAutofit fontScale="92500" lnSpcReduction="10000"/>
+          </a:bodyPr>
+          <a:lstStyle/>
+          <a:p>
+            <a:r>
+              <a:rPr lang="en-US" altLang="zh-CN" dirty="0" err="1"/>
+              <a:t>redis</a:t>
+            </a:r>
+            <a:r>
+              <a:rPr lang="zh-CN" altLang="en-US" dirty="0"/>
+              <a:t>服务器用子进程完成</a:t>
+            </a:r>
+            <a:r>
+              <a:rPr lang="en-US" altLang="zh-CN" dirty="0"/>
+              <a:t>AOF</a:t>
+            </a:r>
+            <a:r>
+              <a:rPr lang="zh-CN" altLang="en-US" dirty="0"/>
+              <a:t>文件重写，不会阻塞主进程。此时会有一个问题，重写过程中，新的写命令怎么处理</a:t>
+            </a:r>
+            <a:r>
+              <a:rPr lang="zh-CN" altLang="en-US" dirty="0" smtClean="0"/>
+              <a:t>？</a:t>
+            </a:r>
+            <a:endParaRPr lang="en-US" altLang="zh-CN" dirty="0"/>
+          </a:p>
+          <a:p>
+            <a:pPr lvl="1"/>
+            <a:r>
+              <a:rPr lang="zh-CN" altLang="en-US" dirty="0" smtClean="0"/>
+              <a:t>子</a:t>
+            </a:r>
+            <a:r>
+              <a:rPr lang="zh-CN" altLang="en-US" dirty="0"/>
+              <a:t>进程重写</a:t>
+            </a:r>
+            <a:r>
+              <a:rPr lang="en-US" altLang="zh-CN" dirty="0"/>
+              <a:t>AOF</a:t>
+            </a:r>
+            <a:r>
+              <a:rPr lang="zh-CN" altLang="en-US" dirty="0"/>
+              <a:t>时，主进程的命令会写入重写缓冲区。</a:t>
+            </a:r>
+          </a:p>
+          <a:p>
+            <a:pPr lvl="1"/>
+            <a:r>
+              <a:rPr lang="zh-CN" altLang="en-US" dirty="0" smtClean="0"/>
+              <a:t>当</a:t>
+            </a:r>
+            <a:r>
+              <a:rPr lang="zh-CN" altLang="en-US" dirty="0"/>
+              <a:t>重写完成时，会向主进程请求缓冲区，追加到新的</a:t>
+            </a:r>
+            <a:r>
+              <a:rPr lang="en-US" altLang="zh-CN" dirty="0"/>
+              <a:t>AOF</a:t>
+            </a:r>
+            <a:r>
+              <a:rPr lang="zh-CN" altLang="en-US" dirty="0"/>
+              <a:t>文件。</a:t>
+            </a:r>
+          </a:p>
+          <a:p>
+            <a:pPr lvl="1"/>
+            <a:r>
+              <a:rPr lang="zh-CN" altLang="en-US" dirty="0" smtClean="0"/>
+              <a:t>追加</a:t>
+            </a:r>
+            <a:r>
+              <a:rPr lang="zh-CN" altLang="en-US" dirty="0"/>
+              <a:t>后，原子性的覆盖原</a:t>
+            </a:r>
+            <a:r>
+              <a:rPr lang="en-US" altLang="zh-CN" dirty="0"/>
+              <a:t>AOF</a:t>
+            </a:r>
+            <a:r>
+              <a:rPr lang="zh-CN" altLang="en-US" dirty="0"/>
+              <a:t>文件</a:t>
+            </a:r>
+            <a:r>
+              <a:rPr lang="zh-CN" altLang="en-US" dirty="0" smtClean="0"/>
+              <a:t>。</a:t>
+            </a:r>
+            <a:endParaRPr lang="en-US" altLang="zh-CN" dirty="0"/>
+          </a:p>
+          <a:p>
+            <a:pPr lvl="1"/>
+            <a:endParaRPr lang="zh-CN" altLang="en-US" dirty="0"/>
+          </a:p>
+          <a:p>
+            <a:r>
+              <a:rPr lang="zh-CN" altLang="en-US" dirty="0" smtClean="0"/>
+              <a:t>请求</a:t>
+            </a:r>
+            <a:r>
+              <a:rPr lang="zh-CN" altLang="en-US" dirty="0"/>
+              <a:t>缓冲区到覆盖过程，会阻塞父进程。</a:t>
+            </a:r>
+          </a:p>
+          <a:p>
+            <a:endParaRPr kumimoji="1" lang="zh-CN" altLang="en-US" dirty="0"/>
+          </a:p>
+        </p:txBody>
+      </p:sp>
+    </p:spTree>
+    <p:extLst>
+      <p:ext uri="{BB962C8B-B14F-4D97-AF65-F5344CB8AC3E}">
+        <p14:creationId xmlns:p14="http://schemas.microsoft.com/office/powerpoint/2010/main" val="785506235"/>
+      </p:ext>
+    </p:extLst>
+  </p:cSld>
+  <p:clrMapOvr>
+    <a:masterClrMapping/>
+  </p:clrMapOvr>
+  <p:timing>
+    <p:tnLst>
+      <p:par>
+        <p:cTn id="1" dur="indefinite" restart="never" nodeType="tmRoot"/>
+      </p:par>
+    </p:tnLst>
+  </p:timing>
+</p:sld>
+</file>
+
+<file path=ppt/slides/slide21.xml><?xml version="1.0" encoding="utf-8"?>
+<p:sld xmlns:a="http://schemas.openxmlformats.org/drawingml/2006/main" xmlns:r="http://schemas.openxmlformats.org/officeDocument/2006/relationships" xmlns:p="http://schemas.openxmlformats.org/presentationml/2006/main">
+  <p:cSld>
+    <p:spTree>
+      <p:nvGrpSpPr>
+        <p:cNvPr id="1" name=""/>
+        <p:cNvGrpSpPr/>
+        <p:nvPr/>
+      </p:nvGrpSpPr>
+      <p:grpSpPr>
+        <a:xfrm>
+          <a:off x="0" y="0"/>
+          <a:ext cx="0" cy="0"/>
+          <a:chOff x="0" y="0"/>
+          <a:chExt cx="0" cy="0"/>
+        </a:xfrm>
+      </p:grpSpPr>
+      <p:sp>
+        <p:nvSpPr>
+          <p:cNvPr id="2" name="标题 1"/>
+          <p:cNvSpPr>
+            <a:spLocks noGrp="1"/>
+          </p:cNvSpPr>
+          <p:nvPr>
+            <p:ph type="title"/>
+          </p:nvPr>
+        </p:nvSpPr>
+        <p:spPr/>
+        <p:txBody>
+          <a:bodyPr/>
+          <a:lstStyle/>
+          <a:p>
+            <a:r>
+              <a:rPr lang="en-US" altLang="zh-CN" dirty="0" smtClean="0"/>
+              <a:t>Data Structure</a:t>
+            </a:r>
+            <a:endParaRPr lang="zh-CN" altLang="en-US" dirty="0"/>
+          </a:p>
+        </p:txBody>
+      </p:sp>
+      <p:sp>
+        <p:nvSpPr>
+          <p:cNvPr id="3" name="内容占位符 2"/>
+          <p:cNvSpPr>
+            <a:spLocks noGrp="1"/>
+          </p:cNvSpPr>
+          <p:nvPr>
+            <p:ph idx="1"/>
+          </p:nvPr>
+        </p:nvSpPr>
+        <p:spPr/>
+        <p:txBody>
+          <a:bodyPr/>
+          <a:lstStyle/>
+          <a:p>
+            <a:r>
+              <a:rPr lang="en-US" altLang="zh-CN" dirty="0" smtClean="0"/>
+              <a:t>SDS</a:t>
+            </a:r>
+          </a:p>
+          <a:p>
+            <a:pPr lvl="1"/>
+            <a:r>
+              <a:rPr lang="zh-CN" altLang="en-US" dirty="0"/>
+              <a:t> </a:t>
+            </a:r>
+            <a:r>
+              <a:rPr lang="en-US" altLang="zh-CN" dirty="0" err="1" smtClean="0"/>
+              <a:t>len</a:t>
+            </a:r>
+            <a:r>
+              <a:rPr lang="zh-CN" altLang="en-US" dirty="0" smtClean="0"/>
+              <a:t> </a:t>
+            </a:r>
+            <a:r>
+              <a:rPr lang="en-US" altLang="zh-CN" dirty="0" smtClean="0"/>
+              <a:t>+</a:t>
+            </a:r>
+            <a:r>
+              <a:rPr lang="zh-CN" altLang="en-US" dirty="0" smtClean="0"/>
+              <a:t> </a:t>
+            </a:r>
+            <a:r>
+              <a:rPr lang="en-US" altLang="zh-CN" dirty="0" smtClean="0"/>
+              <a:t>free</a:t>
+            </a:r>
+            <a:r>
+              <a:rPr lang="zh-CN" altLang="en-US" dirty="0" smtClean="0"/>
+              <a:t> </a:t>
+            </a:r>
+            <a:r>
+              <a:rPr lang="en-US" altLang="zh-CN" dirty="0" smtClean="0"/>
+              <a:t>+</a:t>
+            </a:r>
+            <a:r>
+              <a:rPr lang="zh-CN" altLang="en-US" dirty="0" smtClean="0"/>
+              <a:t> </a:t>
+            </a:r>
+            <a:r>
+              <a:rPr lang="en-US" altLang="zh-CN" dirty="0" smtClean="0"/>
+              <a:t>char[]</a:t>
+            </a:r>
+          </a:p>
+          <a:p>
+            <a:pPr lvl="1"/>
+            <a:r>
+              <a:rPr lang="zh-CN" altLang="en-US" dirty="0" smtClean="0"/>
+              <a:t>仍以</a:t>
+            </a:r>
+            <a:r>
+              <a:rPr lang="en-US" altLang="zh-CN" dirty="0" smtClean="0"/>
+              <a:t>\0</a:t>
+            </a:r>
+            <a:r>
+              <a:rPr lang="zh-CN" altLang="en-US" dirty="0" smtClean="0"/>
+              <a:t>结尾？</a:t>
+            </a:r>
+            <a:endParaRPr lang="en-US" altLang="zh-CN" dirty="0" smtClean="0"/>
+          </a:p>
+          <a:p>
+            <a:pPr lvl="1"/>
+            <a:r>
+              <a:rPr lang="zh-CN" altLang="en-US" dirty="0" smtClean="0"/>
+              <a:t>和</a:t>
+            </a:r>
+            <a:r>
+              <a:rPr lang="en-US" altLang="zh-CN" dirty="0" smtClean="0"/>
+              <a:t>c</a:t>
+            </a:r>
+            <a:r>
+              <a:rPr lang="zh-CN" altLang="en-US" dirty="0" smtClean="0"/>
+              <a:t>字符串比较的优点</a:t>
+            </a:r>
+            <a:endParaRPr lang="en-US" altLang="zh-CN" dirty="0" smtClean="0"/>
+          </a:p>
+          <a:p>
+            <a:pPr lvl="1"/>
+            <a:r>
+              <a:rPr lang="zh-CN" altLang="en-US" dirty="0" smtClean="0"/>
+              <a:t>预扩充与懒回收</a:t>
+            </a:r>
+            <a:endParaRPr lang="en-US" altLang="zh-CN" dirty="0" smtClean="0"/>
+          </a:p>
+        </p:txBody>
+      </p:sp>
+    </p:spTree>
+    <p:extLst>
+      <p:ext uri="{BB962C8B-B14F-4D97-AF65-F5344CB8AC3E}">
+        <p14:creationId xmlns:p14="http://schemas.microsoft.com/office/powerpoint/2010/main" val="658445095"/>
+      </p:ext>
+    </p:extLst>
+  </p:cSld>
+  <p:clrMapOvr>
+    <a:masterClrMapping/>
+  </p:clrMapOvr>
+  <p:timing>
+    <p:tnLst>
+      <p:par>
+        <p:cTn id="1" dur="indefinite" restart="never" nodeType="tmRoot"/>
+      </p:par>
+    </p:tnLst>
+  </p:timing>
+</p:sld>
+</file>
+
+<file path=ppt/slides/slide22.xml><?xml version="1.0" encoding="utf-8"?>
 <p:sld xmlns:a="http://schemas.openxmlformats.org/drawingml/2006/main" xmlns:r="http://schemas.openxmlformats.org/officeDocument/2006/relationships" xmlns:p="http://schemas.openxmlformats.org/presentationml/2006/main">
   <p:cSld>
     <p:spTree>
@@ -9014,7 +11152,7 @@
 </p:sld>
 </file>
 
-<file path=ppt/slides/slide15.xml><?xml version="1.0" encoding="utf-8"?>
+<file path=ppt/slides/slide23.xml><?xml version="1.0" encoding="utf-8"?>
 <p:sld xmlns:a="http://schemas.openxmlformats.org/drawingml/2006/main" xmlns:r="http://schemas.openxmlformats.org/officeDocument/2006/relationships" xmlns:p="http://schemas.openxmlformats.org/presentationml/2006/main">
   <p:cSld>
     <p:spTree>
@@ -9151,7 +11289,7 @@
 </p:sld>
 </file>
 
-<file path=ppt/slides/slide16.xml><?xml version="1.0" encoding="utf-8"?>
+<file path=ppt/slides/slide24.xml><?xml version="1.0" encoding="utf-8"?>
 <p:sld xmlns:a="http://schemas.openxmlformats.org/drawingml/2006/main" xmlns:r="http://schemas.openxmlformats.org/officeDocument/2006/relationships" xmlns:p="http://schemas.openxmlformats.org/presentationml/2006/main">
   <p:cSld>
     <p:spTree>
@@ -9245,7 +11383,7 @@
     </p:spTree>
     <p:extLst>
       <p:ext uri="{BB962C8B-B14F-4D97-AF65-F5344CB8AC3E}">
-        <p14:creationId xmlns:p14="http://schemas.microsoft.com/office/powerpoint/2010/main" xmlns="" val="3454362790"/>
+        <p14:creationId xmlns:p14="http://schemas.microsoft.com/office/powerpoint/2010/main" val="3454362790"/>
       </p:ext>
     </p:extLst>
   </p:cSld>
@@ -9262,7 +11400,7 @@
 </p:sld>
 </file>
 
-<file path=ppt/slides/slide17.xml><?xml version="1.0" encoding="utf-8"?>
+<file path=ppt/slides/slide25.xml><?xml version="1.0" encoding="utf-8"?>
 <p:sld xmlns:a="http://schemas.openxmlformats.org/drawingml/2006/main" xmlns:r="http://schemas.openxmlformats.org/officeDocument/2006/relationships" xmlns:p="http://schemas.openxmlformats.org/presentationml/2006/main">
   <p:cSld>
     <p:spTree>
@@ -9454,7 +11592,7 @@
     </p:spTree>
     <p:extLst>
       <p:ext uri="{BB962C8B-B14F-4D97-AF65-F5344CB8AC3E}">
-        <p14:creationId xmlns:p14="http://schemas.microsoft.com/office/powerpoint/2010/main" xmlns="" val="469296120"/>
+        <p14:creationId xmlns:p14="http://schemas.microsoft.com/office/powerpoint/2010/main" val="469296120"/>
       </p:ext>
     </p:extLst>
   </p:cSld>
@@ -9471,7 +11609,7 @@
 </p:sld>
 </file>
 
-<file path=ppt/slides/slide18.xml><?xml version="1.0" encoding="utf-8"?>
+<file path=ppt/slides/slide26.xml><?xml version="1.0" encoding="utf-8"?>
 <p:sld xmlns:a="http://schemas.openxmlformats.org/drawingml/2006/main" xmlns:r="http://schemas.openxmlformats.org/officeDocument/2006/relationships" xmlns:p="http://schemas.openxmlformats.org/presentationml/2006/main">
   <p:cSld>
     <p:spTree>
@@ -9557,7 +11695,7 @@
     </p:spTree>
     <p:extLst>
       <p:ext uri="{BB962C8B-B14F-4D97-AF65-F5344CB8AC3E}">
-        <p14:creationId xmlns:p14="http://schemas.microsoft.com/office/powerpoint/2010/main" xmlns="" val="329559011"/>
+        <p14:creationId xmlns:p14="http://schemas.microsoft.com/office/powerpoint/2010/main" val="329559011"/>
       </p:ext>
     </p:extLst>
   </p:cSld>
@@ -9779,7 +11917,7 @@
 </p:sld>
 </file>
 
-<file path=ppt/slides/slide19.xml><?xml version="1.0" encoding="utf-8"?>
+<file path=ppt/slides/slide27.xml><?xml version="1.0" encoding="utf-8"?>
 <p:sld xmlns:a="http://schemas.openxmlformats.org/drawingml/2006/main" xmlns:r="http://schemas.openxmlformats.org/officeDocument/2006/relationships" xmlns:p="http://schemas.openxmlformats.org/presentationml/2006/main">
   <p:cSld>
     <p:spTree>
@@ -9828,7 +11966,7 @@
           <p:nvPr/>
         </p:nvPicPr>
         <p:blipFill>
-          <a:blip r:embed="rId2"/>
+          <a:blip r:embed="rId3"/>
           <a:srcRect/>
           <a:stretch>
             <a:fillRect/>
@@ -9860,7 +11998,7 @@
 </p:sld>
 </file>
 
-<file path=ppt/slides/slide2.xml><?xml version="1.0" encoding="utf-8"?>
+<file path=ppt/slides/slide28.xml><?xml version="1.0" encoding="utf-8"?>
 <p:sld xmlns:a="http://schemas.openxmlformats.org/drawingml/2006/main" xmlns:r="http://schemas.openxmlformats.org/officeDocument/2006/relationships" xmlns:p="http://schemas.openxmlformats.org/presentationml/2006/main">
   <p:cSld>
     <p:spTree>
@@ -9884,7 +12022,7 @@
             <a:spLocks noGrp="1"/>
           </p:cNvSpPr>
           <p:nvPr>
-            <p:ph type="ctrTitle"/>
+            <p:ph type="title"/>
           </p:nvPr>
         </p:nvSpPr>
         <p:spPr/>
@@ -9894,7 +12032,7 @@
           <a:p>
             <a:r>
               <a:rPr lang="en-US" altLang="zh-CN" dirty="0" smtClean="0"/>
-              <a:t>Commands</a:t>
+              <a:t>O</a:t>
             </a:r>
             <a:endParaRPr lang="zh-CN" altLang="en-US" dirty="0"/>
           </a:p>
@@ -9902,12 +12040,12 @@
       </p:sp>
       <p:sp>
         <p:nvSpPr>
-          <p:cNvPr id="3" name="副标题 2"/>
-          <p:cNvSpPr>
-            <a:spLocks noGrp="1"/>
-          </p:cNvSpPr>
-          <p:nvPr>
-            <p:ph type="subTitle" idx="1"/>
+          <p:cNvPr id="3" name="内容占位符 2"/>
+          <p:cNvSpPr>
+            <a:spLocks noGrp="1"/>
+          </p:cNvSpPr>
+          <p:nvPr>
+            <p:ph idx="1"/>
           </p:nvPr>
         </p:nvSpPr>
         <p:spPr/>
@@ -9915,7 +12053,51 @@
           <a:bodyPr/>
           <a:lstStyle/>
           <a:p>
-            <a:endParaRPr lang="zh-CN" altLang="en-US"/>
+            <a:r>
+              <a:rPr lang="en-US" altLang="zh-CN" dirty="0" smtClean="0">
+                <a:sym typeface="Wingdings" panose="05000000000000000000" pitchFamily="2" charset="2"/>
+              </a:rPr>
+              <a:t>Insert : O(</a:t>
+            </a:r>
+            <a:r>
+              <a:rPr lang="en-US" altLang="zh-CN" dirty="0" err="1" smtClean="0">
+                <a:sym typeface="Wingdings" panose="05000000000000000000" pitchFamily="2" charset="2"/>
+              </a:rPr>
+              <a:t>logN</a:t>
+            </a:r>
+            <a:r>
+              <a:rPr lang="en-US" altLang="zh-CN" dirty="0" smtClean="0">
+                <a:sym typeface="Wingdings" panose="05000000000000000000" pitchFamily="2" charset="2"/>
+              </a:rPr>
+              <a:t>)</a:t>
+            </a:r>
+          </a:p>
+          <a:p>
+            <a:r>
+              <a:rPr lang="en-US" altLang="zh-CN" dirty="0" smtClean="0">
+                <a:sym typeface="Wingdings" panose="05000000000000000000" pitchFamily="2" charset="2"/>
+              </a:rPr>
+              <a:t>Search : O(</a:t>
+            </a:r>
+            <a:r>
+              <a:rPr lang="en-US" altLang="zh-CN" dirty="0" err="1" smtClean="0">
+                <a:sym typeface="Wingdings" panose="05000000000000000000" pitchFamily="2" charset="2"/>
+              </a:rPr>
+              <a:t>logN</a:t>
+            </a:r>
+            <a:r>
+              <a:rPr lang="en-US" altLang="zh-CN" dirty="0" smtClean="0">
+                <a:sym typeface="Wingdings" panose="05000000000000000000" pitchFamily="2" charset="2"/>
+              </a:rPr>
+              <a:t>)</a:t>
+            </a:r>
+          </a:p>
+          <a:p>
+            <a:r>
+              <a:rPr lang="en-US" altLang="zh-CN" dirty="0" smtClean="0"/>
+              <a:t>Space : O(N)</a:t>
+            </a:r>
+            <a:endParaRPr lang="zh-CN" altLang="en-US" dirty="0"/>
           </a:p>
         </p:txBody>
       </p:sp>
@@ -9934,7 +12116,7 @@
 </p:sld>
 </file>
 
-<file path=ppt/slides/slide20.xml><?xml version="1.0" encoding="utf-8"?>
+<file path=ppt/slides/slide29.xml><?xml version="1.0" encoding="utf-8"?>
 <p:sld xmlns:a="http://schemas.openxmlformats.org/drawingml/2006/main" xmlns:r="http://schemas.openxmlformats.org/officeDocument/2006/relationships" xmlns:p="http://schemas.openxmlformats.org/presentationml/2006/main">
   <p:cSld>
     <p:spTree>
@@ -9967,13 +12149,144 @@
           <a:lstStyle/>
           <a:p>
             <a:r>
+              <a:rPr lang="en-US" altLang="zh-CN" smtClean="0"/>
+              <a:t>optimistic</a:t>
+            </a:r>
+            <a:endParaRPr lang="zh-CN" altLang="en-US" dirty="0"/>
+          </a:p>
+        </p:txBody>
+      </p:sp>
+      <p:sp>
+        <p:nvSpPr>
+          <p:cNvPr id="3" name="内容占位符 2"/>
+          <p:cNvSpPr>
+            <a:spLocks noGrp="1"/>
+          </p:cNvSpPr>
+          <p:nvPr>
+            <p:ph idx="1"/>
+          </p:nvPr>
+        </p:nvSpPr>
+        <p:spPr/>
+        <p:txBody>
+          <a:bodyPr/>
+          <a:lstStyle/>
+          <a:p>
+            <a:r>
               <a:rPr lang="en-US" altLang="zh-CN" dirty="0" smtClean="0"/>
-              <a:t>O</a:t>
+              <a:t>Sorted</a:t>
+            </a:r>
+            <a:r>
+              <a:rPr lang="zh-CN" altLang="en-US" dirty="0" smtClean="0"/>
+              <a:t> </a:t>
+            </a:r>
+            <a:r>
+              <a:rPr lang="en-US" altLang="zh-CN" dirty="0" smtClean="0"/>
+              <a:t>Set</a:t>
+            </a:r>
+            <a:r>
+              <a:rPr lang="zh-CN" altLang="en-US" dirty="0" smtClean="0"/>
+              <a:t> </a:t>
+            </a:r>
+            <a:r>
+              <a:rPr lang="en-US" altLang="zh-CN" dirty="0" smtClean="0"/>
+              <a:t>=</a:t>
+            </a:r>
+            <a:r>
+              <a:rPr lang="zh-CN" altLang="en-US" dirty="0" smtClean="0"/>
+              <a:t> </a:t>
+            </a:r>
+            <a:r>
+              <a:rPr lang="en-US" altLang="zh-CN" dirty="0" err="1" smtClean="0"/>
+              <a:t>skiplist</a:t>
+            </a:r>
+            <a:r>
+              <a:rPr lang="zh-CN" altLang="en-US" dirty="0" smtClean="0"/>
+              <a:t> </a:t>
+            </a:r>
+            <a:r>
+              <a:rPr lang="en-US" altLang="zh-CN" dirty="0" smtClean="0"/>
+              <a:t>+</a:t>
+            </a:r>
+            <a:r>
+              <a:rPr lang="zh-CN" altLang="en-US" dirty="0" smtClean="0"/>
+              <a:t> </a:t>
+            </a:r>
+            <a:r>
+              <a:rPr lang="en-US" altLang="zh-CN" dirty="0" err="1" smtClean="0"/>
+              <a:t>hashtable</a:t>
+            </a:r>
+            <a:r>
+              <a:rPr lang="zh-CN" altLang="en-US" dirty="0" smtClean="0"/>
+              <a:t> </a:t>
+            </a:r>
+            <a:r>
+              <a:rPr lang="en-US" altLang="zh-CN" dirty="0" smtClean="0"/>
+              <a:t>?</a:t>
             </a:r>
             <a:endParaRPr lang="zh-CN" altLang="en-US" dirty="0"/>
           </a:p>
         </p:txBody>
       </p:sp>
+    </p:spTree>
+    <p:extLst>
+      <p:ext uri="{BB962C8B-B14F-4D97-AF65-F5344CB8AC3E}">
+        <p14:creationId xmlns:p14="http://schemas.microsoft.com/office/powerpoint/2010/main" val="747766282"/>
+      </p:ext>
+    </p:extLst>
+  </p:cSld>
+  <p:clrMapOvr>
+    <a:masterClrMapping/>
+  </p:clrMapOvr>
+  <p:timing>
+    <p:tnLst>
+      <p:par>
+        <p:cTn id="1" dur="indefinite" restart="never" nodeType="tmRoot"/>
+      </p:par>
+    </p:tnLst>
+  </p:timing>
+</p:sld>
+</file>
+
+<file path=ppt/slides/slide3.xml><?xml version="1.0" encoding="utf-8"?>
+<p:sld xmlns:a="http://schemas.openxmlformats.org/drawingml/2006/main" xmlns:r="http://schemas.openxmlformats.org/officeDocument/2006/relationships" xmlns:p="http://schemas.openxmlformats.org/presentationml/2006/main">
+  <p:cSld>
+    <p:spTree>
+      <p:nvGrpSpPr>
+        <p:cNvPr id="1" name=""/>
+        <p:cNvGrpSpPr/>
+        <p:nvPr/>
+      </p:nvGrpSpPr>
+      <p:grpSpPr>
+        <a:xfrm>
+          <a:off x="0" y="0"/>
+          <a:ext cx="0" cy="0"/>
+          <a:chOff x="0" y="0"/>
+          <a:chExt cx="0" cy="0"/>
+        </a:xfrm>
+      </p:grpSpPr>
+      <p:sp>
+        <p:nvSpPr>
+          <p:cNvPr id="2" name="标题 1"/>
+          <p:cNvSpPr>
+            <a:spLocks noGrp="1"/>
+          </p:cNvSpPr>
+          <p:nvPr>
+            <p:ph type="title"/>
+          </p:nvPr>
+        </p:nvSpPr>
+        <p:spPr/>
+        <p:txBody>
+          <a:bodyPr/>
+          <a:lstStyle/>
+          <a:p>
+            <a:r>
+              <a:rPr lang="en-US" altLang="zh-CN" dirty="0" smtClean="0"/>
+              <a:t>sorted set</a:t>
+            </a:r>
+            <a:endParaRPr lang="zh-CN" altLang="en-US" dirty="0"/>
+          </a:p>
+        </p:txBody>
+      </p:sp>
       <p:sp>
         <p:nvSpPr>
           <p:cNvPr id="3" name="内容占位符 2"/>
@@ -9990,49 +12303,36 @@
           <a:lstStyle/>
           <a:p>
             <a:r>
-              <a:rPr lang="en-US" altLang="zh-CN" dirty="0" smtClean="0">
-                <a:sym typeface="Wingdings" panose="05000000000000000000" pitchFamily="2" charset="2"/>
-              </a:rPr>
-              <a:t>Insert : O(</a:t>
-            </a:r>
-            <a:r>
-              <a:rPr lang="en-US" altLang="zh-CN" dirty="0" err="1" smtClean="0">
-                <a:sym typeface="Wingdings" panose="05000000000000000000" pitchFamily="2" charset="2"/>
-              </a:rPr>
-              <a:t>logN</a:t>
-            </a:r>
-            <a:r>
-              <a:rPr lang="en-US" altLang="zh-CN" dirty="0" smtClean="0">
-                <a:sym typeface="Wingdings" panose="05000000000000000000" pitchFamily="2" charset="2"/>
-              </a:rPr>
-              <a:t>)</a:t>
-            </a:r>
-          </a:p>
-          <a:p>
-            <a:r>
-              <a:rPr lang="en-US" altLang="zh-CN" dirty="0" smtClean="0">
-                <a:sym typeface="Wingdings" panose="05000000000000000000" pitchFamily="2" charset="2"/>
-              </a:rPr>
-              <a:t>Search : O(</a:t>
-            </a:r>
-            <a:r>
-              <a:rPr lang="en-US" altLang="zh-CN" dirty="0" err="1" smtClean="0">
-                <a:sym typeface="Wingdings" panose="05000000000000000000" pitchFamily="2" charset="2"/>
-              </a:rPr>
-              <a:t>logN</a:t>
-            </a:r>
-            <a:r>
-              <a:rPr lang="en-US" altLang="zh-CN" dirty="0" smtClean="0">
-                <a:sym typeface="Wingdings" panose="05000000000000000000" pitchFamily="2" charset="2"/>
-              </a:rPr>
-              <a:t>)</a:t>
-            </a:r>
-          </a:p>
-          <a:p>
-            <a:r>
-              <a:rPr lang="en-US" altLang="zh-CN" dirty="0" smtClean="0"/>
-              <a:t>Space : O(N)</a:t>
-            </a:r>
+              <a:rPr lang="en-US" altLang="zh-CN" dirty="0" err="1" smtClean="0"/>
+              <a:t>zscore</a:t>
+            </a:r>
+            <a:endParaRPr lang="en-US" altLang="zh-CN" dirty="0" smtClean="0"/>
+          </a:p>
+          <a:p>
+            <a:r>
+              <a:rPr lang="en-US" altLang="zh-CN" dirty="0" err="1" smtClean="0"/>
+              <a:t>zrank</a:t>
+            </a:r>
+            <a:endParaRPr lang="en-US" altLang="zh-CN" dirty="0" smtClean="0"/>
+          </a:p>
+          <a:p>
+            <a:r>
+              <a:rPr lang="en-US" altLang="zh-CN" dirty="0" err="1" smtClean="0"/>
+              <a:t>zrangebyscore</a:t>
+            </a:r>
+            <a:endParaRPr lang="en-US" altLang="zh-CN" dirty="0" smtClean="0"/>
+          </a:p>
+          <a:p>
+            <a:r>
+              <a:rPr lang="en-US" altLang="zh-CN" dirty="0" err="1" smtClean="0"/>
+              <a:t>zinterstore</a:t>
+            </a:r>
+            <a:endParaRPr lang="en-US" altLang="zh-CN" dirty="0" smtClean="0"/>
+          </a:p>
+          <a:p>
+            <a:endParaRPr lang="en-US" dirty="0" smtClean="0"/>
+          </a:p>
+          <a:p>
             <a:endParaRPr lang="zh-CN" altLang="en-US" dirty="0"/>
           </a:p>
         </p:txBody>
@@ -10052,7 +12352,7 @@
 </p:sld>
 </file>
 
-<file path=ppt/slides/slide21.xml><?xml version="1.0" encoding="utf-8"?>
+<file path=ppt/slides/slide30.xml><?xml version="1.0" encoding="utf-8"?>
 <p:sld xmlns:a="http://schemas.openxmlformats.org/drawingml/2006/main" xmlns:r="http://schemas.openxmlformats.org/officeDocument/2006/relationships" xmlns:p="http://schemas.openxmlformats.org/presentationml/2006/main">
   <p:cSld>
     <p:spTree>
@@ -10523,7 +12823,7 @@
 </p:sld>
 </file>
 
-<file path=ppt/slides/slide22.xml><?xml version="1.0" encoding="utf-8"?>
+<file path=ppt/slides/slide31.xml><?xml version="1.0" encoding="utf-8"?>
 <p:sld xmlns:a="http://schemas.openxmlformats.org/drawingml/2006/main" xmlns:r="http://schemas.openxmlformats.org/officeDocument/2006/relationships" xmlns:p="http://schemas.openxmlformats.org/presentationml/2006/main">
   <p:cSld>
     <p:spTree>
@@ -10609,7 +12909,7 @@
     </p:spTree>
     <p:extLst>
       <p:ext uri="{BB962C8B-B14F-4D97-AF65-F5344CB8AC3E}">
-        <p14:creationId xmlns:p14="http://schemas.microsoft.com/office/powerpoint/2010/main" xmlns="" val="1792839519"/>
+        <p14:creationId xmlns:p14="http://schemas.microsoft.com/office/powerpoint/2010/main" val="1792839519"/>
       </p:ext>
     </p:extLst>
   </p:cSld>
@@ -10748,7 +13048,7 @@
 </p:sld>
 </file>
 
-<file path=ppt/slides/slide23.xml><?xml version="1.0" encoding="utf-8"?>
+<file path=ppt/slides/slide32.xml><?xml version="1.0" encoding="utf-8"?>
 <p:sld xmlns:a="http://schemas.openxmlformats.org/drawingml/2006/main" xmlns:r="http://schemas.openxmlformats.org/officeDocument/2006/relationships" xmlns:p="http://schemas.openxmlformats.org/presentationml/2006/main">
   <p:cSld>
     <p:spTree>
@@ -10826,7 +13126,7 @@
 </p:sld>
 </file>
 
-<file path=ppt/slides/slide24.xml><?xml version="1.0" encoding="utf-8"?>
+<file path=ppt/slides/slide33.xml><?xml version="1.0" encoding="utf-8"?>
 <p:sld xmlns:a="http://schemas.openxmlformats.org/drawingml/2006/main" xmlns:r="http://schemas.openxmlformats.org/officeDocument/2006/relationships" xmlns:p="http://schemas.openxmlformats.org/presentationml/2006/main">
   <p:cSld>
     <p:spTree>
@@ -10955,7 +13255,7 @@
 </p:sld>
 </file>
 
-<file path=ppt/slides/slide25.xml><?xml version="1.0" encoding="utf-8"?>
+<file path=ppt/slides/slide34.xml><?xml version="1.0" encoding="utf-8"?>
 <p:sld xmlns:a="http://schemas.openxmlformats.org/drawingml/2006/main" xmlns:r="http://schemas.openxmlformats.org/officeDocument/2006/relationships" xmlns:p="http://schemas.openxmlformats.org/presentationml/2006/main">
   <p:cSld>
     <p:spTree>
@@ -11055,7 +13355,7 @@
 </p:sld>
 </file>
 
-<file path=ppt/slides/slide26.xml><?xml version="1.0" encoding="utf-8"?>
+<file path=ppt/slides/slide35.xml><?xml version="1.0" encoding="utf-8"?>
 <p:sld xmlns:a="http://schemas.openxmlformats.org/drawingml/2006/main" xmlns:r="http://schemas.openxmlformats.org/officeDocument/2006/relationships" xmlns:p="http://schemas.openxmlformats.org/presentationml/2006/main">
   <p:cSld>
     <p:spTree>
@@ -11140,7 +13440,7 @@
 </p:sld>
 </file>
 
-<file path=ppt/slides/slide27.xml><?xml version="1.0" encoding="utf-8"?>
+<file path=ppt/slides/slide36.xml><?xml version="1.0" encoding="utf-8"?>
 <p:sld xmlns:a="http://schemas.openxmlformats.org/drawingml/2006/main" xmlns:r="http://schemas.openxmlformats.org/officeDocument/2006/relationships" xmlns:p="http://schemas.openxmlformats.org/presentationml/2006/main">
   <p:cSld>
     <p:spTree>
@@ -11287,7 +13587,7 @@
     </p:spTree>
     <p:extLst>
       <p:ext uri="{BB962C8B-B14F-4D97-AF65-F5344CB8AC3E}">
-        <p14:creationId xmlns:p14="http://schemas.microsoft.com/office/powerpoint/2010/main" xmlns="" val="2816622573"/>
+        <p14:creationId xmlns:p14="http://schemas.microsoft.com/office/powerpoint/2010/main" val="2816622573"/>
       </p:ext>
     </p:extLst>
   </p:cSld>
@@ -11304,7 +13604,7 @@
 </p:sld>
 </file>
 
-<file path=ppt/slides/slide28.xml><?xml version="1.0" encoding="utf-8"?>
+<file path=ppt/slides/slide37.xml><?xml version="1.0" encoding="utf-8"?>
 <p:sld xmlns:a="http://schemas.openxmlformats.org/drawingml/2006/main" xmlns:r="http://schemas.openxmlformats.org/officeDocument/2006/relationships" xmlns:p="http://schemas.openxmlformats.org/presentationml/2006/main">
   <p:cSld>
     <p:spTree>
@@ -11460,7 +13760,7 @@
     </p:spTree>
     <p:extLst>
       <p:ext uri="{BB962C8B-B14F-4D97-AF65-F5344CB8AC3E}">
-        <p14:creationId xmlns:p14="http://schemas.microsoft.com/office/powerpoint/2010/main" xmlns="" val="513423885"/>
+        <p14:creationId xmlns:p14="http://schemas.microsoft.com/office/powerpoint/2010/main" val="513423885"/>
       </p:ext>
     </p:extLst>
   </p:cSld>
@@ -11477,7 +13777,7 @@
 </p:sld>
 </file>
 
-<file path=ppt/slides/slide29.xml><?xml version="1.0" encoding="utf-8"?>
+<file path=ppt/slides/slide38.xml><?xml version="1.0" encoding="utf-8"?>
 <p:sld xmlns:a="http://schemas.openxmlformats.org/drawingml/2006/main" xmlns:r="http://schemas.openxmlformats.org/officeDocument/2006/relationships" xmlns:p="http://schemas.openxmlformats.org/presentationml/2006/main">
   <p:cSld>
     <p:spTree>
@@ -11651,114 +13951,9 @@
     </p:spTree>
     <p:extLst>
       <p:ext uri="{BB962C8B-B14F-4D97-AF65-F5344CB8AC3E}">
-        <p14:creationId xmlns:p14="http://schemas.microsoft.com/office/powerpoint/2010/main" xmlns="" val="462276403"/>
+        <p14:creationId xmlns:p14="http://schemas.microsoft.com/office/powerpoint/2010/main" val="462276403"/>
       </p:ext>
     </p:extLst>
-  </p:cSld>
-  <p:clrMapOvr>
-    <a:masterClrMapping/>
-  </p:clrMapOvr>
-  <p:timing>
-    <p:tnLst>
-      <p:par>
-        <p:cTn id="1" dur="indefinite" restart="never" nodeType="tmRoot"/>
-      </p:par>
-    </p:tnLst>
-  </p:timing>
-</p:sld>
-</file>
-
-<file path=ppt/slides/slide3.xml><?xml version="1.0" encoding="utf-8"?>
-<p:sld xmlns:a="http://schemas.openxmlformats.org/drawingml/2006/main" xmlns:r="http://schemas.openxmlformats.org/officeDocument/2006/relationships" xmlns:p="http://schemas.openxmlformats.org/presentationml/2006/main">
-  <p:cSld>
-    <p:spTree>
-      <p:nvGrpSpPr>
-        <p:cNvPr id="1" name=""/>
-        <p:cNvGrpSpPr/>
-        <p:nvPr/>
-      </p:nvGrpSpPr>
-      <p:grpSpPr>
-        <a:xfrm>
-          <a:off x="0" y="0"/>
-          <a:ext cx="0" cy="0"/>
-          <a:chOff x="0" y="0"/>
-          <a:chExt cx="0" cy="0"/>
-        </a:xfrm>
-      </p:grpSpPr>
-      <p:sp>
-        <p:nvSpPr>
-          <p:cNvPr id="2" name="标题 1"/>
-          <p:cNvSpPr>
-            <a:spLocks noGrp="1"/>
-          </p:cNvSpPr>
-          <p:nvPr>
-            <p:ph type="title"/>
-          </p:nvPr>
-        </p:nvSpPr>
-        <p:spPr/>
-        <p:txBody>
-          <a:bodyPr/>
-          <a:lstStyle/>
-          <a:p>
-            <a:r>
-              <a:rPr lang="en-US" altLang="zh-CN" dirty="0" smtClean="0"/>
-              <a:t>sorted set</a:t>
-            </a:r>
-            <a:endParaRPr lang="zh-CN" altLang="en-US" dirty="0"/>
-          </a:p>
-        </p:txBody>
-      </p:sp>
-      <p:sp>
-        <p:nvSpPr>
-          <p:cNvPr id="3" name="内容占位符 2"/>
-          <p:cNvSpPr>
-            <a:spLocks noGrp="1"/>
-          </p:cNvSpPr>
-          <p:nvPr>
-            <p:ph idx="1"/>
-          </p:nvPr>
-        </p:nvSpPr>
-        <p:spPr/>
-        <p:txBody>
-          <a:bodyPr/>
-          <a:lstStyle/>
-          <a:p>
-            <a:r>
-              <a:rPr lang="en-US" altLang="zh-CN" dirty="0" err="1" smtClean="0"/>
-              <a:t>zscore</a:t>
-            </a:r>
-            <a:endParaRPr lang="en-US" altLang="zh-CN" dirty="0" smtClean="0"/>
-          </a:p>
-          <a:p>
-            <a:r>
-              <a:rPr lang="en-US" altLang="zh-CN" dirty="0" err="1" smtClean="0"/>
-              <a:t>zrank</a:t>
-            </a:r>
-            <a:endParaRPr lang="en-US" altLang="zh-CN" dirty="0" smtClean="0"/>
-          </a:p>
-          <a:p>
-            <a:r>
-              <a:rPr lang="en-US" altLang="zh-CN" dirty="0" err="1" smtClean="0"/>
-              <a:t>zrangebyscore</a:t>
-            </a:r>
-            <a:endParaRPr lang="en-US" altLang="zh-CN" dirty="0" smtClean="0"/>
-          </a:p>
-          <a:p>
-            <a:r>
-              <a:rPr lang="en-US" altLang="zh-CN" dirty="0" err="1" smtClean="0"/>
-              <a:t>zinterstore</a:t>
-            </a:r>
-            <a:endParaRPr lang="en-US" altLang="zh-CN" dirty="0" smtClean="0"/>
-          </a:p>
-          <a:p>
-            <a:endParaRPr lang="en-US" dirty="0" smtClean="0"/>
-          </a:p>
-          <a:p>
-            <a:endParaRPr lang="zh-CN" altLang="en-US" dirty="0"/>
-          </a:p>
-        </p:txBody>
-      </p:sp>
-    </p:spTree>
   </p:cSld>
   <p:clrMapOvr>
     <a:masterClrMapping/>
@@ -12780,7 +14975,7 @@
     </p:spTree>
     <p:extLst>
       <p:ext uri="{BB962C8B-B14F-4D97-AF65-F5344CB8AC3E}">
-        <p14:creationId xmlns:p14="http://schemas.microsoft.com/office/powerpoint/2010/main" xmlns="" val="707460935"/>
+        <p14:creationId xmlns:p14="http://schemas.microsoft.com/office/powerpoint/2010/main" val="707460935"/>
       </p:ext>
     </p:extLst>
   </p:cSld>
@@ -13079,7 +15274,7 @@
   <a:extraClrSchemeLst/>
   <a:extLst>
     <a:ext uri="{05A4C25C-085E-4340-85A3-A5531E510DB2}">
-      <thm15:themeFamily xmlns:thm15="http://schemas.microsoft.com/office/thememl/2012/main" xmlns="" name="Office Theme" id="{62F939B6-93AF-4DB8-9C6B-D6C7DFDC589F}" vid="{4A3C46E8-61CC-4603-A589-7422A47A8E4A}"/>
+      <thm15:themeFamily xmlns:thm15="http://schemas.microsoft.com/office/thememl/2012/main" name="Office Theme" id="{62F939B6-93AF-4DB8-9C6B-D6C7DFDC589F}" vid="{4A3C46E8-61CC-4603-A589-7422A47A8E4A}"/>
     </a:ext>
   </a:extLst>
 </a:theme>
@@ -13367,7 +15562,7 @@
   <a:extraClrSchemeLst/>
   <a:extLst>
     <a:ext uri="{05A4C25C-085E-4340-85A3-A5531E510DB2}">
-      <thm15:themeFamily xmlns:thm15="http://schemas.microsoft.com/office/thememl/2012/main" xmlns="" name="Office Theme" id="{62F939B6-93AF-4DB8-9C6B-D6C7DFDC589F}" vid="{4A3C46E8-61CC-4603-A589-7422A47A8E4A}"/>
+      <thm15:themeFamily xmlns:thm15="http://schemas.microsoft.com/office/thememl/2012/main" name="Office Theme" id="{62F939B6-93AF-4DB8-9C6B-D6C7DFDC589F}" vid="{4A3C46E8-61CC-4603-A589-7422A47A8E4A}"/>
     </a:ext>
   </a:extLst>
 </a:theme>

--- a/redis/redis分享.pptx
+++ b/redis/redis分享.pptx
@@ -246,7 +246,7 @@
             <a:fld id="{28BFC038-C061-45F2-8F77-33FB5AE93C97}" type="datetimeFigureOut">
               <a:rPr lang="zh-CN" altLang="en-US" smtClean="0"/>
               <a:pPr/>
-              <a:t>2018/3/23</a:t>
+              <a:t>2018/3/25</a:t>
             </a:fld>
             <a:endParaRPr lang="zh-CN" altLang="en-US"/>
           </a:p>
@@ -5598,7 +5598,7 @@
             <a:fld id="{530820CF-B880-4189-942D-D702A7CBA730}" type="datetimeFigureOut">
               <a:rPr lang="zh-CN" altLang="en-US" smtClean="0"/>
               <a:pPr/>
-              <a:t>2018/3/23</a:t>
+              <a:t>2018/3/25</a:t>
             </a:fld>
             <a:endParaRPr lang="zh-CN" altLang="en-US"/>
           </a:p>
@@ -5765,7 +5765,7 @@
             <a:fld id="{530820CF-B880-4189-942D-D702A7CBA730}" type="datetimeFigureOut">
               <a:rPr lang="zh-CN" altLang="en-US" smtClean="0"/>
               <a:pPr/>
-              <a:t>2018/3/23</a:t>
+              <a:t>2018/3/25</a:t>
             </a:fld>
             <a:endParaRPr lang="zh-CN" altLang="en-US"/>
           </a:p>
@@ -5942,7 +5942,7 @@
             <a:fld id="{530820CF-B880-4189-942D-D702A7CBA730}" type="datetimeFigureOut">
               <a:rPr lang="zh-CN" altLang="en-US" smtClean="0"/>
               <a:pPr/>
-              <a:t>2018/3/23</a:t>
+              <a:t>2018/3/25</a:t>
             </a:fld>
             <a:endParaRPr lang="zh-CN" altLang="en-US"/>
           </a:p>
@@ -6109,7 +6109,7 @@
             <a:fld id="{530820CF-B880-4189-942D-D702A7CBA730}" type="datetimeFigureOut">
               <a:rPr lang="zh-CN" altLang="en-US" smtClean="0"/>
               <a:pPr/>
-              <a:t>2018/3/23</a:t>
+              <a:t>2018/3/25</a:t>
             </a:fld>
             <a:endParaRPr lang="zh-CN" altLang="en-US"/>
           </a:p>
@@ -6352,7 +6352,7 @@
             <a:fld id="{530820CF-B880-4189-942D-D702A7CBA730}" type="datetimeFigureOut">
               <a:rPr lang="zh-CN" altLang="en-US" smtClean="0"/>
               <a:pPr/>
-              <a:t>2018/3/23</a:t>
+              <a:t>2018/3/25</a:t>
             </a:fld>
             <a:endParaRPr lang="zh-CN" altLang="en-US"/>
           </a:p>
@@ -6637,7 +6637,7 @@
             <a:fld id="{530820CF-B880-4189-942D-D702A7CBA730}" type="datetimeFigureOut">
               <a:rPr lang="zh-CN" altLang="en-US" smtClean="0"/>
               <a:pPr/>
-              <a:t>2018/3/23</a:t>
+              <a:t>2018/3/25</a:t>
             </a:fld>
             <a:endParaRPr lang="zh-CN" altLang="en-US"/>
           </a:p>
@@ -7056,7 +7056,7 @@
             <a:fld id="{530820CF-B880-4189-942D-D702A7CBA730}" type="datetimeFigureOut">
               <a:rPr lang="zh-CN" altLang="en-US" smtClean="0"/>
               <a:pPr/>
-              <a:t>2018/3/23</a:t>
+              <a:t>2018/3/25</a:t>
             </a:fld>
             <a:endParaRPr lang="zh-CN" altLang="en-US"/>
           </a:p>
@@ -7171,7 +7171,7 @@
             <a:fld id="{530820CF-B880-4189-942D-D702A7CBA730}" type="datetimeFigureOut">
               <a:rPr lang="zh-CN" altLang="en-US" smtClean="0"/>
               <a:pPr/>
-              <a:t>2018/3/23</a:t>
+              <a:t>2018/3/25</a:t>
             </a:fld>
             <a:endParaRPr lang="zh-CN" altLang="en-US"/>
           </a:p>
@@ -7263,7 +7263,7 @@
             <a:fld id="{530820CF-B880-4189-942D-D702A7CBA730}" type="datetimeFigureOut">
               <a:rPr lang="zh-CN" altLang="en-US" smtClean="0"/>
               <a:pPr/>
-              <a:t>2018/3/23</a:t>
+              <a:t>2018/3/25</a:t>
             </a:fld>
             <a:endParaRPr lang="zh-CN" altLang="en-US"/>
           </a:p>
@@ -7537,7 +7537,7 @@
             <a:fld id="{530820CF-B880-4189-942D-D702A7CBA730}" type="datetimeFigureOut">
               <a:rPr lang="zh-CN" altLang="en-US" smtClean="0"/>
               <a:pPr/>
-              <a:t>2018/3/23</a:t>
+              <a:t>2018/3/25</a:t>
             </a:fld>
             <a:endParaRPr lang="zh-CN" altLang="en-US"/>
           </a:p>
@@ -7787,7 +7787,7 @@
             <a:fld id="{530820CF-B880-4189-942D-D702A7CBA730}" type="datetimeFigureOut">
               <a:rPr lang="zh-CN" altLang="en-US" smtClean="0"/>
               <a:pPr/>
-              <a:t>2018/3/23</a:t>
+              <a:t>2018/3/25</a:t>
             </a:fld>
             <a:endParaRPr lang="zh-CN" altLang="en-US"/>
           </a:p>
@@ -7997,7 +7997,7 @@
             <a:fld id="{530820CF-B880-4189-942D-D702A7CBA730}" type="datetimeFigureOut">
               <a:rPr lang="zh-CN" altLang="en-US" smtClean="0"/>
               <a:pPr/>
-              <a:t>2018/3/23</a:t>
+              <a:t>2018/3/25</a:t>
             </a:fld>
             <a:endParaRPr lang="zh-CN" altLang="en-US"/>
           </a:p>
